--- a/live-fx/business/LiveFX_Pitch_EN.pptx
+++ b/live-fx/business/LiveFX_Pitch_EN.pptx
@@ -123,7 +123,7 @@
   <p:extLst>
     <p:ext uri="{521415D9-36F7-43E2-AB2F-B90AF26B5E84}">
       <p14:sectionLst xmlns:p14="http://schemas.microsoft.com/office/powerpoint/2010/main">
-        <p14:section name="Today: LiveFX 2.0" id="{28e2aa81-20e5-0f86-7a8e-761ad2a0f37c}">
+        <p14:section name="Today: LiveFX 2.0" id="{50d5d2a7-930f-bc84-fe24-523efcc85062}">
           <p14:sldIdLst>
             <p14:sldId id="256"/>
             <p14:sldId id="257"/>
@@ -138,7 +138,7 @@
             <p14:sldId id="266"/>
           </p14:sldIdLst>
         </p14:section>
-        <p14:section name="Vision 2027–2029" id="{073e230d-05ad-9141-c9c4-2c1e7f0b0d62}">
+        <p14:section name="Vision 2027–2029" id="{3dde7c9b-c4cb-8715-895b-9def2aa17480}">
           <p14:sldIdLst>
             <p14:sldId id="267"/>
             <p14:sldId id="268"/>
@@ -146,7 +146,7 @@
             <p14:sldId id="270"/>
           </p14:sldIdLst>
         </p14:section>
-        <p14:section name="Team and ask" id="{5101b0e1-21e8-3503-9ee3-da264a9a4528}">
+        <p14:section name="Team and ask" id="{bd81c284-e7a6-5c1e-c1c3-b61af3c94955}">
           <p14:sldIdLst>
             <p14:sldId id="271"/>
             <p14:sldId id="272"/>
@@ -1556,7 +1556,7 @@
           <a:p>
             <a:r>
               <a:rPr lang="en-US" dirty="0"/>
-              <a:t>The founder is user, content supplier and product owner in one person – that's why the product works with dialects, in portrait and in Turkish. And as a children's book author, she brings the first publishing and education case herself. The seed round funds two hires; for WortBild, an EdTech advisory board provides expert review.</a:t>
+              <a:t>The founder is user, content supplier and product owner in one person – that's why the product works with dialects, in portrait and in Turkish. And as a children's book author, he brings the first publishing and education case himself. Gönül Demet leads investor relations and is the contact for the pre-seed round. The pre-seed round (€500,000) funds two hires; for WortBild, an EdTech advisory board provides expert review.</a:t>
             </a:r>
             <a:endParaRPr lang="en-US" dirty="0"/>
           </a:p>
@@ -1644,7 +1644,7 @@
           <a:p>
             <a:r>
               <a:rPr lang="en-US" dirty="0"/>
-              <a:t>End concretely: what we need is a contact on the live team and an 8-week pilot with 20 creators. We deliver the overlay, packs, support and the measurement (watch time, gifts, clips from lives). New: for WortBild and Story Film we're looking for a second pilot with education providers, language-learning platforms or publishers – the first publisher case is the founder's own children's book series. This deck is also available in German and Turkish.</a:t>
+              <a:t>End concretely: what we need is a contact on the live team and an 8-week pilot with 20 creators. We deliver the overlay, packs, support and the measurement (watch time, gifts, clips from lives). New: for WortBild and Story Film we're looking for a second pilot with education providers, language-learning platforms or publishers – the first publisher case is the founder's own children's book series. On the round: €500,000 pre-seed for LiveFX and all its projects, 24 months. Proposed use of funds: team €250k, vision lines €100k (WortBild/language learning and the story engine first), go-to-market €75k, legal/trademark/data protection €50k, reserve €25k. With no revenue at all that lasts about 22 months; the conservative scenario is covered for three years (business plan 11.6). Investor contact: Gönül Demet. This deck is also available in German and Turkish.</a:t>
             </a:r>
             <a:endParaRPr lang="en-US" dirty="0"/>
           </a:p>
@@ -2172,7 +2172,7 @@
           <a:p>
             <a:r>
               <a:rPr lang="en-US" dirty="0"/>
-              <a:t>Be upfront: the TAM comes from secondary sources with a wide range; SAM and SOM are our estimates, not a study. The point isn't the exact number – it's that even a small share of paying live creators sustains a team, and the real lever is platform integration, not the subscription. New at the bottom: the vision opens adjacent markets – AI video $3.67B [Source 23], language-learning apps $1.54B [Source 33], video editing $2.68B [Source 51], German audiobooks €374M [Source 19]. We don't count any of them in the SOM.</a:t>
+              <a:t>Be upfront: the TAM comes from secondary sources with a wide range; SAM and SOM are our estimates, not a study. The point isn't the exact number – it's that even a small share of paying live creators sustains a team, and the real lever is platform integration, not the subscription. New at the bottom: the vision opens adjacent markets – AI video $3.67B [Source 23], language-learning apps $1.54B [Source 33], video editing $2.68B [Source 51], German audiobooks €374M [Source 19]. We don't count any of them in the SOM. The SOM matches the business plan (section 6): 5,000–15,000 paying users in year 3; the base scenario assumes an average of 7,500 Pro users.</a:t>
             </a:r>
             <a:endParaRPr lang="en-US" dirty="0"/>
           </a:p>
@@ -3131,7 +3131,7 @@
                 <a:ea typeface="Arial" pitchFamily="34" charset="-122"/>
                 <a:cs typeface="Arial" pitchFamily="34" charset="-120"/>
               </a:rPr>
-              <a:t>[Name]</a:t>
+              <a:t>Tuncay Sancak</a:t>
             </a:r>
             <a:pPr indent="0" marL="0">
               <a:buNone/>
@@ -3145,7 +3145,7 @@
                 <a:ea typeface="Arial" pitchFamily="34" charset="-122"/>
                 <a:cs typeface="Arial" pitchFamily="34" charset="-120"/>
               </a:rPr>
-              <a:t>  ·  Founder, author &amp; live streamer</a:t>
+              <a:t>  ·  Founder &amp; Inventor, Managing Director</a:t>
             </a:r>
             <a:endParaRPr lang="en-US" sz="1300" dirty="0"/>
           </a:p>
@@ -3162,7 +3162,7 @@
                 <a:ea typeface="Arial" pitchFamily="34" charset="-122"/>
                 <a:cs typeface="Arial" pitchFamily="34" charset="-120"/>
               </a:rPr>
-              <a:t>[Date]  ·  [Email]</a:t>
+              <a:t>Investor Relations: Gönül Demet  ·  [Email]  ·  October 2026  ·  Confidential</a:t>
             </a:r>
             <a:endParaRPr lang="en-US" sz="1300" dirty="0"/>
           </a:p>
@@ -3288,8 +3288,8 @@
         </p:nvSpPr>
         <p:spPr>
           <a:xfrm>
-            <a:off x="9357055" y="6473952"/>
-            <a:ext cx="2286000" cy="228600"/>
+            <a:off x="7071055" y="6473952"/>
+            <a:ext cx="4572000" cy="228600"/>
           </a:xfrm>
           <a:prstGeom prst="rect">
             <a:avLst/>
@@ -3313,7 +3313,7 @@
                 <a:ea typeface="Arial" pitchFamily="34" charset="-122"/>
                 <a:cs typeface="Arial" pitchFamily="34" charset="-120"/>
               </a:rPr>
-              <a:t>LiveFX  ·  10</a:t>
+              <a:t>Confidential · October 2026  ·  LiveFX  ·  10</a:t>
             </a:r>
             <a:endParaRPr lang="en-US" sz="900" dirty="0"/>
           </a:p>
@@ -4472,8 +4472,8 @@
         </p:nvSpPr>
         <p:spPr>
           <a:xfrm>
-            <a:off x="9357055" y="6473952"/>
-            <a:ext cx="2286000" cy="228600"/>
+            <a:off x="7071055" y="6473952"/>
+            <a:ext cx="4572000" cy="228600"/>
           </a:xfrm>
           <a:prstGeom prst="rect">
             <a:avLst/>
@@ -4497,7 +4497,7 @@
                 <a:ea typeface="Arial" pitchFamily="34" charset="-122"/>
                 <a:cs typeface="Arial" pitchFamily="34" charset="-120"/>
               </a:rPr>
-              <a:t>LiveFX  ·  11</a:t>
+              <a:t>Confidential · October 2026  ·  LiveFX  ·  11</a:t>
             </a:r>
             <a:endParaRPr lang="en-US" sz="900" dirty="0"/>
           </a:p>
@@ -5453,8 +5453,8 @@
         </p:nvSpPr>
         <p:spPr>
           <a:xfrm>
-            <a:off x="9357055" y="6473952"/>
-            <a:ext cx="2286000" cy="228600"/>
+            <a:off x="7071055" y="6473952"/>
+            <a:ext cx="4572000" cy="228600"/>
           </a:xfrm>
           <a:prstGeom prst="rect">
             <a:avLst/>
@@ -5478,7 +5478,7 @@
                 <a:ea typeface="Arial" pitchFamily="34" charset="-122"/>
                 <a:cs typeface="Arial" pitchFamily="34" charset="-120"/>
               </a:rPr>
-              <a:t>LiveFX  ·  12</a:t>
+              <a:t>Confidential · October 2026  ·  LiveFX  ·  12</a:t>
             </a:r>
             <a:endParaRPr lang="en-US" sz="900" dirty="0"/>
           </a:p>
@@ -7188,8 +7188,8 @@
         </p:nvSpPr>
         <p:spPr>
           <a:xfrm>
-            <a:off x="9357055" y="6473952"/>
-            <a:ext cx="2286000" cy="228600"/>
+            <a:off x="7071055" y="6473952"/>
+            <a:ext cx="4572000" cy="228600"/>
           </a:xfrm>
           <a:prstGeom prst="rect">
             <a:avLst/>
@@ -7213,7 +7213,7 @@
                 <a:ea typeface="Arial" pitchFamily="34" charset="-122"/>
                 <a:cs typeface="Arial" pitchFamily="34" charset="-120"/>
               </a:rPr>
-              <a:t>LiveFX  ·  13</a:t>
+              <a:t>Confidential · October 2026  ·  LiveFX  ·  13</a:t>
             </a:r>
             <a:endParaRPr lang="en-US" sz="900" dirty="0"/>
           </a:p>
@@ -10527,8 +10527,8 @@
         </p:nvSpPr>
         <p:spPr>
           <a:xfrm>
-            <a:off x="9357055" y="6473952"/>
-            <a:ext cx="2286000" cy="228600"/>
+            <a:off x="7071055" y="6473952"/>
+            <a:ext cx="4572000" cy="228600"/>
           </a:xfrm>
           <a:prstGeom prst="rect">
             <a:avLst/>
@@ -10552,7 +10552,7 @@
                 <a:ea typeface="Arial" pitchFamily="34" charset="-122"/>
                 <a:cs typeface="Arial" pitchFamily="34" charset="-120"/>
               </a:rPr>
-              <a:t>LiveFX  ·  14</a:t>
+              <a:t>Confidential · October 2026  ·  LiveFX  ·  14</a:t>
             </a:r>
             <a:endParaRPr lang="en-US" sz="900" dirty="0"/>
           </a:p>
@@ -11995,8 +11995,8 @@
         </p:nvSpPr>
         <p:spPr>
           <a:xfrm>
-            <a:off x="9357055" y="6473952"/>
-            <a:ext cx="2286000" cy="228600"/>
+            <a:off x="7071055" y="6473952"/>
+            <a:ext cx="4572000" cy="228600"/>
           </a:xfrm>
           <a:prstGeom prst="rect">
             <a:avLst/>
@@ -12020,7 +12020,7 @@
                 <a:ea typeface="Arial" pitchFamily="34" charset="-122"/>
                 <a:cs typeface="Arial" pitchFamily="34" charset="-120"/>
               </a:rPr>
-              <a:t>LiveFX  ·  15</a:t>
+              <a:t>Confidential · October 2026  ·  LiveFX  ·  15</a:t>
             </a:r>
             <a:endParaRPr lang="en-US" sz="900" dirty="0"/>
           </a:p>
@@ -14734,7 +14734,7 @@
                 <a:ea typeface="Arial" pitchFamily="34" charset="-122"/>
                 <a:cs typeface="Arial" pitchFamily="34" charset="-120"/>
               </a:rPr>
-              <a:t>USER, AUTHOR, FOUNDER</a:t>
+              <a:t>FOUNDER, INVENTOR, USER</a:t>
             </a:r>
             <a:endParaRPr lang="en-US" sz="1000" dirty="0"/>
           </a:p>
@@ -14789,8 +14789,8 @@
         </p:nvSpPr>
         <p:spPr>
           <a:xfrm>
-            <a:off x="9357055" y="6473952"/>
-            <a:ext cx="2286000" cy="228600"/>
+            <a:off x="7071055" y="6473952"/>
+            <a:ext cx="4572000" cy="228600"/>
           </a:xfrm>
           <a:prstGeom prst="rect">
             <a:avLst/>
@@ -14814,7 +14814,7 @@
                 <a:ea typeface="Arial" pitchFamily="34" charset="-122"/>
                 <a:cs typeface="Arial" pitchFamily="34" charset="-120"/>
               </a:rPr>
-              <a:t>LiveFX  ·  16</a:t>
+              <a:t>Confidential · October 2026  ·  LiveFX  ·  16</a:t>
             </a:r>
             <a:endParaRPr lang="en-US" sz="900" dirty="0"/>
           </a:p>
@@ -14829,11 +14829,11 @@
         <p:spPr>
           <a:xfrm>
             <a:off x="548640" y="1371600"/>
-            <a:ext cx="5120640" cy="4526280"/>
+            <a:ext cx="5120640" cy="3246120"/>
           </a:xfrm>
           <a:prstGeom prst="roundRect">
             <a:avLst>
-              <a:gd name="adj" fmla="val 2424"/>
+              <a:gd name="adj" fmla="val 3380"/>
             </a:avLst>
           </a:prstGeom>
           <a:solidFill>
@@ -14899,7 +14899,7 @@
               <a:buNone/>
             </a:pPr>
             <a:r>
-              <a:rPr lang="en-US" sz="1200" b="1" dirty="0">
+              <a:rPr lang="en-US" sz="2000" b="1" dirty="0">
                 <a:solidFill>
                   <a:srgbClr val="FFFFFF"/>
                 </a:solidFill>
@@ -14907,9 +14907,9 @@
                 <a:ea typeface="Arial" pitchFamily="34" charset="-122"/>
                 <a:cs typeface="Arial" pitchFamily="34" charset="-120"/>
               </a:rPr>
-              <a:t>[Photo]</a:t>
-            </a:r>
-            <a:endParaRPr lang="en-US" sz="1200" dirty="0"/>
+              <a:t>TS</a:t>
+            </a:r>
+            <a:endParaRPr lang="en-US" sz="2000" dirty="0"/>
           </a:p>
         </p:txBody>
       </p:sp>
@@ -14948,7 +14948,7 @@
                 <a:ea typeface="Arial" pitchFamily="34" charset="-122"/>
                 <a:cs typeface="Arial" pitchFamily="34" charset="-120"/>
               </a:rPr>
-              <a:t>[Name]</a:t>
+              <a:t>Tuncay Sancak</a:t>
             </a:r>
             <a:endParaRPr lang="en-US" sz="2200" dirty="0"/>
           </a:p>
@@ -14989,7 +14989,7 @@
                 <a:ea typeface="Arial" pitchFamily="34" charset="-122"/>
                 <a:cs typeface="Arial" pitchFamily="34" charset="-120"/>
               </a:rPr>
-              <a:t>Founder · German-Turkish author &amp; live streamer</a:t>
+              <a:t>Founder &amp; Inventor · Managing Director · German-Turkish author &amp; live streamer</a:t>
             </a:r>
             <a:endParaRPr lang="en-US" sz="1200" dirty="0"/>
           </a:p>
@@ -15003,8 +15003,8 @@
         </p:nvSpPr>
         <p:spPr>
           <a:xfrm>
-            <a:off x="914400" y="3200400"/>
-            <a:ext cx="4480560" cy="2560320"/>
+            <a:off x="914400" y="3108960"/>
+            <a:ext cx="4480560" cy="1417320"/>
           </a:xfrm>
           <a:prstGeom prst="rect">
             <a:avLst/>
@@ -15020,7 +15020,7 @@
           <a:p>
             <a:pPr marL="203200" indent="-203200">
               <a:spcAft>
-                <a:spcPts val="600"/>
+                <a:spcPts val="400"/>
               </a:spcAft>
               <a:buSzPct val="100000"/>
               <a:buChar char="•"/>
@@ -15034,14 +15034,14 @@
                 <a:ea typeface="Arial" pitchFamily="34" charset="-122"/>
                 <a:cs typeface="Arial" pitchFamily="34" charset="-120"/>
               </a:rPr>
-              <a:t>Product, content, community – with her own streams as the test lab</a:t>
+              <a:t>Product, content, community – with his own streams as the test lab</a:t>
             </a:r>
             <a:endParaRPr lang="en-US" sz="1250" dirty="0"/>
           </a:p>
           <a:p>
             <a:pPr marL="203200" indent="-203200">
               <a:spcAft>
-                <a:spcPts val="600"/>
+                <a:spcPts val="400"/>
               </a:spcAft>
               <a:buSzPct val="100000"/>
               <a:buChar char="•"/>
@@ -15062,7 +15062,7 @@
           <a:p>
             <a:pPr marL="203200" indent="-203200">
               <a:spcAft>
-                <a:spcPts val="600"/>
+                <a:spcPts val="400"/>
               </a:spcAft>
               <a:buSzPct val="100000"/>
               <a:buChar char="•"/>
@@ -15083,7 +15083,7 @@
           <a:p>
             <a:pPr marL="203200" indent="-203200">
               <a:spcAft>
-                <a:spcPts val="600"/>
+                <a:spcPts val="400"/>
               </a:spcAft>
               <a:buSzPct val="100000"/>
               <a:buChar char="•"/>
@@ -15106,6 +15106,222 @@
       <p:sp>
         <p:nvSpPr>
           <p:cNvPr id="12" name="Shape 9"/>
+          <p:cNvSpPr/>
+          <p:nvPr/>
+        </p:nvSpPr>
+        <p:spPr>
+          <a:xfrm>
+            <a:off x="548640" y="4754880"/>
+            <a:ext cx="5120640" cy="1143000"/>
+          </a:xfrm>
+          <a:prstGeom prst="roundRect">
+            <a:avLst>
+              <a:gd name="adj" fmla="val 9600"/>
+            </a:avLst>
+          </a:prstGeom>
+          <a:solidFill>
+            <a:srgbClr val="1F2330"/>
+          </a:solidFill>
+          <a:ln w="12700">
+            <a:solidFill>
+              <a:srgbClr val="1F2330"/>
+            </a:solidFill>
+            <a:prstDash val="solid"/>
+          </a:ln>
+        </p:spPr>
+      </p:sp>
+      <p:sp>
+        <p:nvSpPr>
+          <p:cNvPr id="13" name="Shape 10"/>
+          <p:cNvSpPr/>
+          <p:nvPr/>
+        </p:nvSpPr>
+        <p:spPr>
+          <a:xfrm>
+            <a:off x="914400" y="4956048"/>
+            <a:ext cx="731520" cy="731520"/>
+          </a:xfrm>
+          <a:prstGeom prst="ellipse">
+            <a:avLst/>
+          </a:prstGeom>
+          <a:solidFill>
+            <a:srgbClr val="181B23"/>
+          </a:solidFill>
+          <a:ln w="19050">
+            <a:solidFill>
+              <a:srgbClr val="FFD166"/>
+            </a:solidFill>
+            <a:prstDash val="solid"/>
+          </a:ln>
+        </p:spPr>
+      </p:sp>
+      <p:sp>
+        <p:nvSpPr>
+          <p:cNvPr id="14" name="Text 11"/>
+          <p:cNvSpPr txBox="1"/>
+          <p:nvPr/>
+        </p:nvSpPr>
+        <p:spPr>
+          <a:xfrm>
+            <a:off x="914400" y="4956048"/>
+            <a:ext cx="731520" cy="731520"/>
+          </a:xfrm>
+          <a:prstGeom prst="rect">
+            <a:avLst/>
+          </a:prstGeom>
+          <a:noFill/>
+          <a:ln/>
+        </p:spPr>
+        <p:txBody>
+          <a:bodyPr wrap="square" lIns="0" tIns="0" rIns="0" bIns="0" rtlCol="0" anchor="ctr">
+            <a:normAutofit/>
+          </a:bodyPr>
+          <a:lstStyle/>
+          <a:p>
+            <a:pPr algn="ctr" indent="0" marL="0">
+              <a:buNone/>
+            </a:pPr>
+            <a:r>
+              <a:rPr lang="en-US" sz="1500" b="1" dirty="0">
+                <a:solidFill>
+                  <a:srgbClr val="FFD166"/>
+                </a:solidFill>
+                <a:latin typeface="Arial" pitchFamily="34" charset="0"/>
+                <a:ea typeface="Arial" pitchFamily="34" charset="-122"/>
+                <a:cs typeface="Arial" pitchFamily="34" charset="-120"/>
+              </a:rPr>
+              <a:t>GD</a:t>
+            </a:r>
+            <a:endParaRPr lang="en-US" sz="1500" dirty="0"/>
+          </a:p>
+        </p:txBody>
+      </p:sp>
+      <p:sp>
+        <p:nvSpPr>
+          <p:cNvPr id="15" name="Text 12"/>
+          <p:cNvSpPr txBox="1"/>
+          <p:nvPr/>
+        </p:nvSpPr>
+        <p:spPr>
+          <a:xfrm>
+            <a:off x="1874520" y="4882896"/>
+            <a:ext cx="3611880" cy="347472"/>
+          </a:xfrm>
+          <a:prstGeom prst="rect">
+            <a:avLst/>
+          </a:prstGeom>
+          <a:noFill/>
+          <a:ln/>
+        </p:spPr>
+        <p:txBody>
+          <a:bodyPr wrap="square" lIns="0" tIns="0" rIns="0" bIns="0" rtlCol="0" anchor="t">
+            <a:normAutofit/>
+          </a:bodyPr>
+          <a:lstStyle/>
+          <a:p>
+            <a:pPr indent="0" marL="0">
+              <a:buNone/>
+            </a:pPr>
+            <a:r>
+              <a:rPr lang="en-US" sz="1700" b="1" dirty="0">
+                <a:solidFill>
+                  <a:srgbClr val="FFFFFF"/>
+                </a:solidFill>
+                <a:latin typeface="Arial" pitchFamily="34" charset="0"/>
+                <a:ea typeface="Arial" pitchFamily="34" charset="-122"/>
+                <a:cs typeface="Arial" pitchFamily="34" charset="-120"/>
+              </a:rPr>
+              <a:t>Gönül Demet</a:t>
+            </a:r>
+            <a:endParaRPr lang="en-US" sz="1700" dirty="0"/>
+          </a:p>
+        </p:txBody>
+      </p:sp>
+      <p:sp>
+        <p:nvSpPr>
+          <p:cNvPr id="16" name="Text 13"/>
+          <p:cNvSpPr txBox="1"/>
+          <p:nvPr/>
+        </p:nvSpPr>
+        <p:spPr>
+          <a:xfrm>
+            <a:off x="1874520" y="5230368"/>
+            <a:ext cx="3611880" cy="256032"/>
+          </a:xfrm>
+          <a:prstGeom prst="rect">
+            <a:avLst/>
+          </a:prstGeom>
+          <a:noFill/>
+          <a:ln/>
+        </p:spPr>
+        <p:txBody>
+          <a:bodyPr wrap="square" lIns="0" tIns="0" rIns="0" bIns="0" rtlCol="0" anchor="t">
+            <a:normAutofit/>
+          </a:bodyPr>
+          <a:lstStyle/>
+          <a:p>
+            <a:pPr indent="0" marL="0">
+              <a:buNone/>
+            </a:pPr>
+            <a:r>
+              <a:rPr lang="en-US" sz="1150" b="1" dirty="0">
+                <a:solidFill>
+                  <a:srgbClr val="FFD166"/>
+                </a:solidFill>
+                <a:latin typeface="Arial" pitchFamily="34" charset="0"/>
+                <a:ea typeface="Arial" pitchFamily="34" charset="-122"/>
+                <a:cs typeface="Arial" pitchFamily="34" charset="-120"/>
+              </a:rPr>
+              <a:t>Investor Relations</a:t>
+            </a:r>
+            <a:endParaRPr lang="en-US" sz="1150" dirty="0"/>
+          </a:p>
+        </p:txBody>
+      </p:sp>
+      <p:sp>
+        <p:nvSpPr>
+          <p:cNvPr id="17" name="Text 14"/>
+          <p:cNvSpPr txBox="1"/>
+          <p:nvPr/>
+        </p:nvSpPr>
+        <p:spPr>
+          <a:xfrm>
+            <a:off x="1874520" y="5504688"/>
+            <a:ext cx="3611880" cy="329184"/>
+          </a:xfrm>
+          <a:prstGeom prst="rect">
+            <a:avLst/>
+          </a:prstGeom>
+          <a:noFill/>
+          <a:ln/>
+        </p:spPr>
+        <p:txBody>
+          <a:bodyPr wrap="square" lIns="0" tIns="0" rIns="0" bIns="0" rtlCol="0" anchor="t">
+            <a:normAutofit/>
+          </a:bodyPr>
+          <a:lstStyle/>
+          <a:p>
+            <a:pPr indent="0" marL="0">
+              <a:buNone/>
+            </a:pPr>
+            <a:r>
+              <a:rPr lang="en-US" sz="1100" dirty="0">
+                <a:solidFill>
+                  <a:srgbClr val="9AA3B5"/>
+                </a:solidFill>
+                <a:latin typeface="Arial" pitchFamily="34" charset="0"/>
+                <a:ea typeface="Arial" pitchFamily="34" charset="-122"/>
+                <a:cs typeface="Arial" pitchFamily="34" charset="-120"/>
+              </a:rPr>
+              <a:t>Contact for investors and the pre-seed round</a:t>
+            </a:r>
+            <a:endParaRPr lang="en-US" sz="1100" dirty="0"/>
+          </a:p>
+        </p:txBody>
+      </p:sp>
+      <p:sp>
+        <p:nvSpPr>
+          <p:cNvPr id="18" name="Shape 15"/>
           <p:cNvSpPr/>
           <p:nvPr/>
         </p:nvSpPr>
@@ -15132,7 +15348,7 @@
       </p:sp>
       <p:sp>
         <p:nvSpPr>
-          <p:cNvPr id="13" name="Shape 10"/>
+          <p:cNvPr id="19" name="Shape 16"/>
           <p:cNvSpPr/>
           <p:nvPr/>
         </p:nvSpPr>
@@ -15157,7 +15373,7 @@
       </p:sp>
       <p:sp>
         <p:nvSpPr>
-          <p:cNvPr id="14" name="Text 11"/>
+          <p:cNvPr id="20" name="Text 17"/>
           <p:cNvSpPr txBox="1"/>
           <p:nvPr/>
         </p:nvSpPr>
@@ -15196,7 +15412,7 @@
       </p:sp>
       <p:sp>
         <p:nvSpPr>
-          <p:cNvPr id="15" name="Text 12"/>
+          <p:cNvPr id="21" name="Text 18"/>
           <p:cNvSpPr txBox="1"/>
           <p:nvPr/>
         </p:nvSpPr>
@@ -15237,7 +15453,7 @@
       </p:sp>
       <p:sp>
         <p:nvSpPr>
-          <p:cNvPr id="16" name="Text 13"/>
+          <p:cNvPr id="22" name="Text 19"/>
           <p:cNvSpPr txBox="1"/>
           <p:nvPr/>
         </p:nvSpPr>
@@ -15278,7 +15494,7 @@
       </p:sp>
       <p:sp>
         <p:nvSpPr>
-          <p:cNvPr id="17" name="Shape 14"/>
+          <p:cNvPr id="23" name="Shape 20"/>
           <p:cNvSpPr/>
           <p:nvPr/>
         </p:nvSpPr>
@@ -15305,7 +15521,7 @@
       </p:sp>
       <p:sp>
         <p:nvSpPr>
-          <p:cNvPr id="18" name="Shape 15"/>
+          <p:cNvPr id="24" name="Shape 21"/>
           <p:cNvSpPr/>
           <p:nvPr/>
         </p:nvSpPr>
@@ -15330,7 +15546,7 @@
       </p:sp>
       <p:sp>
         <p:nvSpPr>
-          <p:cNvPr id="19" name="Text 16"/>
+          <p:cNvPr id="25" name="Text 22"/>
           <p:cNvSpPr txBox="1"/>
           <p:nvPr/>
         </p:nvSpPr>
@@ -15369,7 +15585,7 @@
       </p:sp>
       <p:sp>
         <p:nvSpPr>
-          <p:cNvPr id="20" name="Text 17"/>
+          <p:cNvPr id="26" name="Text 23"/>
           <p:cNvSpPr txBox="1"/>
           <p:nvPr/>
         </p:nvSpPr>
@@ -15410,7 +15626,7 @@
       </p:sp>
       <p:sp>
         <p:nvSpPr>
-          <p:cNvPr id="21" name="Text 18"/>
+          <p:cNvPr id="27" name="Text 24"/>
           <p:cNvSpPr txBox="1"/>
           <p:nvPr/>
         </p:nvSpPr>
@@ -15451,7 +15667,7 @@
       </p:sp>
       <p:sp>
         <p:nvSpPr>
-          <p:cNvPr id="22" name="Shape 19"/>
+          <p:cNvPr id="28" name="Shape 25"/>
           <p:cNvSpPr/>
           <p:nvPr/>
         </p:nvSpPr>
@@ -15478,7 +15694,7 @@
       </p:sp>
       <p:sp>
         <p:nvSpPr>
-          <p:cNvPr id="23" name="Shape 20"/>
+          <p:cNvPr id="29" name="Shape 26"/>
           <p:cNvSpPr/>
           <p:nvPr/>
         </p:nvSpPr>
@@ -15503,7 +15719,7 @@
       </p:sp>
       <p:sp>
         <p:nvSpPr>
-          <p:cNvPr id="24" name="Text 21"/>
+          <p:cNvPr id="30" name="Text 27"/>
           <p:cNvSpPr txBox="1"/>
           <p:nvPr/>
         </p:nvSpPr>
@@ -15542,7 +15758,7 @@
       </p:sp>
       <p:sp>
         <p:nvSpPr>
-          <p:cNvPr id="25" name="Text 22"/>
+          <p:cNvPr id="31" name="Text 28"/>
           <p:cNvSpPr txBox="1"/>
           <p:nvPr/>
         </p:nvSpPr>
@@ -15583,7 +15799,7 @@
       </p:sp>
       <p:sp>
         <p:nvSpPr>
-          <p:cNvPr id="26" name="Text 23"/>
+          <p:cNvPr id="32" name="Text 29"/>
           <p:cNvSpPr txBox="1"/>
           <p:nvPr/>
         </p:nvSpPr>
@@ -15616,7 +15832,7 @@
                 <a:ea typeface="Arial" pitchFamily="34" charset="-122"/>
                 <a:cs typeface="Arial" pitchFamily="34" charset="-120"/>
               </a:rPr>
-              <a:t>[Name] · [Name] · EdTech/didactics: [Name]</a:t>
+              <a:t>Wanted: creator management TR · former platform “Live” product lead · EdTech/didactics</a:t>
             </a:r>
             <a:endParaRPr lang="en-US" sz="1200" dirty="0"/>
           </a:p>
@@ -15770,12 +15986,12 @@
         </p:nvSpPr>
         <p:spPr>
           <a:xfrm>
-            <a:off x="548640" y="1828800"/>
-            <a:ext cx="2670734" cy="3246120"/>
+            <a:off x="548640" y="1783080"/>
+            <a:ext cx="2670734" cy="2103120"/>
           </a:xfrm>
           <a:prstGeom prst="roundRect">
             <a:avLst>
-              <a:gd name="adj" fmla="val 4109"/>
+              <a:gd name="adj" fmla="val 5217"/>
             </a:avLst>
           </a:prstGeom>
           <a:solidFill>
@@ -15797,8 +16013,8 @@
         </p:nvSpPr>
         <p:spPr>
           <a:xfrm>
-            <a:off x="777240" y="1993392"/>
-            <a:ext cx="2213534" cy="685800"/>
+            <a:off x="777240" y="1929384"/>
+            <a:ext cx="2213534" cy="457200"/>
           </a:xfrm>
           <a:prstGeom prst="rect">
             <a:avLst/>
@@ -15816,7 +16032,7 @@
               <a:buNone/>
             </a:pPr>
             <a:r>
-              <a:rPr lang="en-US" sz="1800" b="1" dirty="0">
+              <a:rPr lang="en-US" sz="1600" b="1" dirty="0">
                 <a:solidFill>
                   <a:srgbClr val="FF2D75"/>
                 </a:solidFill>
@@ -15826,7 +16042,7 @@
               </a:rPr>
               <a:t>Platform pilot</a:t>
             </a:r>
-            <a:endParaRPr lang="en-US" sz="1800" dirty="0"/>
+            <a:endParaRPr lang="en-US" sz="1600" dirty="0"/>
           </a:p>
         </p:txBody>
       </p:sp>
@@ -15838,8 +16054,8 @@
         </p:nvSpPr>
         <p:spPr>
           <a:xfrm>
-            <a:off x="777240" y="2724912"/>
-            <a:ext cx="2213534" cy="2286000"/>
+            <a:off x="777240" y="2423160"/>
+            <a:ext cx="2213534" cy="1371600"/>
           </a:xfrm>
           <a:prstGeom prst="rect">
             <a:avLst/>
@@ -15857,7 +16073,7 @@
               <a:buNone/>
             </a:pPr>
             <a:r>
-              <a:rPr lang="en-US" sz="1300" dirty="0">
+              <a:rPr lang="en-US" sz="1250" dirty="0">
                 <a:solidFill>
                   <a:srgbClr val="FFFFFF"/>
                 </a:solidFill>
@@ -15867,7 +16083,7 @@
               </a:rPr>
               <a:t>LiveFX as a feature in TikTok LIVE Studio, Instagram Live Producer or YouTube Live. The browser source works today. 8 weeks, 20 creators, measured watch time, gifts and clips.</a:t>
             </a:r>
-            <a:endParaRPr lang="en-US" sz="1300" dirty="0"/>
+            <a:endParaRPr lang="en-US" sz="1250" dirty="0"/>
           </a:p>
         </p:txBody>
       </p:sp>
@@ -15879,121 +16095,12 @@
         </p:nvSpPr>
         <p:spPr>
           <a:xfrm>
-            <a:off x="3356534" y="1828800"/>
-            <a:ext cx="2670734" cy="3246120"/>
+            <a:off x="3356534" y="1783080"/>
+            <a:ext cx="2670734" cy="2103120"/>
           </a:xfrm>
           <a:prstGeom prst="roundRect">
             <a:avLst>
-              <a:gd name="adj" fmla="val 4109"/>
-            </a:avLst>
-          </a:prstGeom>
-          <a:solidFill>
-            <a:srgbClr val="181B23"/>
-          </a:solidFill>
-          <a:ln w="15875">
-            <a:solidFill>
-              <a:srgbClr val="FFD166"/>
-            </a:solidFill>
-            <a:prstDash val="solid"/>
-          </a:ln>
-        </p:spPr>
-      </p:sp>
-      <p:sp>
-        <p:nvSpPr>
-          <p:cNvPr id="9" name="Text 6"/>
-          <p:cNvSpPr txBox="1"/>
-          <p:nvPr/>
-        </p:nvSpPr>
-        <p:spPr>
-          <a:xfrm>
-            <a:off x="3585134" y="1993392"/>
-            <a:ext cx="2213534" cy="685800"/>
-          </a:xfrm>
-          <a:prstGeom prst="rect">
-            <a:avLst/>
-          </a:prstGeom>
-          <a:noFill/>
-          <a:ln/>
-        </p:spPr>
-        <p:txBody>
-          <a:bodyPr wrap="square" lIns="0" tIns="0" rIns="0" bIns="0" rtlCol="0" anchor="t">
-            <a:normAutofit/>
-          </a:bodyPr>
-          <a:lstStyle/>
-          <a:p>
-            <a:pPr indent="0" marL="0">
-              <a:buNone/>
-            </a:pPr>
-            <a:r>
-              <a:rPr lang="en-US" sz="1800" b="1" dirty="0">
-                <a:solidFill>
-                  <a:srgbClr val="FFD166"/>
-                </a:solidFill>
-                <a:latin typeface="Arial" pitchFamily="34" charset="0"/>
-                <a:ea typeface="Arial" pitchFamily="34" charset="-122"/>
-                <a:cs typeface="Arial" pitchFamily="34" charset="-120"/>
-              </a:rPr>
-              <a:t>Education &amp; language pilot</a:t>
-            </a:r>
-            <a:endParaRPr lang="en-US" sz="1800" dirty="0"/>
-          </a:p>
-        </p:txBody>
-      </p:sp>
-      <p:sp>
-        <p:nvSpPr>
-          <p:cNvPr id="10" name="Text 7"/>
-          <p:cNvSpPr txBox="1"/>
-          <p:nvPr/>
-        </p:nvSpPr>
-        <p:spPr>
-          <a:xfrm>
-            <a:off x="3585134" y="2724912"/>
-            <a:ext cx="2213534" cy="2286000"/>
-          </a:xfrm>
-          <a:prstGeom prst="rect">
-            <a:avLst/>
-          </a:prstGeom>
-          <a:noFill/>
-          <a:ln/>
-        </p:spPr>
-        <p:txBody>
-          <a:bodyPr wrap="square" lIns="0" tIns="0" rIns="0" bIns="0" rtlCol="0" anchor="t">
-            <a:normAutofit/>
-          </a:bodyPr>
-          <a:lstStyle/>
-          <a:p>
-            <a:pPr indent="0" marL="0">
-              <a:buNone/>
-            </a:pPr>
-            <a:r>
-              <a:rPr lang="en-US" sz="1300" dirty="0">
-                <a:solidFill>
-                  <a:srgbClr val="FFFFFF"/>
-                </a:solidFill>
-                <a:latin typeface="Arial" pitchFamily="34" charset="0"/>
-                <a:ea typeface="Arial" pitchFamily="34" charset="-122"/>
-                <a:cs typeface="Arial" pitchFamily="34" charset="-120"/>
-              </a:rPr>
-              <a:t>Education providers, integration courses, schools, language platforms and publishers: test WortBild and Story Film in [Number] courses/classes or with [Number] titles.</a:t>
-            </a:r>
-            <a:endParaRPr lang="en-US" sz="1300" dirty="0"/>
-          </a:p>
-        </p:txBody>
-      </p:sp>
-      <p:sp>
-        <p:nvSpPr>
-          <p:cNvPr id="11" name="Shape 8"/>
-          <p:cNvSpPr/>
-          <p:nvPr/>
-        </p:nvSpPr>
-        <p:spPr>
-          <a:xfrm>
-            <a:off x="6164428" y="1828800"/>
-            <a:ext cx="2670734" cy="3246120"/>
-          </a:xfrm>
-          <a:prstGeom prst="roundRect">
-            <a:avLst>
-              <a:gd name="adj" fmla="val 4109"/>
+              <a:gd name="adj" fmla="val 5217"/>
             </a:avLst>
           </a:prstGeom>
           <a:solidFill>
@@ -16009,14 +16116,14 @@
       </p:sp>
       <p:sp>
         <p:nvSpPr>
-          <p:cNvPr id="12" name="Text 9"/>
-          <p:cNvSpPr txBox="1"/>
-          <p:nvPr/>
-        </p:nvSpPr>
-        <p:spPr>
-          <a:xfrm>
-            <a:off x="6393028" y="1993392"/>
-            <a:ext cx="2213534" cy="685800"/>
+          <p:cNvPr id="9" name="Text 6"/>
+          <p:cNvSpPr txBox="1"/>
+          <p:nvPr/>
+        </p:nvSpPr>
+        <p:spPr>
+          <a:xfrm>
+            <a:off x="3585134" y="1929384"/>
+            <a:ext cx="2213534" cy="457200"/>
           </a:xfrm>
           <a:prstGeom prst="rect">
             <a:avLst/>
@@ -16034,30 +16141,30 @@
               <a:buNone/>
             </a:pPr>
             <a:r>
-              <a:rPr lang="en-US" sz="1800" b="1" dirty="0">
-                <a:solidFill>
-                  <a:srgbClr val="2DFFB5"/>
-                </a:solidFill>
-                <a:latin typeface="Arial" pitchFamily="34" charset="0"/>
-                <a:ea typeface="Arial" pitchFamily="34" charset="-122"/>
-                <a:cs typeface="Arial" pitchFamily="34" charset="-120"/>
-              </a:rPr>
-              <a:t>Partners</a:t>
-            </a:r>
-            <a:endParaRPr lang="en-US" sz="1800" dirty="0"/>
-          </a:p>
-        </p:txBody>
-      </p:sp>
-      <p:sp>
-        <p:nvSpPr>
-          <p:cNvPr id="13" name="Text 10"/>
-          <p:cNvSpPr txBox="1"/>
-          <p:nvPr/>
-        </p:nvSpPr>
-        <p:spPr>
-          <a:xfrm>
-            <a:off x="6393028" y="2724912"/>
-            <a:ext cx="2213534" cy="2286000"/>
+              <a:rPr lang="en-US" sz="1550" b="1" dirty="0">
+                <a:solidFill>
+                  <a:srgbClr val="FFD166"/>
+                </a:solidFill>
+                <a:latin typeface="Arial" pitchFamily="34" charset="0"/>
+                <a:ea typeface="Arial" pitchFamily="34" charset="-122"/>
+                <a:cs typeface="Arial" pitchFamily="34" charset="-120"/>
+              </a:rPr>
+              <a:t>Education &amp; language pilot</a:t>
+            </a:r>
+            <a:endParaRPr lang="en-US" sz="1550" dirty="0"/>
+          </a:p>
+        </p:txBody>
+      </p:sp>
+      <p:sp>
+        <p:nvSpPr>
+          <p:cNvPr id="10" name="Text 7"/>
+          <p:cNvSpPr txBox="1"/>
+          <p:nvPr/>
+        </p:nvSpPr>
+        <p:spPr>
+          <a:xfrm>
+            <a:off x="3585134" y="2423160"/>
+            <a:ext cx="2213534" cy="1371600"/>
           </a:xfrm>
           <a:prstGeom prst="rect">
             <a:avLst/>
@@ -16075,7 +16182,7 @@
               <a:buNone/>
             </a:pPr>
             <a:r>
-              <a:rPr lang="en-US" sz="1300" dirty="0">
+              <a:rPr lang="en-US" sz="1250" dirty="0">
                 <a:solidFill>
                   <a:srgbClr val="FFFFFF"/>
                 </a:solidFill>
@@ -16083,26 +16190,26 @@
                 <a:ea typeface="Arial" pitchFamily="34" charset="-122"/>
                 <a:cs typeface="Arial" pitchFamily="34" charset="-120"/>
               </a:rPr>
-              <a:t>Streaming software (OBS plug-in, Streamlabs), creator agencies TR / DACH, audio and ASR vendors, editor vendors (Studio SDK).</a:t>
-            </a:r>
-            <a:endParaRPr lang="en-US" sz="1300" dirty="0"/>
-          </a:p>
-        </p:txBody>
-      </p:sp>
-      <p:sp>
-        <p:nvSpPr>
-          <p:cNvPr id="14" name="Shape 11"/>
+              <a:t>Education providers, integration courses, schools, language platforms and publishers: test WortBild and Story Film in [Number] courses/classes or with [Number] titles.</a:t>
+            </a:r>
+            <a:endParaRPr lang="en-US" sz="1250" dirty="0"/>
+          </a:p>
+        </p:txBody>
+      </p:sp>
+      <p:sp>
+        <p:nvSpPr>
+          <p:cNvPr id="11" name="Shape 8"/>
           <p:cNvSpPr/>
           <p:nvPr/>
         </p:nvSpPr>
         <p:spPr>
           <a:xfrm>
-            <a:off x="8972321" y="1828800"/>
-            <a:ext cx="2670734" cy="3246120"/>
+            <a:off x="6164428" y="1783080"/>
+            <a:ext cx="2670734" cy="2103120"/>
           </a:xfrm>
           <a:prstGeom prst="roundRect">
             <a:avLst>
-              <a:gd name="adj" fmla="val 4109"/>
+              <a:gd name="adj" fmla="val 5217"/>
             </a:avLst>
           </a:prstGeom>
           <a:solidFill>
@@ -16118,14 +16225,123 @@
       </p:sp>
       <p:sp>
         <p:nvSpPr>
+          <p:cNvPr id="12" name="Text 9"/>
+          <p:cNvSpPr txBox="1"/>
+          <p:nvPr/>
+        </p:nvSpPr>
+        <p:spPr>
+          <a:xfrm>
+            <a:off x="6393028" y="1929384"/>
+            <a:ext cx="2213534" cy="457200"/>
+          </a:xfrm>
+          <a:prstGeom prst="rect">
+            <a:avLst/>
+          </a:prstGeom>
+          <a:noFill/>
+          <a:ln/>
+        </p:spPr>
+        <p:txBody>
+          <a:bodyPr wrap="square" lIns="0" tIns="0" rIns="0" bIns="0" rtlCol="0" anchor="t">
+            <a:normAutofit/>
+          </a:bodyPr>
+          <a:lstStyle/>
+          <a:p>
+            <a:pPr indent="0" marL="0">
+              <a:buNone/>
+            </a:pPr>
+            <a:r>
+              <a:rPr lang="en-US" sz="1600" b="1" dirty="0">
+                <a:solidFill>
+                  <a:srgbClr val="2DFFB5"/>
+                </a:solidFill>
+                <a:latin typeface="Arial" pitchFamily="34" charset="0"/>
+                <a:ea typeface="Arial" pitchFamily="34" charset="-122"/>
+                <a:cs typeface="Arial" pitchFamily="34" charset="-120"/>
+              </a:rPr>
+              <a:t>Partners</a:t>
+            </a:r>
+            <a:endParaRPr lang="en-US" sz="1600" dirty="0"/>
+          </a:p>
+        </p:txBody>
+      </p:sp>
+      <p:sp>
+        <p:nvSpPr>
+          <p:cNvPr id="13" name="Text 10"/>
+          <p:cNvSpPr txBox="1"/>
+          <p:nvPr/>
+        </p:nvSpPr>
+        <p:spPr>
+          <a:xfrm>
+            <a:off x="6393028" y="2423160"/>
+            <a:ext cx="2213534" cy="1371600"/>
+          </a:xfrm>
+          <a:prstGeom prst="rect">
+            <a:avLst/>
+          </a:prstGeom>
+          <a:noFill/>
+          <a:ln/>
+        </p:spPr>
+        <p:txBody>
+          <a:bodyPr wrap="square" lIns="0" tIns="0" rIns="0" bIns="0" rtlCol="0" anchor="t">
+            <a:normAutofit/>
+          </a:bodyPr>
+          <a:lstStyle/>
+          <a:p>
+            <a:pPr indent="0" marL="0">
+              <a:buNone/>
+            </a:pPr>
+            <a:r>
+              <a:rPr lang="en-US" sz="1250" dirty="0">
+                <a:solidFill>
+                  <a:srgbClr val="FFFFFF"/>
+                </a:solidFill>
+                <a:latin typeface="Arial" pitchFamily="34" charset="0"/>
+                <a:ea typeface="Arial" pitchFamily="34" charset="-122"/>
+                <a:cs typeface="Arial" pitchFamily="34" charset="-120"/>
+              </a:rPr>
+              <a:t>Streaming software (OBS plug-in, Streamlabs), creator agencies TR / DACH, audio and ASR vendors, editor vendors (Studio SDK).</a:t>
+            </a:r>
+            <a:endParaRPr lang="en-US" sz="1250" dirty="0"/>
+          </a:p>
+        </p:txBody>
+      </p:sp>
+      <p:sp>
+        <p:nvSpPr>
+          <p:cNvPr id="14" name="Shape 11"/>
+          <p:cNvSpPr/>
+          <p:nvPr/>
+        </p:nvSpPr>
+        <p:spPr>
+          <a:xfrm>
+            <a:off x="8972321" y="1783080"/>
+            <a:ext cx="2670734" cy="2103120"/>
+          </a:xfrm>
+          <a:prstGeom prst="roundRect">
+            <a:avLst>
+              <a:gd name="adj" fmla="val 5217"/>
+            </a:avLst>
+          </a:prstGeom>
+          <a:solidFill>
+            <a:srgbClr val="181B23"/>
+          </a:solidFill>
+          <a:ln w="15875">
+            <a:solidFill>
+              <a:srgbClr val="5AD1FF"/>
+            </a:solidFill>
+            <a:prstDash val="solid"/>
+          </a:ln>
+        </p:spPr>
+      </p:sp>
+      <p:sp>
+        <p:nvSpPr>
           <p:cNvPr id="15" name="Text 12"/>
           <p:cNvSpPr txBox="1"/>
           <p:nvPr/>
         </p:nvSpPr>
         <p:spPr>
           <a:xfrm>
-            <a:off x="9200921" y="1993392"/>
-            <a:ext cx="2213534" cy="685800"/>
+            <a:off x="9200921" y="1929384"/>
+            <a:ext cx="2213534" cy="457200"/>
           </a:xfrm>
           <a:prstGeom prst="rect">
             <a:avLst/>
@@ -16143,7 +16359,7 @@
               <a:buNone/>
             </a:pPr>
             <a:r>
-              <a:rPr lang="en-US" sz="1800" b="1" dirty="0">
+              <a:rPr lang="en-US" sz="1600" b="1" dirty="0">
                 <a:solidFill>
                   <a:srgbClr val="5AD1FF"/>
                 </a:solidFill>
@@ -16151,9 +16367,9 @@
                 <a:ea typeface="Arial" pitchFamily="34" charset="-122"/>
                 <a:cs typeface="Arial" pitchFamily="34" charset="-120"/>
               </a:rPr>
-              <a:t>Talks &amp; seed</a:t>
-            </a:r>
-            <a:endParaRPr lang="en-US" sz="1800" dirty="0"/>
+              <a:t>Pre-seed: €500,000</a:t>
+            </a:r>
+            <a:endParaRPr lang="en-US" sz="1600" dirty="0"/>
           </a:p>
         </p:txBody>
       </p:sp>
@@ -16165,8 +16381,8 @@
         </p:nvSpPr>
         <p:spPr>
           <a:xfrm>
-            <a:off x="9200921" y="2724912"/>
-            <a:ext cx="2213534" cy="2286000"/>
+            <a:off x="9200921" y="2423160"/>
+            <a:ext cx="2213534" cy="1371600"/>
           </a:xfrm>
           <a:prstGeom prst="rect">
             <a:avLst/>
@@ -16184,7 +16400,7 @@
               <a:buNone/>
             </a:pPr>
             <a:r>
-              <a:rPr lang="en-US" sz="1300" dirty="0">
+              <a:rPr lang="en-US" sz="1250" dirty="0">
                 <a:solidFill>
                   <a:srgbClr val="FFFFFF"/>
                 </a:solidFill>
@@ -16192,9 +16408,9 @@
                 <a:ea typeface="Arial" pitchFamily="34" charset="-122"/>
                 <a:cs typeface="Arial" pitchFamily="34" charset="-120"/>
               </a:rPr>
-              <a:t>Acquisition talks: technology + team. In parallel: €[Number] seed for 18 months – 2 hires, creator program, pilots.</a:t>
-            </a:r>
-            <a:endParaRPr lang="en-US" sz="1300" dirty="0"/>
+              <a:t>For LiveFX 2.0 and vision lines A–D (WortBild and the story engine first), 24 months. In parallel, open to acquisition talks (technology + team).</a:t>
+            </a:r>
+            <a:endParaRPr lang="en-US" sz="1250" dirty="0"/>
           </a:p>
         </p:txBody>
       </p:sp>
@@ -16206,12 +16422,12 @@
         </p:nvSpPr>
         <p:spPr>
           <a:xfrm>
-            <a:off x="548640" y="5303520"/>
-            <a:ext cx="11094415" cy="713232"/>
+            <a:off x="548640" y="4005072"/>
+            <a:ext cx="11094415" cy="1207008"/>
           </a:xfrm>
           <a:prstGeom prst="roundRect">
             <a:avLst>
-              <a:gd name="adj" fmla="val 15385"/>
+              <a:gd name="adj" fmla="val 9091"/>
             </a:avLst>
           </a:prstGeom>
           <a:solidFill>
@@ -16233,6 +16449,734 @@
         </p:nvSpPr>
         <p:spPr>
           <a:xfrm>
+            <a:off x="822960" y="4087368"/>
+            <a:ext cx="10545775" cy="256032"/>
+          </a:xfrm>
+          <a:prstGeom prst="rect">
+            <a:avLst/>
+          </a:prstGeom>
+          <a:noFill/>
+          <a:ln/>
+        </p:spPr>
+        <p:txBody>
+          <a:bodyPr wrap="square" lIns="0" tIns="0" rIns="0" bIns="0" rtlCol="0" anchor="t">
+            <a:normAutofit/>
+          </a:bodyPr>
+          <a:lstStyle/>
+          <a:p>
+            <a:pPr indent="0" marL="0">
+              <a:buNone/>
+            </a:pPr>
+            <a:r>
+              <a:rPr lang="en-US" sz="1200" b="1" dirty="0">
+                <a:solidFill>
+                  <a:srgbClr val="FFD166"/>
+                </a:solidFill>
+                <a:latin typeface="Arial" pitchFamily="34" charset="0"/>
+                <a:ea typeface="Arial" pitchFamily="34" charset="-122"/>
+                <a:cs typeface="Arial" pitchFamily="34" charset="-120"/>
+              </a:rPr>
+              <a:t>€500,000 pre-seed · 24 months · use of funds – Proposal – please confirm</a:t>
+            </a:r>
+            <a:endParaRPr lang="en-US" sz="1200" dirty="0"/>
+          </a:p>
+        </p:txBody>
+      </p:sp>
+      <p:sp>
+        <p:nvSpPr>
+          <p:cNvPr id="19" name="Shape 16"/>
+          <p:cNvSpPr/>
+          <p:nvPr/>
+        </p:nvSpPr>
+        <p:spPr>
+          <a:xfrm>
+            <a:off x="822960" y="4407408"/>
+            <a:ext cx="5245456" cy="219456"/>
+          </a:xfrm>
+          <a:prstGeom prst="rect">
+            <a:avLst/>
+          </a:prstGeom>
+          <a:solidFill>
+            <a:srgbClr val="FF2D75"/>
+          </a:solidFill>
+          <a:ln w="12700">
+            <a:solidFill>
+              <a:srgbClr val="FF2D75"/>
+            </a:solidFill>
+            <a:prstDash val="solid"/>
+          </a:ln>
+        </p:spPr>
+      </p:sp>
+      <p:sp>
+        <p:nvSpPr>
+          <p:cNvPr id="20" name="Shape 17"/>
+          <p:cNvSpPr/>
+          <p:nvPr/>
+        </p:nvSpPr>
+        <p:spPr>
+          <a:xfrm>
+            <a:off x="6095848" y="4407408"/>
+            <a:ext cx="2081723" cy="219456"/>
+          </a:xfrm>
+          <a:prstGeom prst="rect">
+            <a:avLst/>
+          </a:prstGeom>
+          <a:solidFill>
+            <a:srgbClr val="2DFFB5"/>
+          </a:solidFill>
+          <a:ln w="12700">
+            <a:solidFill>
+              <a:srgbClr val="2DFFB5"/>
+            </a:solidFill>
+            <a:prstDash val="solid"/>
+          </a:ln>
+        </p:spPr>
+      </p:sp>
+      <p:sp>
+        <p:nvSpPr>
+          <p:cNvPr id="21" name="Shape 18"/>
+          <p:cNvSpPr/>
+          <p:nvPr/>
+        </p:nvSpPr>
+        <p:spPr>
+          <a:xfrm>
+            <a:off x="8205003" y="4407408"/>
+            <a:ext cx="1554434" cy="219456"/>
+          </a:xfrm>
+          <a:prstGeom prst="rect">
+            <a:avLst/>
+          </a:prstGeom>
+          <a:solidFill>
+            <a:srgbClr val="FFD166"/>
+          </a:solidFill>
+          <a:ln w="12700">
+            <a:solidFill>
+              <a:srgbClr val="FFD166"/>
+            </a:solidFill>
+            <a:prstDash val="solid"/>
+          </a:ln>
+        </p:spPr>
+      </p:sp>
+      <p:sp>
+        <p:nvSpPr>
+          <p:cNvPr id="22" name="Shape 19"/>
+          <p:cNvSpPr/>
+          <p:nvPr/>
+        </p:nvSpPr>
+        <p:spPr>
+          <a:xfrm>
+            <a:off x="9786869" y="4407408"/>
+            <a:ext cx="1027146" cy="219456"/>
+          </a:xfrm>
+          <a:prstGeom prst="rect">
+            <a:avLst/>
+          </a:prstGeom>
+          <a:solidFill>
+            <a:srgbClr val="5AD1FF"/>
+          </a:solidFill>
+          <a:ln w="12700">
+            <a:solidFill>
+              <a:srgbClr val="5AD1FF"/>
+            </a:solidFill>
+            <a:prstDash val="solid"/>
+          </a:ln>
+        </p:spPr>
+      </p:sp>
+      <p:sp>
+        <p:nvSpPr>
+          <p:cNvPr id="23" name="Shape 20"/>
+          <p:cNvSpPr/>
+          <p:nvPr/>
+        </p:nvSpPr>
+        <p:spPr>
+          <a:xfrm>
+            <a:off x="10841446" y="4407408"/>
+            <a:ext cx="499857" cy="219456"/>
+          </a:xfrm>
+          <a:prstGeom prst="rect">
+            <a:avLst/>
+          </a:prstGeom>
+          <a:solidFill>
+            <a:srgbClr val="9AA3B5"/>
+          </a:solidFill>
+          <a:ln w="12700">
+            <a:solidFill>
+              <a:srgbClr val="9AA3B5"/>
+            </a:solidFill>
+            <a:prstDash val="solid"/>
+          </a:ln>
+        </p:spPr>
+      </p:sp>
+      <p:sp>
+        <p:nvSpPr>
+          <p:cNvPr id="24" name="Shape 21"/>
+          <p:cNvSpPr/>
+          <p:nvPr/>
+        </p:nvSpPr>
+        <p:spPr>
+          <a:xfrm>
+            <a:off x="822960" y="4773168"/>
+            <a:ext cx="109728" cy="109728"/>
+          </a:xfrm>
+          <a:prstGeom prst="ellipse">
+            <a:avLst/>
+          </a:prstGeom>
+          <a:solidFill>
+            <a:srgbClr val="FF2D75"/>
+          </a:solidFill>
+          <a:ln w="12700">
+            <a:solidFill>
+              <a:srgbClr val="FF2D75"/>
+            </a:solidFill>
+            <a:prstDash val="solid"/>
+          </a:ln>
+        </p:spPr>
+      </p:sp>
+      <p:sp>
+        <p:nvSpPr>
+          <p:cNvPr id="25" name="Text 22"/>
+          <p:cNvSpPr txBox="1"/>
+          <p:nvPr/>
+        </p:nvSpPr>
+        <p:spPr>
+          <a:xfrm>
+            <a:off x="1005840" y="4709160"/>
+            <a:ext cx="1834835" cy="237744"/>
+          </a:xfrm>
+          <a:prstGeom prst="rect">
+            <a:avLst/>
+          </a:prstGeom>
+          <a:noFill/>
+          <a:ln/>
+        </p:spPr>
+        <p:txBody>
+          <a:bodyPr wrap="square" lIns="0" tIns="0" rIns="0" bIns="0" rtlCol="0" anchor="t">
+            <a:normAutofit/>
+          </a:bodyPr>
+          <a:lstStyle/>
+          <a:p>
+            <a:pPr indent="0" marL="0">
+              <a:buNone/>
+            </a:pPr>
+            <a:r>
+              <a:rPr lang="en-US" sz="1000" b="1" dirty="0">
+                <a:solidFill>
+                  <a:srgbClr val="FFFFFF"/>
+                </a:solidFill>
+                <a:latin typeface="Arial" pitchFamily="34" charset="0"/>
+                <a:ea typeface="Arial" pitchFamily="34" charset="-122"/>
+                <a:cs typeface="Arial" pitchFamily="34" charset="-120"/>
+              </a:rPr>
+              <a:t>Product &amp; engineering</a:t>
+            </a:r>
+            <a:endParaRPr lang="en-US" sz="1000" dirty="0"/>
+          </a:p>
+        </p:txBody>
+      </p:sp>
+      <p:sp>
+        <p:nvSpPr>
+          <p:cNvPr id="26" name="Text 23"/>
+          <p:cNvSpPr txBox="1"/>
+          <p:nvPr/>
+        </p:nvSpPr>
+        <p:spPr>
+          <a:xfrm>
+            <a:off x="1005840" y="4937760"/>
+            <a:ext cx="1834835" cy="219456"/>
+          </a:xfrm>
+          <a:prstGeom prst="rect">
+            <a:avLst/>
+          </a:prstGeom>
+          <a:noFill/>
+          <a:ln/>
+        </p:spPr>
+        <p:txBody>
+          <a:bodyPr wrap="square" lIns="0" tIns="0" rIns="0" bIns="0" rtlCol="0" anchor="t">
+            <a:normAutofit/>
+          </a:bodyPr>
+          <a:lstStyle/>
+          <a:p>
+            <a:pPr indent="0" marL="0">
+              <a:buNone/>
+            </a:pPr>
+            <a:r>
+              <a:rPr lang="en-US" sz="1000" dirty="0">
+                <a:solidFill>
+                  <a:srgbClr val="9AA3B5"/>
+                </a:solidFill>
+                <a:latin typeface="Arial" pitchFamily="34" charset="0"/>
+                <a:ea typeface="Arial" pitchFamily="34" charset="-122"/>
+                <a:cs typeface="Arial" pitchFamily="34" charset="-120"/>
+              </a:rPr>
+              <a:t>€250k · 50%</a:t>
+            </a:r>
+            <a:endParaRPr lang="en-US" sz="1000" dirty="0"/>
+          </a:p>
+        </p:txBody>
+      </p:sp>
+      <p:sp>
+        <p:nvSpPr>
+          <p:cNvPr id="27" name="Shape 24"/>
+          <p:cNvSpPr/>
+          <p:nvPr/>
+        </p:nvSpPr>
+        <p:spPr>
+          <a:xfrm>
+            <a:off x="2932115" y="4773168"/>
+            <a:ext cx="109728" cy="109728"/>
+          </a:xfrm>
+          <a:prstGeom prst="ellipse">
+            <a:avLst/>
+          </a:prstGeom>
+          <a:solidFill>
+            <a:srgbClr val="2DFFB5"/>
+          </a:solidFill>
+          <a:ln w="12700">
+            <a:solidFill>
+              <a:srgbClr val="2DFFB5"/>
+            </a:solidFill>
+            <a:prstDash val="solid"/>
+          </a:ln>
+        </p:spPr>
+      </p:sp>
+      <p:sp>
+        <p:nvSpPr>
+          <p:cNvPr id="28" name="Text 25"/>
+          <p:cNvSpPr txBox="1"/>
+          <p:nvPr/>
+        </p:nvSpPr>
+        <p:spPr>
+          <a:xfrm>
+            <a:off x="3114995" y="4709160"/>
+            <a:ext cx="1834835" cy="237744"/>
+          </a:xfrm>
+          <a:prstGeom prst="rect">
+            <a:avLst/>
+          </a:prstGeom>
+          <a:noFill/>
+          <a:ln/>
+        </p:spPr>
+        <p:txBody>
+          <a:bodyPr wrap="square" lIns="0" tIns="0" rIns="0" bIns="0" rtlCol="0" anchor="t">
+            <a:normAutofit/>
+          </a:bodyPr>
+          <a:lstStyle/>
+          <a:p>
+            <a:pPr indent="0" marL="0">
+              <a:buNone/>
+            </a:pPr>
+            <a:r>
+              <a:rPr lang="en-US" sz="1000" b="1" dirty="0">
+                <a:solidFill>
+                  <a:srgbClr val="FFFFFF"/>
+                </a:solidFill>
+                <a:latin typeface="Arial" pitchFamily="34" charset="0"/>
+                <a:ea typeface="Arial" pitchFamily="34" charset="-122"/>
+                <a:cs typeface="Arial" pitchFamily="34" charset="-120"/>
+              </a:rPr>
+              <a:t>Vision lines A–D</a:t>
+            </a:r>
+            <a:endParaRPr lang="en-US" sz="1000" dirty="0"/>
+          </a:p>
+        </p:txBody>
+      </p:sp>
+      <p:sp>
+        <p:nvSpPr>
+          <p:cNvPr id="29" name="Text 26"/>
+          <p:cNvSpPr txBox="1"/>
+          <p:nvPr/>
+        </p:nvSpPr>
+        <p:spPr>
+          <a:xfrm>
+            <a:off x="3114995" y="4937760"/>
+            <a:ext cx="1834835" cy="219456"/>
+          </a:xfrm>
+          <a:prstGeom prst="rect">
+            <a:avLst/>
+          </a:prstGeom>
+          <a:noFill/>
+          <a:ln/>
+        </p:spPr>
+        <p:txBody>
+          <a:bodyPr wrap="square" lIns="0" tIns="0" rIns="0" bIns="0" rtlCol="0" anchor="t">
+            <a:normAutofit/>
+          </a:bodyPr>
+          <a:lstStyle/>
+          <a:p>
+            <a:pPr indent="0" marL="0">
+              <a:buNone/>
+            </a:pPr>
+            <a:r>
+              <a:rPr lang="en-US" sz="1000" dirty="0">
+                <a:solidFill>
+                  <a:srgbClr val="9AA3B5"/>
+                </a:solidFill>
+                <a:latin typeface="Arial" pitchFamily="34" charset="0"/>
+                <a:ea typeface="Arial" pitchFamily="34" charset="-122"/>
+                <a:cs typeface="Arial" pitchFamily="34" charset="-120"/>
+              </a:rPr>
+              <a:t>€100k · 20%</a:t>
+            </a:r>
+            <a:endParaRPr lang="en-US" sz="1000" dirty="0"/>
+          </a:p>
+        </p:txBody>
+      </p:sp>
+      <p:sp>
+        <p:nvSpPr>
+          <p:cNvPr id="30" name="Shape 27"/>
+          <p:cNvSpPr/>
+          <p:nvPr/>
+        </p:nvSpPr>
+        <p:spPr>
+          <a:xfrm>
+            <a:off x="5041270" y="4773168"/>
+            <a:ext cx="109728" cy="109728"/>
+          </a:xfrm>
+          <a:prstGeom prst="ellipse">
+            <a:avLst/>
+          </a:prstGeom>
+          <a:solidFill>
+            <a:srgbClr val="FFD166"/>
+          </a:solidFill>
+          <a:ln w="12700">
+            <a:solidFill>
+              <a:srgbClr val="FFD166"/>
+            </a:solidFill>
+            <a:prstDash val="solid"/>
+          </a:ln>
+        </p:spPr>
+      </p:sp>
+      <p:sp>
+        <p:nvSpPr>
+          <p:cNvPr id="31" name="Text 28"/>
+          <p:cNvSpPr txBox="1"/>
+          <p:nvPr/>
+        </p:nvSpPr>
+        <p:spPr>
+          <a:xfrm>
+            <a:off x="5224150" y="4709160"/>
+            <a:ext cx="1834835" cy="237744"/>
+          </a:xfrm>
+          <a:prstGeom prst="rect">
+            <a:avLst/>
+          </a:prstGeom>
+          <a:noFill/>
+          <a:ln/>
+        </p:spPr>
+        <p:txBody>
+          <a:bodyPr wrap="square" lIns="0" tIns="0" rIns="0" bIns="0" rtlCol="0" anchor="t">
+            <a:normAutofit/>
+          </a:bodyPr>
+          <a:lstStyle/>
+          <a:p>
+            <a:pPr indent="0" marL="0">
+              <a:buNone/>
+            </a:pPr>
+            <a:r>
+              <a:rPr lang="en-US" sz="1000" b="1" dirty="0">
+                <a:solidFill>
+                  <a:srgbClr val="FFFFFF"/>
+                </a:solidFill>
+                <a:latin typeface="Arial" pitchFamily="34" charset="0"/>
+                <a:ea typeface="Arial" pitchFamily="34" charset="-122"/>
+                <a:cs typeface="Arial" pitchFamily="34" charset="-120"/>
+              </a:rPr>
+              <a:t>Go-to-market &amp; pilots</a:t>
+            </a:r>
+            <a:endParaRPr lang="en-US" sz="1000" dirty="0"/>
+          </a:p>
+        </p:txBody>
+      </p:sp>
+      <p:sp>
+        <p:nvSpPr>
+          <p:cNvPr id="32" name="Text 29"/>
+          <p:cNvSpPr txBox="1"/>
+          <p:nvPr/>
+        </p:nvSpPr>
+        <p:spPr>
+          <a:xfrm>
+            <a:off x="5224150" y="4937760"/>
+            <a:ext cx="1834835" cy="219456"/>
+          </a:xfrm>
+          <a:prstGeom prst="rect">
+            <a:avLst/>
+          </a:prstGeom>
+          <a:noFill/>
+          <a:ln/>
+        </p:spPr>
+        <p:txBody>
+          <a:bodyPr wrap="square" lIns="0" tIns="0" rIns="0" bIns="0" rtlCol="0" anchor="t">
+            <a:normAutofit/>
+          </a:bodyPr>
+          <a:lstStyle/>
+          <a:p>
+            <a:pPr indent="0" marL="0">
+              <a:buNone/>
+            </a:pPr>
+            <a:r>
+              <a:rPr lang="en-US" sz="1000" dirty="0">
+                <a:solidFill>
+                  <a:srgbClr val="9AA3B5"/>
+                </a:solidFill>
+                <a:latin typeface="Arial" pitchFamily="34" charset="0"/>
+                <a:ea typeface="Arial" pitchFamily="34" charset="-122"/>
+                <a:cs typeface="Arial" pitchFamily="34" charset="-120"/>
+              </a:rPr>
+              <a:t>€75k · 15%</a:t>
+            </a:r>
+            <a:endParaRPr lang="en-US" sz="1000" dirty="0"/>
+          </a:p>
+        </p:txBody>
+      </p:sp>
+      <p:sp>
+        <p:nvSpPr>
+          <p:cNvPr id="33" name="Shape 30"/>
+          <p:cNvSpPr/>
+          <p:nvPr/>
+        </p:nvSpPr>
+        <p:spPr>
+          <a:xfrm>
+            <a:off x="7150425" y="4773168"/>
+            <a:ext cx="109728" cy="109728"/>
+          </a:xfrm>
+          <a:prstGeom prst="ellipse">
+            <a:avLst/>
+          </a:prstGeom>
+          <a:solidFill>
+            <a:srgbClr val="5AD1FF"/>
+          </a:solidFill>
+          <a:ln w="12700">
+            <a:solidFill>
+              <a:srgbClr val="5AD1FF"/>
+            </a:solidFill>
+            <a:prstDash val="solid"/>
+          </a:ln>
+        </p:spPr>
+      </p:sp>
+      <p:sp>
+        <p:nvSpPr>
+          <p:cNvPr id="34" name="Text 31"/>
+          <p:cNvSpPr txBox="1"/>
+          <p:nvPr/>
+        </p:nvSpPr>
+        <p:spPr>
+          <a:xfrm>
+            <a:off x="7333305" y="4709160"/>
+            <a:ext cx="1834835" cy="237744"/>
+          </a:xfrm>
+          <a:prstGeom prst="rect">
+            <a:avLst/>
+          </a:prstGeom>
+          <a:noFill/>
+          <a:ln/>
+        </p:spPr>
+        <p:txBody>
+          <a:bodyPr wrap="square" lIns="0" tIns="0" rIns="0" bIns="0" rtlCol="0" anchor="t">
+            <a:normAutofit/>
+          </a:bodyPr>
+          <a:lstStyle/>
+          <a:p>
+            <a:pPr indent="0" marL="0">
+              <a:buNone/>
+            </a:pPr>
+            <a:r>
+              <a:rPr lang="en-US" sz="900" b="1" dirty="0">
+                <a:solidFill>
+                  <a:srgbClr val="FFFFFF"/>
+                </a:solidFill>
+                <a:latin typeface="Arial" pitchFamily="34" charset="0"/>
+                <a:ea typeface="Arial" pitchFamily="34" charset="-122"/>
+                <a:cs typeface="Arial" pitchFamily="34" charset="-120"/>
+              </a:rPr>
+              <a:t>Legal, trademark, data protection</a:t>
+            </a:r>
+            <a:endParaRPr lang="en-US" sz="900" dirty="0"/>
+          </a:p>
+        </p:txBody>
+      </p:sp>
+      <p:sp>
+        <p:nvSpPr>
+          <p:cNvPr id="35" name="Text 32"/>
+          <p:cNvSpPr txBox="1"/>
+          <p:nvPr/>
+        </p:nvSpPr>
+        <p:spPr>
+          <a:xfrm>
+            <a:off x="7333305" y="4937760"/>
+            <a:ext cx="1834835" cy="219456"/>
+          </a:xfrm>
+          <a:prstGeom prst="rect">
+            <a:avLst/>
+          </a:prstGeom>
+          <a:noFill/>
+          <a:ln/>
+        </p:spPr>
+        <p:txBody>
+          <a:bodyPr wrap="square" lIns="0" tIns="0" rIns="0" bIns="0" rtlCol="0" anchor="t">
+            <a:normAutofit/>
+          </a:bodyPr>
+          <a:lstStyle/>
+          <a:p>
+            <a:pPr indent="0" marL="0">
+              <a:buNone/>
+            </a:pPr>
+            <a:r>
+              <a:rPr lang="en-US" sz="1000" dirty="0">
+                <a:solidFill>
+                  <a:srgbClr val="9AA3B5"/>
+                </a:solidFill>
+                <a:latin typeface="Arial" pitchFamily="34" charset="0"/>
+                <a:ea typeface="Arial" pitchFamily="34" charset="-122"/>
+                <a:cs typeface="Arial" pitchFamily="34" charset="-120"/>
+              </a:rPr>
+              <a:t>€50k · 10%</a:t>
+            </a:r>
+            <a:endParaRPr lang="en-US" sz="1000" dirty="0"/>
+          </a:p>
+        </p:txBody>
+      </p:sp>
+      <p:sp>
+        <p:nvSpPr>
+          <p:cNvPr id="36" name="Shape 33"/>
+          <p:cNvSpPr/>
+          <p:nvPr/>
+        </p:nvSpPr>
+        <p:spPr>
+          <a:xfrm>
+            <a:off x="9259580" y="4773168"/>
+            <a:ext cx="109728" cy="109728"/>
+          </a:xfrm>
+          <a:prstGeom prst="ellipse">
+            <a:avLst/>
+          </a:prstGeom>
+          <a:solidFill>
+            <a:srgbClr val="9AA3B5"/>
+          </a:solidFill>
+          <a:ln w="12700">
+            <a:solidFill>
+              <a:srgbClr val="9AA3B5"/>
+            </a:solidFill>
+            <a:prstDash val="solid"/>
+          </a:ln>
+        </p:spPr>
+      </p:sp>
+      <p:sp>
+        <p:nvSpPr>
+          <p:cNvPr id="37" name="Text 34"/>
+          <p:cNvSpPr txBox="1"/>
+          <p:nvPr/>
+        </p:nvSpPr>
+        <p:spPr>
+          <a:xfrm>
+            <a:off x="9442460" y="4709160"/>
+            <a:ext cx="1834835" cy="237744"/>
+          </a:xfrm>
+          <a:prstGeom prst="rect">
+            <a:avLst/>
+          </a:prstGeom>
+          <a:noFill/>
+          <a:ln/>
+        </p:spPr>
+        <p:txBody>
+          <a:bodyPr wrap="square" lIns="0" tIns="0" rIns="0" bIns="0" rtlCol="0" anchor="t">
+            <a:normAutofit/>
+          </a:bodyPr>
+          <a:lstStyle/>
+          <a:p>
+            <a:pPr indent="0" marL="0">
+              <a:buNone/>
+            </a:pPr>
+            <a:r>
+              <a:rPr lang="en-US" sz="1000" b="1" dirty="0">
+                <a:solidFill>
+                  <a:srgbClr val="FFFFFF"/>
+                </a:solidFill>
+                <a:latin typeface="Arial" pitchFamily="34" charset="0"/>
+                <a:ea typeface="Arial" pitchFamily="34" charset="-122"/>
+                <a:cs typeface="Arial" pitchFamily="34" charset="-120"/>
+              </a:rPr>
+              <a:t>Reserve</a:t>
+            </a:r>
+            <a:endParaRPr lang="en-US" sz="1000" dirty="0"/>
+          </a:p>
+        </p:txBody>
+      </p:sp>
+      <p:sp>
+        <p:nvSpPr>
+          <p:cNvPr id="38" name="Text 35"/>
+          <p:cNvSpPr txBox="1"/>
+          <p:nvPr/>
+        </p:nvSpPr>
+        <p:spPr>
+          <a:xfrm>
+            <a:off x="9442460" y="4937760"/>
+            <a:ext cx="1834835" cy="219456"/>
+          </a:xfrm>
+          <a:prstGeom prst="rect">
+            <a:avLst/>
+          </a:prstGeom>
+          <a:noFill/>
+          <a:ln/>
+        </p:spPr>
+        <p:txBody>
+          <a:bodyPr wrap="square" lIns="0" tIns="0" rIns="0" bIns="0" rtlCol="0" anchor="t">
+            <a:normAutofit/>
+          </a:bodyPr>
+          <a:lstStyle/>
+          <a:p>
+            <a:pPr indent="0" marL="0">
+              <a:buNone/>
+            </a:pPr>
+            <a:r>
+              <a:rPr lang="en-US" sz="1000" dirty="0">
+                <a:solidFill>
+                  <a:srgbClr val="9AA3B5"/>
+                </a:solidFill>
+                <a:latin typeface="Arial" pitchFamily="34" charset="0"/>
+                <a:ea typeface="Arial" pitchFamily="34" charset="-122"/>
+                <a:cs typeface="Arial" pitchFamily="34" charset="-120"/>
+              </a:rPr>
+              <a:t>€25k · 5%</a:t>
+            </a:r>
+            <a:endParaRPr lang="en-US" sz="1000" dirty="0"/>
+          </a:p>
+        </p:txBody>
+      </p:sp>
+      <p:sp>
+        <p:nvSpPr>
+          <p:cNvPr id="39" name="Shape 36"/>
+          <p:cNvSpPr/>
+          <p:nvPr/>
+        </p:nvSpPr>
+        <p:spPr>
+          <a:xfrm>
+            <a:off x="548640" y="5303520"/>
+            <a:ext cx="11094415" cy="713232"/>
+          </a:xfrm>
+          <a:prstGeom prst="roundRect">
+            <a:avLst>
+              <a:gd name="adj" fmla="val 15385"/>
+            </a:avLst>
+          </a:prstGeom>
+          <a:solidFill>
+            <a:srgbClr val="1F2330"/>
+          </a:solidFill>
+          <a:ln w="12700">
+            <a:solidFill>
+              <a:srgbClr val="1F2330"/>
+            </a:solidFill>
+            <a:prstDash val="solid"/>
+          </a:ln>
+        </p:spPr>
+      </p:sp>
+      <p:sp>
+        <p:nvSpPr>
+          <p:cNvPr id="40" name="Text 37"/>
+          <p:cNvSpPr txBox="1"/>
+          <p:nvPr/>
+        </p:nvSpPr>
+        <p:spPr>
+          <a:xfrm>
             <a:off x="822960" y="5321808"/>
             <a:ext cx="10545775" cy="676656"/>
           </a:xfrm>
@@ -16260,7 +17204,7 @@
                 <a:ea typeface="Arial" pitchFamily="34" charset="-122"/>
                 <a:cs typeface="Arial" pitchFamily="34" charset="-120"/>
               </a:rPr>
-              <a:t>Contact: [Email]   ·   Demo: [Link]   ·   Code &amp; docs: live-fx/   ·   [Name]</a:t>
+              <a:t>Tuncay Sancak, Founder &amp; Managing Director   ·   Investor Relations: Gönül Demet   ·   [Email]   ·   Demo: [Link]</a:t>
             </a:r>
             <a:endParaRPr lang="en-US" sz="1500" dirty="0"/>
           </a:p>
@@ -16268,7 +17212,7 @@
       </p:sp>
       <p:sp>
         <p:nvSpPr>
-          <p:cNvPr id="19" name="Text 16"/>
+          <p:cNvPr id="41" name="Text 38"/>
           <p:cNvSpPr txBox="1"/>
           <p:nvPr/>
         </p:nvSpPr>
@@ -16309,14 +17253,14 @@
       </p:sp>
       <p:sp>
         <p:nvSpPr>
-          <p:cNvPr id="20" name="Text 17"/>
-          <p:cNvSpPr txBox="1"/>
-          <p:nvPr/>
-        </p:nvSpPr>
-        <p:spPr>
-          <a:xfrm>
-            <a:off x="9357055" y="6473952"/>
-            <a:ext cx="2286000" cy="228600"/>
+          <p:cNvPr id="42" name="Text 39"/>
+          <p:cNvSpPr txBox="1"/>
+          <p:nvPr/>
+        </p:nvSpPr>
+        <p:spPr>
+          <a:xfrm>
+            <a:off x="7071055" y="6473952"/>
+            <a:ext cx="4572000" cy="228600"/>
           </a:xfrm>
           <a:prstGeom prst="rect">
             <a:avLst/>
@@ -16340,7 +17284,7 @@
                 <a:ea typeface="Arial" pitchFamily="34" charset="-122"/>
                 <a:cs typeface="Arial" pitchFamily="34" charset="-120"/>
               </a:rPr>
-              <a:t>LiveFX  ·  17</a:t>
+              <a:t>Confidential · October 2026  ·  LiveFX  ·  17</a:t>
             </a:r>
             <a:endParaRPr lang="en-US" sz="900" dirty="0"/>
           </a:p>
@@ -16466,8 +17410,8 @@
         </p:nvSpPr>
         <p:spPr>
           <a:xfrm>
-            <a:off x="9357055" y="6473952"/>
-            <a:ext cx="2286000" cy="228600"/>
+            <a:off x="7071055" y="6473952"/>
+            <a:ext cx="4572000" cy="228600"/>
           </a:xfrm>
           <a:prstGeom prst="rect">
             <a:avLst/>
@@ -16491,7 +17435,7 @@
                 <a:ea typeface="Arial" pitchFamily="34" charset="-122"/>
                 <a:cs typeface="Arial" pitchFamily="34" charset="-120"/>
               </a:rPr>
-              <a:t>LiveFX  ·  2</a:t>
+              <a:t>Confidential · October 2026  ·  LiveFX  ·  2</a:t>
             </a:r>
             <a:endParaRPr lang="en-US" sz="900" dirty="0"/>
           </a:p>
@@ -17160,7 +18104,7 @@
                 <a:ea typeface="Arial" pitchFamily="34" charset="-122"/>
                 <a:cs typeface="Arial" pitchFamily="34" charset="-120"/>
               </a:rPr>
-              <a:t>“I say ‘wild’ – and nothing happens, except me reaching for the keyboard.”  – [Name], from her own stream</a:t>
+              <a:t>“I say ‘wild’ – and nothing happens, except me reaching for the keyboard.”  – Tuncay Sancak, from his own stream</a:t>
             </a:r>
             <a:endParaRPr lang="en-US" sz="1400" dirty="0"/>
           </a:p>
@@ -17286,8 +18230,8 @@
         </p:nvSpPr>
         <p:spPr>
           <a:xfrm>
-            <a:off x="9357055" y="6473952"/>
-            <a:ext cx="2286000" cy="228600"/>
+            <a:off x="7071055" y="6473952"/>
+            <a:ext cx="4572000" cy="228600"/>
           </a:xfrm>
           <a:prstGeom prst="rect">
             <a:avLst/>
@@ -17311,7 +18255,7 @@
                 <a:ea typeface="Arial" pitchFamily="34" charset="-122"/>
                 <a:cs typeface="Arial" pitchFamily="34" charset="-120"/>
               </a:rPr>
-              <a:t>LiveFX  ·  3</a:t>
+              <a:t>Confidential · October 2026  ·  LiveFX  ·  3</a:t>
             </a:r>
             <a:endParaRPr lang="en-US" sz="900" dirty="0"/>
           </a:p>
@@ -18924,8 +19868,8 @@
         </p:nvSpPr>
         <p:spPr>
           <a:xfrm>
-            <a:off x="9357055" y="6473952"/>
-            <a:ext cx="2286000" cy="228600"/>
+            <a:off x="7071055" y="6473952"/>
+            <a:ext cx="4572000" cy="228600"/>
           </a:xfrm>
           <a:prstGeom prst="rect">
             <a:avLst/>
@@ -18949,7 +19893,7 @@
                 <a:ea typeface="Arial" pitchFamily="34" charset="-122"/>
                 <a:cs typeface="Arial" pitchFamily="34" charset="-120"/>
               </a:rPr>
-              <a:t>LiveFX  ·  4</a:t>
+              <a:t>Confidential · October 2026  ·  LiveFX  ·  4</a:t>
             </a:r>
             <a:endParaRPr lang="en-US" sz="900" dirty="0"/>
           </a:p>
@@ -19338,8 +20282,8 @@
         </p:nvSpPr>
         <p:spPr>
           <a:xfrm>
-            <a:off x="9357055" y="6473952"/>
-            <a:ext cx="2286000" cy="228600"/>
+            <a:off x="7071055" y="6473952"/>
+            <a:ext cx="4572000" cy="228600"/>
           </a:xfrm>
           <a:prstGeom prst="rect">
             <a:avLst/>
@@ -19363,7 +20307,7 @@
                 <a:ea typeface="Arial" pitchFamily="34" charset="-122"/>
                 <a:cs typeface="Arial" pitchFamily="34" charset="-120"/>
               </a:rPr>
-              <a:t>LiveFX  ·  5</a:t>
+              <a:t>Confidential · October 2026  ·  LiveFX  ·  5</a:t>
             </a:r>
             <a:endParaRPr lang="en-US" sz="900" dirty="0"/>
           </a:p>
@@ -20673,8 +21617,8 @@
         </p:nvSpPr>
         <p:spPr>
           <a:xfrm>
-            <a:off x="9357055" y="6473952"/>
-            <a:ext cx="2286000" cy="228600"/>
+            <a:off x="7071055" y="6473952"/>
+            <a:ext cx="4572000" cy="228600"/>
           </a:xfrm>
           <a:prstGeom prst="rect">
             <a:avLst/>
@@ -20698,7 +21642,7 @@
                 <a:ea typeface="Arial" pitchFamily="34" charset="-122"/>
                 <a:cs typeface="Arial" pitchFamily="34" charset="-120"/>
               </a:rPr>
-              <a:t>LiveFX  ·  6</a:t>
+              <a:t>Confidential · October 2026  ·  LiveFX  ·  6</a:t>
             </a:r>
             <a:endParaRPr lang="en-US" sz="900" dirty="0"/>
           </a:p>
@@ -21438,8 +22382,8 @@
         </p:nvSpPr>
         <p:spPr>
           <a:xfrm>
-            <a:off x="9357055" y="6473952"/>
-            <a:ext cx="2286000" cy="228600"/>
+            <a:off x="7071055" y="6473952"/>
+            <a:ext cx="4572000" cy="228600"/>
           </a:xfrm>
           <a:prstGeom prst="rect">
             <a:avLst/>
@@ -21463,7 +22407,7 @@
                 <a:ea typeface="Arial" pitchFamily="34" charset="-122"/>
                 <a:cs typeface="Arial" pitchFamily="34" charset="-120"/>
               </a:rPr>
-              <a:t>LiveFX  ·  7</a:t>
+              <a:t>Confidential · October 2026  ·  LiveFX  ·  7</a:t>
             </a:r>
             <a:endParaRPr lang="en-US" sz="900" dirty="0"/>
           </a:p>
@@ -21929,7 +22873,7 @@
                 <a:ea typeface="Arial" pitchFamily="34" charset="-122"/>
                 <a:cs typeface="Arial" pitchFamily="34" charset="-120"/>
               </a:rPr>
-              <a:t>20–40K Pro subscriptions × €9.99/month ≈ €2.4–4.8M ARR (DACH + Turkey + EN niche)</a:t>
+              <a:t>5,000–15,000 paying Pro users × €9.99/month ≈ €0.6–1.8M ARR (as in the business plan; DACH + Turkey + EN niche)</a:t>
             </a:r>
             <a:endParaRPr lang="en-US" sz="1050" dirty="0"/>
           </a:p>
@@ -22573,8 +23517,8 @@
         </p:nvSpPr>
         <p:spPr>
           <a:xfrm>
-            <a:off x="9357055" y="6473952"/>
-            <a:ext cx="2286000" cy="228600"/>
+            <a:off x="7071055" y="6473952"/>
+            <a:ext cx="4572000" cy="228600"/>
           </a:xfrm>
           <a:prstGeom prst="rect">
             <a:avLst/>
@@ -22598,7 +23542,7 @@
                 <a:ea typeface="Arial" pitchFamily="34" charset="-122"/>
                 <a:cs typeface="Arial" pitchFamily="34" charset="-120"/>
               </a:rPr>
-              <a:t>LiveFX  ·  8</a:t>
+              <a:t>Confidential · October 2026  ·  LiveFX  ·  8</a:t>
             </a:r>
             <a:endParaRPr lang="en-US" sz="900" dirty="0"/>
           </a:p>
@@ -23567,8 +24511,8 @@
         </p:nvSpPr>
         <p:spPr>
           <a:xfrm>
-            <a:off x="9357055" y="6473952"/>
-            <a:ext cx="2286000" cy="228600"/>
+            <a:off x="7071055" y="6473952"/>
+            <a:ext cx="4572000" cy="228600"/>
           </a:xfrm>
           <a:prstGeom prst="rect">
             <a:avLst/>
@@ -23592,7 +24536,7 @@
                 <a:ea typeface="Arial" pitchFamily="34" charset="-122"/>
                 <a:cs typeface="Arial" pitchFamily="34" charset="-120"/>
               </a:rPr>
-              <a:t>LiveFX  ·  9</a:t>
+              <a:t>Confidential · October 2026  ·  LiveFX  ·  9</a:t>
             </a:r>
             <a:endParaRPr lang="en-US" sz="900" dirty="0"/>
           </a:p>

--- a/live-fx/business/LiveFX_Pitch_EN.pptx
+++ b/live-fx/business/LiveFX_Pitch_EN.pptx
@@ -22,9 +22,11 @@
     <p:sldId id="270" r:id="rId16"/>
     <p:sldId id="271" r:id="rId17"/>
     <p:sldId id="272" r:id="rId18"/>
+    <p:sldId id="273" r:id="rId19"/>
+    <p:sldId id="274" r:id="rId20"/>
   </p:sldIdLst>
   <p:notesMasterIdLst>
-    <p:notesMasterId r:id="rId19"/>
+    <p:notesMasterId r:id="rId21"/>
   </p:notesMasterIdLst>
   <p:sldSz cx="12192000" cy="6858000"/>
   <p:notesSz cx="6858000" cy="12192000"/>
@@ -123,7 +125,7 @@
   <p:extLst>
     <p:ext uri="{521415D9-36F7-43E2-AB2F-B90AF26B5E84}">
       <p14:sectionLst xmlns:p14="http://schemas.microsoft.com/office/powerpoint/2010/main">
-        <p14:section name="Today: LiveFX 2.0" id="{50d5d2a7-930f-bc84-fe24-523efcc85062}">
+        <p14:section name="Today: LiveFX 2.1" id="{977209e9-0636-125d-c096-ff4f87a23a21}">
           <p14:sldIdLst>
             <p14:sldId id="256"/>
             <p14:sldId id="257"/>
@@ -138,7 +140,7 @@
             <p14:sldId id="266"/>
           </p14:sldIdLst>
         </p14:section>
-        <p14:section name="Vision 2027–2029" id="{3dde7c9b-c4cb-8715-895b-9def2aa17480}">
+        <p14:section name="Vision 2027–2029" id="{636b83da-d500-508c-1222-6a2868c56373}">
           <p14:sldIdLst>
             <p14:sldId id="267"/>
             <p14:sldId id="268"/>
@@ -146,10 +148,12 @@
             <p14:sldId id="270"/>
           </p14:sldIdLst>
         </p14:section>
-        <p14:section name="Team and ask" id="{bd81c284-e7a6-5c1e-c1c3-b61af3c94955}">
+        <p14:section name="Team and ask" id="{1db3909e-7dca-215f-7797-8668318a8739}">
           <p14:sldIdLst>
             <p14:sldId id="271"/>
             <p14:sldId id="272"/>
+            <p14:sldId id="273"/>
+            <p14:sldId id="274"/>
           </p14:sldIdLst>
         </p14:section>
       </p14:sectionLst>
@@ -1116,7 +1120,7 @@
           <a:p>
             <a:r>
               <a:rPr lang="en-US" dirty="0"/>
-              <a:t>Ordered by leverage: the mobile SDK solves the biggest problem (phone streamers without OBS). Platform integration is the ask of this deck. AI understanding and the story engine are our technical edge. Important: the scenes are drawn procedurally, not generated by a video AI – that's the bridge to the next four slides.</a:t>
+              <a:t>Ordered by money and proof: the €250k carry us for 18 months with one developer. First the Pro subscription and the mobile app/PWA, in parallel WortBild as the first vision line, then DE/EN and one platform or education pilot. Each step has a gate (next slides). At month 18 we raise the seed round of about €350k – only then do the story engine, auto-edit and VR/AR start. That keeps the small team focused.</a:t>
             </a:r>
             <a:endParaRPr lang="en-US" dirty="0"/>
           </a:p>
@@ -1292,7 +1296,7 @@
           <a:p>
             <a:r>
               <a:rPr lang="en-US" dirty="0"/>
-              <a:t>Here's how it looks: the streamer does nothing but talk. “It was night” – the sky goes dark. “A girl walked into the forest” – trees grow, the character walks in. “It started to rain” – rain, the ambience loop switches. “Suddenly, a dragon” – lightning, a camera jolt, the dragon. Technically: one sentence produces a delta of 200–500 bytes, scenes change 1 to 3 times a minute, and everything is drawn in one canvas with at most 1,200 particles – a budget our effect engine already handles next to OBS today. Cost: at list price, video AI costs $0.05 (Veo 3.1 Lite, 720p) to $0.75 per second [Source 24, 25] – $180–2,700 per hour, and it can't run live at all. LiveFX: €0 without AI, $0.25–0.75 per hour with optional text AI. Market: German audiobooks €374M [Source 19], 23.8M people in Germany listen to podcasts weekly [Source 20], YouTube has over 1B podcast viewers [Source 21]; AI video grows from $3.67B to $24.89B by 2036 [Source 23]. Timeline: German MVP in Q2 2027, TR/EN and world packs in Q3 2027. First publisher case: the founder's own children's book series.</a:t>
+              <a:t>Here's how it looks: the streamer does nothing but talk. “It was night” – the sky goes dark. “A girl walked into the forest” – trees grow, the character walks in. “It started to rain” – rain, the ambience loop switches. “Suddenly, a dragon” – lightning, a camera jolt, the dragon. Technically: one sentence produces a delta of 200–500 bytes, scenes change 1 to 3 times a minute, and everything is drawn in one canvas with at most 1,200 particles – a budget our effect engine already handles next to OBS today. Cost: at list price, video AI costs $0.05 (Veo 3.1 Lite, 720p) to $0.75 per second [Source 24, 25] – $180–2,700 per hour, and it can't run live at all. LiveFX: €0 without AI, $0.25–0.75 per hour with optional text AI. Market: German audiobooks €374M [Source 19], 23.8M people in Germany listen to podcasts weekly [Source 20], YouTube has over 1B podcast viewers [Source 21]; AI video grows from $3.67B to $24.89B by 2036 [Source 23]. Timeline: the story engine is financed from the follow-on round after Gate 2 – German MVP from month 19 (H2 2028), TR/EN and world packs after that. First publisher case: the founder's own children's book series.</a:t>
             </a:r>
             <a:endParaRPr lang="en-US" dirty="0"/>
           </a:p>
@@ -1468,7 +1472,7 @@
           <a:p>
             <a:r>
               <a:rPr lang="en-US" dirty="0"/>
-              <a:t>Two doors into the same tool. First, live → highlights: our server already knows every trigger, every gift and every chat message with a timestamp – that yields 3–5 clips per stream. Second, auto-edit: drag a 20-minute MP4 into the window, Whisper transcribes it locally in the browser [Source 60], LiveFX places effects, scenes and cuts as movable chips, and export runs through WebCodecs and the device's hardware encoder [Source 57, 58, 59]. The file never leaves the computer; the marginal cost per video is zero. Spaces: stage and classroom already work today (full screen, phone as the control desk). Audiobook with pictures and AR on the phone come in 2027. WebXR [Source 47, 48] and display glasses like Meta Ray-Ban Display [Source 46] are vision – IDC expects 13.6M smart glasses in 2026 [Source 45], and display glasses are only a small share of that. Competition, honestly: CapCut has 736M MAU [Source 52]; we're not competing as a universal editor but through voice → effect, scenes, TR/DE and local processing. Buyer signal: in 2026 Canva acquired Cavalry and MangoAI [Source 56].</a:t>
+              <a:t>Two doors into the same tool. First, live → highlights: our server already knows every trigger, every gift and every chat message with a timestamp – that yields 3–5 clips per stream. Second, auto-edit: drag a 20-minute MP4 into the window, Whisper transcribes it locally in the browser [Source 60], LiveFX places effects, scenes and cuts as movable chips, and export runs through WebCodecs and the device's hardware encoder [Source 57, 58, 59]. The file never leaves the computer; the marginal cost per video is zero. Spaces: stage and classroom already work today (full screen, phone as the control desk). Audiobook with pictures and AR on the phone come with the follow-on round after Gate 2. WebXR [Source 47, 48] and display glasses like Meta Ray-Ban Display [Source 46] are vision – IDC expects 13.6M smart glasses in 2026 [Source 45], and display glasses are only a small share of that. Competition, honestly: CapCut has 736M MAU [Source 52]; we're not competing as a universal editor but through voice → effect, scenes, TR/DE and local processing. Buyer signal: in 2026 Canva acquired Cavalry and MangoAI [Source 56].</a:t>
             </a:r>
             <a:endParaRPr lang="en-US" dirty="0"/>
           </a:p>
@@ -1556,7 +1560,7 @@
           <a:p>
             <a:r>
               <a:rPr lang="en-US" dirty="0"/>
-              <a:t>The founder is user, content supplier and product owner in one person – that's why the product works with dialects, in portrait and in Turkish. And as a children's book author, he brings the first publishing and education case himself. Gönül Demet leads investor relations and is the contact for the pre-seed round. The pre-seed round (€500,000) funds two hires; for WortBild, an EdTech advisory board provides expert review.</a:t>
+              <a:t>The founder is user, content supplier and product owner in one person – that's why the product works with dialects, in portrait and in Turkish. And as a children's book author, he brings the first publishing and education case himself. Gönül Demet leads investor relations and is the contact for the pre-seed round. The pre-seed round (€250,000) funds one hire – a mobile/web developer from month 3; further hires follow with the seed round after Gate 2. For WortBild, an EdTech advisory board provides expert review.</a:t>
             </a:r>
             <a:endParaRPr lang="en-US" dirty="0"/>
           </a:p>
@@ -1644,7 +1648,7 @@
           <a:p>
             <a:r>
               <a:rPr lang="en-US" dirty="0"/>
-              <a:t>End concretely: what we need is a contact on the live team and an 8-week pilot with 20 creators. We deliver the overlay, packs, support and the measurement (watch time, gifts, clips from lives). New: for WortBild and Story Film we're looking for a second pilot with education providers, language-learning platforms or publishers – the first publisher case is the founder's own children's book series. On the round: €500,000 pre-seed for LiveFX and all its projects, 24 months. Proposed use of funds: team €250k, vision lines €100k (WortBild/language learning and the story engine first), go-to-market €75k, legal/trademark/data protection €50k, reserve €25k. With no revenue at all that lasts about 22 months; the conservative scenario is covered for three years (business plan 11.6). Investor contact: Gönül Demet. This deck is also available in German and Turkish.</a:t>
+              <a:t>The numbers in one slide. Base scenario: revenue grows from €51k in 2027 to €3.15M in 2031; EBITDA turns positive in 2028 and is sustained from month 22. Conservative is €602k revenue in 2031, optimistic €7.44M – years 4 and 5 are extrapolated. Runway: with no revenue at all, the €250k last 18 months. At month 18 we expect between €49k and €369k in cash, depending on the scenario – and raise a seed round of about €350k after Gate 2. Valuation: our offer is €250,000 for 10%, i.e. €2.25M pre-money and €2.5M post-money. The four common pre-revenue methods give €2.35M to €3.0M – Berkus €2.35M, Scorecard €2.95M on a reference in the lower part of the DACH range, VC method €2.43M on the upside scenario, Risk Factor Summation €3.0M; weighted €2.71M. So the offer is a fair, investor-friendly entry price below every reference method. Why: a working product with 575+ automated tests, own IP and content, three languages including the Turkish niche, four vision options on one engine, and capital efficiency – built to v2.1 without outside money. Honestly against it: solo founder, no revenue yet. Alternatively a SAFE with a €2.25M cap and 20% discount, no interest. Negotiation basis, to be reviewed with a tax and legal advisor.</a:t>
             </a:r>
             <a:endParaRPr lang="en-US" dirty="0"/>
           </a:p>
@@ -1668,6 +1672,182 @@
             <a:fld id="{F7021451-1387-4CA6-816F-3879F97B5CBC}" type="slidenum">
               <a:rPr lang="en-US"/>
               <a:t>17</a:t>
+            </a:fld>
+            <a:endParaRPr lang="en-US"/>
+          </a:p>
+        </p:txBody>
+      </p:sp>
+    </p:spTree>
+    <p:extLst>
+      <p:ext uri="{BB962C8B-B14F-4D97-AF65-F5344CB8AC3E}">
+        <p14:creationId xmlns:p14="http://schemas.microsoft.com/office/powerpoint/2010/main" val="1024086991"/>
+      </p:ext>
+    </p:extLst>
+  </p:cSld>
+  <p:clrMapOvr>
+    <a:masterClrMapping/>
+  </p:clrMapOvr>
+</p:notes>
+</file>
+
+<file path=ppt/notesSlides/notesSlide18.xml><?xml version="1.0" encoding="utf-8"?>
+<p:notes xmlns:a="http://schemas.openxmlformats.org/drawingml/2006/main" xmlns:r="http://schemas.openxmlformats.org/officeDocument/2006/relationships" xmlns:p="http://schemas.openxmlformats.org/presentationml/2006/main">
+  <p:cSld>
+    <p:spTree>
+      <p:nvGrpSpPr>
+        <p:cNvPr id="1" name=""/>
+        <p:cNvGrpSpPr/>
+        <p:nvPr/>
+      </p:nvGrpSpPr>
+      <p:grpSpPr>
+        <a:xfrm>
+          <a:off x="0" y="0"/>
+          <a:ext cx="0" cy="0"/>
+          <a:chOff x="0" y="0"/>
+          <a:chExt cx="0" cy="0"/>
+        </a:xfrm>
+      </p:grpSpPr>
+      <p:sp>
+        <p:nvSpPr>
+          <p:cNvPr id="2" name="Slide Image Placeholder 1"/>
+          <p:cNvSpPr>
+            <a:spLocks noGrp="1" noRot="1" noChangeAspect="1"/>
+          </p:cNvSpPr>
+          <p:nvPr>
+            <p:ph type="sldImg"/>
+          </p:nvPr>
+        </p:nvSpPr>
+        <p:spPr/>
+      </p:sp>
+      <p:sp>
+        <p:nvSpPr>
+          <p:cNvPr id="3" name="Notes Placeholder 2"/>
+          <p:cNvSpPr>
+            <a:spLocks noGrp="1"/>
+          </p:cNvSpPr>
+          <p:nvPr>
+            <p:ph type="body" idx="1"/>
+          </p:nvPr>
+        </p:nvSpPr>
+        <p:spPr/>
+        <p:txBody>
+          <a:bodyPr/>
+          <a:lstStyle/>
+          <a:p>
+            <a:r>
+              <a:rPr lang="en-US" dirty="0"/>
+              <a:t>Four gates over 18 months – each one releases the next budget. Month 3: Pro subscription live and the developer on board. Month 6: 10,000 registered users and 400 paying Pro users as the target; the threshold is 4,000 and 120. Month 12: 20,000 users, 800 Pro, €8,073 MRR, a platform or education pilot running. Month 18 is Gate 2: 50,000 users, 2,000 Pro, €22,586 MRR, five paying schools or courses for WortBild. That is the basis for the seed round. All of these are targets – nothing here is achieved yet.</a:t>
+            </a:r>
+            <a:endParaRPr lang="en-US" dirty="0"/>
+          </a:p>
+        </p:txBody>
+      </p:sp>
+      <p:sp>
+        <p:nvSpPr>
+          <p:cNvPr id="4" name="Slide Number Placeholder 3"/>
+          <p:cNvSpPr>
+            <a:spLocks noGrp="1"/>
+          </p:cNvSpPr>
+          <p:nvPr>
+            <p:ph type="sldNum" sz="quarter" idx="10"/>
+          </p:nvPr>
+        </p:nvSpPr>
+        <p:spPr/>
+        <p:txBody>
+          <a:bodyPr/>
+          <a:lstStyle/>
+          <a:p>
+            <a:fld id="{F7021451-1387-4CA6-816F-3879F97B5CBC}" type="slidenum">
+              <a:rPr lang="en-US"/>
+              <a:t>18</a:t>
+            </a:fld>
+            <a:endParaRPr lang="en-US"/>
+          </a:p>
+        </p:txBody>
+      </p:sp>
+    </p:spTree>
+    <p:extLst>
+      <p:ext uri="{BB962C8B-B14F-4D97-AF65-F5344CB8AC3E}">
+        <p14:creationId xmlns:p14="http://schemas.microsoft.com/office/powerpoint/2010/main" val="1024086991"/>
+      </p:ext>
+    </p:extLst>
+  </p:cSld>
+  <p:clrMapOvr>
+    <a:masterClrMapping/>
+  </p:clrMapOvr>
+</p:notes>
+</file>
+
+<file path=ppt/notesSlides/notesSlide19.xml><?xml version="1.0" encoding="utf-8"?>
+<p:notes xmlns:a="http://schemas.openxmlformats.org/drawingml/2006/main" xmlns:r="http://schemas.openxmlformats.org/officeDocument/2006/relationships" xmlns:p="http://schemas.openxmlformats.org/presentationml/2006/main">
+  <p:cSld>
+    <p:spTree>
+      <p:nvGrpSpPr>
+        <p:cNvPr id="1" name=""/>
+        <p:cNvGrpSpPr/>
+        <p:nvPr/>
+      </p:nvGrpSpPr>
+      <p:grpSpPr>
+        <a:xfrm>
+          <a:off x="0" y="0"/>
+          <a:ext cx="0" cy="0"/>
+          <a:chOff x="0" y="0"/>
+          <a:chExt cx="0" cy="0"/>
+        </a:xfrm>
+      </p:grpSpPr>
+      <p:sp>
+        <p:nvSpPr>
+          <p:cNvPr id="2" name="Slide Image Placeholder 1"/>
+          <p:cNvSpPr>
+            <a:spLocks noGrp="1" noRot="1" noChangeAspect="1"/>
+          </p:cNvSpPr>
+          <p:nvPr>
+            <p:ph type="sldImg"/>
+          </p:nvPr>
+        </p:nvSpPr>
+        <p:spPr/>
+      </p:sp>
+      <p:sp>
+        <p:nvSpPr>
+          <p:cNvPr id="3" name="Notes Placeholder 2"/>
+          <p:cNvSpPr>
+            <a:spLocks noGrp="1"/>
+          </p:cNvSpPr>
+          <p:nvPr>
+            <p:ph type="body" idx="1"/>
+          </p:nvPr>
+        </p:nvSpPr>
+        <p:spPr/>
+        <p:txBody>
+          <a:bodyPr/>
+          <a:lstStyle/>
+          <a:p>
+            <a:r>
+              <a:rPr lang="en-US" dirty="0"/>
+              <a:t>End concretely: what we need is a contact on the live team and an 8-week pilot with 20 creators. We deliver the overlay, packs, support and the measurement (watch time, gifts, clips from lives). For WortBild we're looking for a second pilot with education providers, language-learning platforms or publishers – the first publisher case is the founder's own children's book series. On the round: €250,000 pre-seed for 18 months. Proposed use of funds: team and product €125k, go-to-market and pilots €50k, WortBild €37.5k, legal/trademark/data protection €25k, reserve €12.5k. With no revenue at all that lasts 18 months. Our offer: 10% for the €250,000 – €2.25M pre-money, €2.5M post-money, below every common reference method – or a SAFE with a €2.25M cap and 20% discount; a negotiation basis to be reviewed with a tax and legal advisor. The story engine, auto-edit and VR/AR follow with a seed round of about €350k after Gate 2. Investor contact: Gönül Demet. This deck is also available in German and Turkish.</a:t>
+            </a:r>
+            <a:endParaRPr lang="en-US" dirty="0"/>
+          </a:p>
+        </p:txBody>
+      </p:sp>
+      <p:sp>
+        <p:nvSpPr>
+          <p:cNvPr id="4" name="Slide Number Placeholder 3"/>
+          <p:cNvSpPr>
+            <a:spLocks noGrp="1"/>
+          </p:cNvSpPr>
+          <p:nvPr>
+            <p:ph type="sldNum" sz="quarter" idx="10"/>
+          </p:nvPr>
+        </p:nvSpPr>
+        <p:spPr/>
+        <p:txBody>
+          <a:bodyPr/>
+          <a:lstStyle/>
+          <a:p>
+            <a:fld id="{F7021451-1387-4CA6-816F-3879F97B5CBC}" type="slidenum">
+              <a:rPr lang="en-US"/>
+              <a:t>19</a:t>
             </a:fld>
             <a:endParaRPr lang="en-US"/>
           </a:p>
@@ -1996,7 +2176,7 @@
           <a:p>
             <a:r>
               <a:rPr lang="en-US" dirty="0"/>
-              <a:t>This is no longer a prototype: releases from 0.1 to 2.0, unit and end-to-end tests, guides in German and Turkish. Version 2.0 was a hardening release for stage use and sales. Stress two things: (1) our own sounds and packs mean no copyright strikes, (2) viewer triggers are the bridge to monetization – a gift can already trigger an effect today.</a:t>
+              <a:t>This is no longer a prototype: releases from 0.1 to 2.1, unit and end-to-end tests, guides in German and Turkish. Version 2.1 made it lighter and safer: performance mode with 63–69% less frame time on average, 143 free stickers under the MIT licence, text sticker packs in three languages, and a safe GIF search via KLIPY and GIPHY with a youth-protection filter – Google shut down the Tenor API in June 2026. Stress two things: (1) our own sounds, free stickers and linked GIFs mean no copyright strikes, (2) viewer triggers are the bridge to monetization – a gift can already trigger an effect today.</a:t>
             </a:r>
             <a:endParaRPr lang="en-US" dirty="0"/>
           </a:p>
@@ -2928,7 +3108,7 @@
                 <a:ea typeface="Arial" pitchFamily="34" charset="-122"/>
                 <a:cs typeface="Arial" pitchFamily="34" charset="-120"/>
               </a:rPr>
-              <a:t>LIVE MEME ENGINE  ·  v2.0</a:t>
+              <a:t>LIVE MEME ENGINE  ·  v2.1</a:t>
             </a:r>
             <a:endParaRPr lang="en-US" sz="1100" dirty="0"/>
           </a:p>
@@ -4417,7 +4597,7 @@
                 <a:ea typeface="Arial" pitchFamily="34" charset="-122"/>
                 <a:cs typeface="Arial" pitchFamily="34" charset="-120"/>
               </a:rPr>
-              <a:t>ORDERED BY LEVERAGE</a:t>
+              <a:t>18 MONTHS, GATED</a:t>
             </a:r>
             <a:endParaRPr lang="en-US" sz="1000" dirty="0"/>
           </a:p>
@@ -4458,7 +4638,7 @@
                 <a:ea typeface="Arial" pitchFamily="34" charset="-122"/>
                 <a:cs typeface="Arial" pitchFamily="34" charset="-120"/>
               </a:rPr>
-              <a:t>Roadmap</a:t>
+              <a:t>Roadmap: lean to Gate 2, then the seed round</a:t>
             </a:r>
             <a:endParaRPr lang="en-US" sz="3200" dirty="0"/>
           </a:p>
@@ -4586,7 +4766,7 @@
                 <a:ea typeface="Arial" pitchFamily="34" charset="-122"/>
                 <a:cs typeface="Arial" pitchFamily="34" charset="-120"/>
               </a:rPr>
-              <a:t>Q4 2026</a:t>
+              <a:t>Q1 2027 · months 1–3</a:t>
             </a:r>
             <a:endParaRPr lang="en-US" sz="1300" dirty="0"/>
           </a:p>
@@ -4654,7 +4834,7 @@
                 <a:ea typeface="Arial" pitchFamily="34" charset="-122"/>
                 <a:cs typeface="Arial" pitchFamily="34" charset="-120"/>
               </a:rPr>
-              <a:t>Native mobile SDK</a:t>
+              <a:t>Pro subscription live</a:t>
             </a:r>
             <a:endParaRPr lang="en-US" sz="1600" dirty="0"/>
           </a:p>
@@ -4695,7 +4875,7 @@
                 <a:ea typeface="Arial" pitchFamily="34" charset="-122"/>
                 <a:cs typeface="Arial" pitchFamily="34" charset="-120"/>
               </a:rPr>
-              <a:t>Effects right in the camera app, not just OBS · stable offline recognition · 10 creator tests</a:t>
+              <a:t>Pre-seed closed · mobile/web developer on board (month 3) · TR launch · Gate G0</a:t>
             </a:r>
             <a:endParaRPr lang="en-US" sz="1200" dirty="0"/>
           </a:p>
@@ -4761,7 +4941,7 @@
                 <a:ea typeface="Arial" pitchFamily="34" charset="-122"/>
                 <a:cs typeface="Arial" pitchFamily="34" charset="-120"/>
               </a:rPr>
-              <a:t>Q1 2027</a:t>
+              <a:t>Q2 2027 · months 4–6</a:t>
             </a:r>
             <a:endParaRPr lang="en-US" sz="1300" dirty="0"/>
           </a:p>
@@ -4829,7 +5009,7 @@
                 <a:ea typeface="Arial" pitchFamily="34" charset="-122"/>
                 <a:cs typeface="Arial" pitchFamily="34" charset="-120"/>
               </a:rPr>
-              <a:t>Platform integration</a:t>
+              <a:t>Mobile app/PWA + WortBild</a:t>
             </a:r>
             <a:endParaRPr lang="en-US" sz="1600" dirty="0"/>
           </a:p>
@@ -4870,7 +5050,7 @@
                 <a:ea typeface="Arial" pitchFamily="34" charset="-122"/>
                 <a:cs typeface="Arial" pitchFamily="34" charset="-120"/>
               </a:rPr>
-              <a:t>TikTok LIVE Studio plug-in / Instagram Live Producer · installer · marketplace beta · highlight finder</a:t>
+              <a:t>WortBild with 300 words and reading aid · 20 beta creators TR/DE · Gate G1</a:t>
             </a:r>
             <a:endParaRPr lang="en-US" sz="1200" dirty="0"/>
           </a:p>
@@ -4936,7 +5116,7 @@
                 <a:ea typeface="Arial" pitchFamily="34" charset="-122"/>
                 <a:cs typeface="Arial" pitchFamily="34" charset="-120"/>
               </a:rPr>
-              <a:t>Q2 2027</a:t>
+              <a:t>Q3–Q4 2027 · months 7–12</a:t>
             </a:r>
             <a:endParaRPr lang="en-US" sz="1300" dirty="0"/>
           </a:p>
@@ -5004,7 +5184,7 @@
                 <a:ea typeface="Arial" pitchFamily="34" charset="-122"/>
                 <a:cs typeface="Arial" pitchFamily="34" charset="-120"/>
               </a:rPr>
-              <a:t>AI understanding v2</a:t>
+              <a:t>DE/EN + pilots</a:t>
             </a:r>
             <a:endParaRPr lang="en-US" sz="1600" dirty="0"/>
           </a:p>
@@ -5045,7 +5225,7 @@
                 <a:ea typeface="Arial" pitchFamily="34" charset="-122"/>
                 <a:cs typeface="Arial" pitchFamily="34" charset="-120"/>
               </a:rPr>
-              <a:t>Mood, context, irony · multiple triggers per sentence · Pro subscription · live-commerce triggers</a:t>
+              <a:t>DE/EN launch · marketplaces · agency licence · platform or education pilot · Gate G2a</a:t>
             </a:r>
             <a:endParaRPr lang="en-US" sz="1200" dirty="0"/>
           </a:p>
@@ -5111,7 +5291,7 @@
                 <a:ea typeface="Arial" pitchFamily="34" charset="-122"/>
                 <a:cs typeface="Arial" pitchFamily="34" charset="-120"/>
               </a:rPr>
-              <a:t>Q3–Q4 2027</a:t>
+              <a:t>H1 2028 · months 13–18</a:t>
             </a:r>
             <a:endParaRPr lang="en-US" sz="1300" dirty="0"/>
           </a:p>
@@ -5179,7 +5359,7 @@
                 <a:ea typeface="Arial" pitchFamily="34" charset="-122"/>
                 <a:cs typeface="Arial" pitchFamily="34" charset="-120"/>
               </a:rPr>
-              <a:t>Story engine</a:t>
+              <a:t>Gate 2 → seed round</a:t>
             </a:r>
             <a:endParaRPr lang="en-US" sz="1600" dirty="0"/>
           </a:p>
@@ -5220,7 +5400,7 @@
                 <a:ea typeface="Arial" pitchFamily="34" charset="-122"/>
                 <a:cs typeface="Arial" pitchFamily="34" charset="-120"/>
               </a:rPr>
-              <a:t>Whole stories as scene sequences · procedurally drawn scenes (Story Film) · viewer-gifted effects · platform pilot</a:t>
+              <a:t>WortBild pilot evaluated · seed round ~€350k · from month 19: story engine, Studio, Spaces, build-out team</a:t>
             </a:r>
             <a:endParaRPr lang="en-US" sz="1200" dirty="0"/>
           </a:p>
@@ -5261,7 +5441,7 @@
                 <a:ea typeface="Arial" pitchFamily="34" charset="-122"/>
                 <a:cs typeface="Arial" pitchFamily="34" charset="-120"/>
               </a:rPr>
-              <a:t>The mobile SDK solves the biggest problem (phone streamers without OBS). Platform integration is the ask of this deck. AI understanding and the story engine are the technical edge – and the entry into the 2027–2029 vision.</a:t>
+              <a:t>Lean until month 18: one developer, Pro subscription, mobile app/PWA, WortBild. The story engine (Story Film), auto-edit (Studio) and VR/AR (Spaces) are financed from the follow-on round after Gate 2.</a:t>
             </a:r>
             <a:endParaRPr lang="en-US" sz="1200" dirty="0"/>
           </a:p>
@@ -13258,7 +13438,7 @@
                 <a:ea typeface="Arial" pitchFamily="34" charset="-122"/>
                 <a:cs typeface="Arial" pitchFamily="34" charset="-120"/>
               </a:rPr>
-              <a:t>2027</a:t>
+              <a:t>follow-on round</a:t>
             </a:r>
             <a:endParaRPr lang="en-US" sz="950" dirty="0"/>
           </a:p>
@@ -13367,7 +13547,7 @@
                 <a:ea typeface="Arial" pitchFamily="34" charset="-122"/>
                 <a:cs typeface="Arial" pitchFamily="34" charset="-120"/>
               </a:rPr>
-              <a:t>2027</a:t>
+              <a:t>follow-on round</a:t>
             </a:r>
             <a:endParaRPr lang="en-US" sz="950" dirty="0"/>
           </a:p>
@@ -13476,7 +13656,7 @@
                 <a:ea typeface="Arial" pitchFamily="34" charset="-122"/>
                 <a:cs typeface="Arial" pitchFamily="34" charset="-120"/>
               </a:rPr>
-              <a:t>Vision 2028</a:t>
+              <a:t>Vision 2029</a:t>
             </a:r>
             <a:endParaRPr lang="en-US" sz="950" dirty="0"/>
           </a:p>
@@ -13585,7 +13765,7 @@
                 <a:ea typeface="Arial" pitchFamily="34" charset="-122"/>
                 <a:cs typeface="Arial" pitchFamily="34" charset="-120"/>
               </a:rPr>
-              <a:t>Vision 2028</a:t>
+              <a:t>Vision 2029</a:t>
             </a:r>
             <a:endParaRPr lang="en-US" sz="950" dirty="0"/>
           </a:p>
@@ -15445,7 +15625,7 @@
                 <a:ea typeface="Arial" pitchFamily="34" charset="-122"/>
                 <a:cs typeface="Arial" pitchFamily="34" charset="-120"/>
               </a:rPr>
-              <a:t>[Open position] – Tech lead</a:t>
+              <a:t>[Open position] – Mobile/web developer</a:t>
             </a:r>
             <a:endParaRPr lang="en-US" sz="1500" dirty="0"/>
           </a:p>
@@ -15486,7 +15666,7 @@
                 <a:ea typeface="Arial" pitchFamily="34" charset="-122"/>
                 <a:cs typeface="Arial" pitchFamily="34" charset="-120"/>
               </a:rPr>
-              <a:t>Audio / real-time, mobile SDK, Canvas/WebGPU</a:t>
+              <a:t>First hire from the pre-seed (month 3): iOS/Android, PWA, later SDK</a:t>
             </a:r>
             <a:endParaRPr lang="en-US" sz="1200" dirty="0"/>
           </a:p>
@@ -15659,7 +15839,7 @@
                 <a:ea typeface="Arial" pitchFamily="34" charset="-122"/>
                 <a:cs typeface="Arial" pitchFamily="34" charset="-120"/>
               </a:rPr>
-              <a:t>Growth TR + DACH, creator program, education sales</a:t>
+              <a:t>Growth TR + DACH, creator program, education sales – with the seed round</a:t>
             </a:r>
             <a:endParaRPr lang="en-US" sz="1200" dirty="0"/>
           </a:p>
@@ -15870,6 +16050,5010 @@
           <a:chExt cx="0" cy="0"/>
         </a:xfrm>
       </p:grpSpPr>
+      <p:sp>
+        <p:nvSpPr>
+          <p:cNvPr id="2" name="Kicker"/>
+          <p:cNvSpPr txBox="1"/>
+          <p:nvPr/>
+        </p:nvSpPr>
+        <p:spPr>
+          <a:xfrm>
+            <a:off x="548640" y="182880"/>
+            <a:ext cx="8229600" cy="237744"/>
+          </a:xfrm>
+          <a:prstGeom prst="rect">
+            <a:avLst/>
+          </a:prstGeom>
+          <a:noFill/>
+          <a:ln/>
+        </p:spPr>
+        <p:txBody>
+          <a:bodyPr wrap="square" lIns="0" tIns="0" rIns="0" bIns="0" rtlCol="0" anchor="ctr"/>
+          <a:lstStyle/>
+          <a:p>
+            <a:pPr indent="0" marL="0">
+              <a:buNone/>
+            </a:pPr>
+            <a:r>
+              <a:rPr lang="en-US" sz="1000" b="1" spc="300" kern="0" dirty="0">
+                <a:solidFill>
+                  <a:srgbClr val="FFD166"/>
+                </a:solidFill>
+                <a:latin typeface="Arial" pitchFamily="34" charset="0"/>
+                <a:ea typeface="Arial" pitchFamily="34" charset="-122"/>
+                <a:cs typeface="Arial" pitchFamily="34" charset="-120"/>
+              </a:rPr>
+              <a:t>FINANCIALS &amp; VALUATION · ESTIMATE</a:t>
+            </a:r>
+            <a:endParaRPr lang="en-US" sz="1000" dirty="0"/>
+          </a:p>
+        </p:txBody>
+      </p:sp>
+      <p:sp>
+        <p:nvSpPr>
+          <p:cNvPr id="3" name="Titel"/>
+          <p:cNvSpPr txBox="1"/>
+          <p:nvPr/>
+        </p:nvSpPr>
+        <p:spPr>
+          <a:xfrm>
+            <a:off x="548640" y="438912"/>
+            <a:ext cx="11094415" cy="777240"/>
+          </a:xfrm>
+          <a:prstGeom prst="rect">
+            <a:avLst/>
+          </a:prstGeom>
+          <a:noFill/>
+          <a:ln/>
+        </p:spPr>
+        <p:txBody>
+          <a:bodyPr wrap="square" lIns="0" tIns="0" rIns="0" bIns="0" rtlCol="0" anchor="t">
+            <a:normAutofit/>
+          </a:bodyPr>
+          <a:lstStyle/>
+          <a:p>
+            <a:pPr indent="0" marL="0">
+              <a:buNone/>
+            </a:pPr>
+            <a:r>
+              <a:rPr lang="en-US" sz="3200" b="1" dirty="0">
+                <a:solidFill>
+                  <a:srgbClr val="FFFFFF"/>
+                </a:solidFill>
+                <a:latin typeface="Arial" pitchFamily="34" charset="0"/>
+                <a:ea typeface="Arial" pitchFamily="34" charset="-122"/>
+                <a:cs typeface="Arial" pitchFamily="34" charset="-120"/>
+              </a:rPr>
+              <a:t>€250k for 18 months – then the seed round</a:t>
+            </a:r>
+            <a:endParaRPr lang="en-US" sz="3200" dirty="0"/>
+          </a:p>
+        </p:txBody>
+      </p:sp>
+      <p:sp>
+        <p:nvSpPr>
+          <p:cNvPr id="4" name="Fuß"/>
+          <p:cNvSpPr txBox="1"/>
+          <p:nvPr/>
+        </p:nvSpPr>
+        <p:spPr>
+          <a:xfrm>
+            <a:off x="7071055" y="6473952"/>
+            <a:ext cx="4572000" cy="228600"/>
+          </a:xfrm>
+          <a:prstGeom prst="rect">
+            <a:avLst/>
+          </a:prstGeom>
+          <a:noFill/>
+          <a:ln/>
+        </p:spPr>
+        <p:txBody>
+          <a:bodyPr wrap="square" lIns="0" tIns="0" rIns="0" bIns="0" rtlCol="0" anchor="ctr"/>
+          <a:lstStyle/>
+          <a:p>
+            <a:pPr algn="r" indent="0" marL="0">
+              <a:buNone/>
+            </a:pPr>
+            <a:r>
+              <a:rPr lang="en-US" sz="900" dirty="0">
+                <a:solidFill>
+                  <a:srgbClr val="6B7280"/>
+                </a:solidFill>
+                <a:latin typeface="Arial" pitchFamily="34" charset="0"/>
+                <a:ea typeface="Arial" pitchFamily="34" charset="-122"/>
+                <a:cs typeface="Arial" pitchFamily="34" charset="-120"/>
+              </a:rPr>
+              <a:t>Confidential · October 2026  ·  LiveFX  ·  17</a:t>
+            </a:r>
+            <a:endParaRPr lang="en-US" sz="900" dirty="0"/>
+          </a:p>
+        </p:txBody>
+      </p:sp>
+      <p:sp>
+        <p:nvSpPr>
+          <p:cNvPr id="6" name="Text 3"/>
+          <p:cNvSpPr txBox="1"/>
+          <p:nvPr/>
+        </p:nvSpPr>
+        <p:spPr>
+          <a:xfrm>
+            <a:off x="548640" y="1298448"/>
+            <a:ext cx="6583680" cy="292608"/>
+          </a:xfrm>
+          <a:prstGeom prst="rect">
+            <a:avLst/>
+          </a:prstGeom>
+          <a:noFill/>
+          <a:ln/>
+        </p:spPr>
+        <p:txBody>
+          <a:bodyPr wrap="square" lIns="0" tIns="0" rIns="0" bIns="0" rtlCol="0" anchor="t">
+            <a:normAutofit/>
+          </a:bodyPr>
+          <a:lstStyle/>
+          <a:p>
+            <a:pPr indent="0" marL="0">
+              <a:buNone/>
+            </a:pPr>
+            <a:r>
+              <a:rPr lang="en-US" sz="1300" b="1" dirty="0">
+                <a:solidFill>
+                  <a:srgbClr val="FFD166"/>
+                </a:solidFill>
+                <a:latin typeface="Arial" pitchFamily="34" charset="0"/>
+                <a:ea typeface="Arial" pitchFamily="34" charset="-122"/>
+                <a:cs typeface="Arial" pitchFamily="34" charset="-120"/>
+              </a:rPr>
+              <a:t>5-year P&amp;L, base scenario (€k)</a:t>
+            </a:r>
+            <a:endParaRPr lang="en-US" sz="1300" dirty="0"/>
+          </a:p>
+        </p:txBody>
+      </p:sp>
+      <p:graphicFrame>
+        <p:nvGraphicFramePr>
+          <p:cNvPr id="18" name="Table 0"/>
+          <p:cNvGraphicFramePr>
+            <a:graphicFrameLocks noGrp="1"/>
+          </p:cNvGraphicFramePr>
+          <p:nvPr>
+            <p:extLst>
+              <p:ext uri="{D42A27DB-BD31-4B8C-83A1-F6EECF244321}">
+                <p14:modId xmlns:p14="http://schemas.microsoft.com/office/powerpoint/2010/main" val="1579011935"/>
+              </p:ext>
+            </p:extLst>
+          </p:nvPr>
+        </p:nvGraphicFramePr>
+        <p:xfrm>
+          <a:off x="548640" y="1645920"/>
+          <a:ext cx="6583680" cy="914400"/>
+        </p:xfrm>
+        <a:graphic>
+          <a:graphicData uri="http://schemas.openxmlformats.org/drawingml/2006/table">
+            <a:tbl>
+              <a:tblPr/>
+              <a:tblGrid>
+                <a:gridCol w="1600200"/>
+                <a:gridCol w="996696"/>
+                <a:gridCol w="996696"/>
+                <a:gridCol w="996696"/>
+                <a:gridCol w="996696"/>
+                <a:gridCol w="996696"/>
+              </a:tblGrid>
+              <a:tr h="365760">
+                <a:tc>
+                  <a:txBody>
+                    <a:bodyPr/>
+                    <a:lstStyle/>
+                    <a:p>
+                      <a:pPr algn="l" indent="0" marL="0">
+                        <a:buNone/>
+                      </a:pPr>
+                      <a:r>
+                        <a:rPr lang="en-US" sz="1200" b="1" dirty="0">
+                          <a:solidFill>
+                            <a:srgbClr val="FFD166"/>
+                          </a:solidFill>
+                          <a:latin typeface="Arial" pitchFamily="34" charset="0"/>
+                          <a:ea typeface="Arial" pitchFamily="34" charset="-122"/>
+                          <a:cs typeface="Arial" pitchFamily="34" charset="-120"/>
+                        </a:rPr>
+                        <a:t>€k</a:t>
+                      </a:r>
+                      <a:endParaRPr lang="en-US" sz="1200" dirty="0">
+                        <a:latin typeface="Arial" charset="0"/>
+                        <a:ea typeface="Arial" charset="0"/>
+                        <a:cs typeface="Arial" charset="0"/>
+                      </a:endParaRPr>
+                    </a:p>
+                  </a:txBody>
+                  <a:tcPr marL="91440" marR="91440" marT="0" marB="0" anchor="ctr">
+                    <a:lnL w="12700" cap="flat" cmpd="sng" algn="ctr">
+                      <a:solidFill>
+                        <a:srgbClr val="0F1115"/>
+                      </a:solidFill>
+                      <a:prstDash val="solid"/>
+                      <a:round/>
+                      <a:headEnd type="none" w="med" len="med"/>
+                      <a:tailEnd type="none" w="med" len="med"/>
+                    </a:lnL>
+                    <a:lnR w="12700" cap="flat" cmpd="sng" algn="ctr">
+                      <a:solidFill>
+                        <a:srgbClr val="0F1115"/>
+                      </a:solidFill>
+                      <a:prstDash val="solid"/>
+                      <a:round/>
+                      <a:headEnd type="none" w="med" len="med"/>
+                      <a:tailEnd type="none" w="med" len="med"/>
+                    </a:lnR>
+                    <a:lnT w="12700" cap="flat" cmpd="sng" algn="ctr">
+                      <a:solidFill>
+                        <a:srgbClr val="0F1115"/>
+                      </a:solidFill>
+                      <a:prstDash val="solid"/>
+                      <a:round/>
+                      <a:headEnd type="none" w="med" len="med"/>
+                      <a:tailEnd type="none" w="med" len="med"/>
+                    </a:lnT>
+                    <a:lnB w="12700" cap="flat" cmpd="sng" algn="ctr">
+                      <a:solidFill>
+                        <a:srgbClr val="0F1115"/>
+                      </a:solidFill>
+                      <a:prstDash val="solid"/>
+                      <a:round/>
+                      <a:headEnd type="none" w="med" len="med"/>
+                      <a:tailEnd type="none" w="med" len="med"/>
+                    </a:lnB>
+                    <a:solidFill>
+                      <a:srgbClr val="1F2330"/>
+                    </a:solidFill>
+                  </a:tcPr>
+                </a:tc>
+                <a:tc>
+                  <a:txBody>
+                    <a:bodyPr/>
+                    <a:lstStyle/>
+                    <a:p>
+                      <a:pPr algn="r" indent="0" marL="0">
+                        <a:buNone/>
+                      </a:pPr>
+                      <a:r>
+                        <a:rPr lang="en-US" sz="1200" b="1" dirty="0">
+                          <a:solidFill>
+                            <a:srgbClr val="FFD166"/>
+                          </a:solidFill>
+                          <a:latin typeface="Arial" pitchFamily="34" charset="0"/>
+                          <a:ea typeface="Arial" pitchFamily="34" charset="-122"/>
+                          <a:cs typeface="Arial" pitchFamily="34" charset="-120"/>
+                        </a:rPr>
+                        <a:t>2027</a:t>
+                      </a:r>
+                      <a:endParaRPr lang="en-US" sz="1200" dirty="0">
+                        <a:latin typeface="Arial" charset="0"/>
+                        <a:ea typeface="Arial" charset="0"/>
+                        <a:cs typeface="Arial" charset="0"/>
+                      </a:endParaRPr>
+                    </a:p>
+                  </a:txBody>
+                  <a:tcPr marL="91440" marR="91440" marT="0" marB="0" anchor="ctr">
+                    <a:lnL w="12700" cap="flat" cmpd="sng" algn="ctr">
+                      <a:solidFill>
+                        <a:srgbClr val="0F1115"/>
+                      </a:solidFill>
+                      <a:prstDash val="solid"/>
+                      <a:round/>
+                      <a:headEnd type="none" w="med" len="med"/>
+                      <a:tailEnd type="none" w="med" len="med"/>
+                    </a:lnL>
+                    <a:lnR w="12700" cap="flat" cmpd="sng" algn="ctr">
+                      <a:solidFill>
+                        <a:srgbClr val="0F1115"/>
+                      </a:solidFill>
+                      <a:prstDash val="solid"/>
+                      <a:round/>
+                      <a:headEnd type="none" w="med" len="med"/>
+                      <a:tailEnd type="none" w="med" len="med"/>
+                    </a:lnR>
+                    <a:lnT w="12700" cap="flat" cmpd="sng" algn="ctr">
+                      <a:solidFill>
+                        <a:srgbClr val="0F1115"/>
+                      </a:solidFill>
+                      <a:prstDash val="solid"/>
+                      <a:round/>
+                      <a:headEnd type="none" w="med" len="med"/>
+                      <a:tailEnd type="none" w="med" len="med"/>
+                    </a:lnT>
+                    <a:lnB w="12700" cap="flat" cmpd="sng" algn="ctr">
+                      <a:solidFill>
+                        <a:srgbClr val="0F1115"/>
+                      </a:solidFill>
+                      <a:prstDash val="solid"/>
+                      <a:round/>
+                      <a:headEnd type="none" w="med" len="med"/>
+                      <a:tailEnd type="none" w="med" len="med"/>
+                    </a:lnB>
+                    <a:solidFill>
+                      <a:srgbClr val="1F2330"/>
+                    </a:solidFill>
+                  </a:tcPr>
+                </a:tc>
+                <a:tc>
+                  <a:txBody>
+                    <a:bodyPr/>
+                    <a:lstStyle/>
+                    <a:p>
+                      <a:pPr algn="r" indent="0" marL="0">
+                        <a:buNone/>
+                      </a:pPr>
+                      <a:r>
+                        <a:rPr lang="en-US" sz="1200" b="1" dirty="0">
+                          <a:solidFill>
+                            <a:srgbClr val="FFD166"/>
+                          </a:solidFill>
+                          <a:latin typeface="Arial" pitchFamily="34" charset="0"/>
+                          <a:ea typeface="Arial" pitchFamily="34" charset="-122"/>
+                          <a:cs typeface="Arial" pitchFamily="34" charset="-120"/>
+                        </a:rPr>
+                        <a:t>2028</a:t>
+                      </a:r>
+                      <a:endParaRPr lang="en-US" sz="1200" dirty="0">
+                        <a:latin typeface="Arial" charset="0"/>
+                        <a:ea typeface="Arial" charset="0"/>
+                        <a:cs typeface="Arial" charset="0"/>
+                      </a:endParaRPr>
+                    </a:p>
+                  </a:txBody>
+                  <a:tcPr marL="91440" marR="91440" marT="0" marB="0" anchor="ctr">
+                    <a:lnL w="12700" cap="flat" cmpd="sng" algn="ctr">
+                      <a:solidFill>
+                        <a:srgbClr val="0F1115"/>
+                      </a:solidFill>
+                      <a:prstDash val="solid"/>
+                      <a:round/>
+                      <a:headEnd type="none" w="med" len="med"/>
+                      <a:tailEnd type="none" w="med" len="med"/>
+                    </a:lnL>
+                    <a:lnR w="12700" cap="flat" cmpd="sng" algn="ctr">
+                      <a:solidFill>
+                        <a:srgbClr val="0F1115"/>
+                      </a:solidFill>
+                      <a:prstDash val="solid"/>
+                      <a:round/>
+                      <a:headEnd type="none" w="med" len="med"/>
+                      <a:tailEnd type="none" w="med" len="med"/>
+                    </a:lnR>
+                    <a:lnT w="12700" cap="flat" cmpd="sng" algn="ctr">
+                      <a:solidFill>
+                        <a:srgbClr val="0F1115"/>
+                      </a:solidFill>
+                      <a:prstDash val="solid"/>
+                      <a:round/>
+                      <a:headEnd type="none" w="med" len="med"/>
+                      <a:tailEnd type="none" w="med" len="med"/>
+                    </a:lnT>
+                    <a:lnB w="12700" cap="flat" cmpd="sng" algn="ctr">
+                      <a:solidFill>
+                        <a:srgbClr val="0F1115"/>
+                      </a:solidFill>
+                      <a:prstDash val="solid"/>
+                      <a:round/>
+                      <a:headEnd type="none" w="med" len="med"/>
+                      <a:tailEnd type="none" w="med" len="med"/>
+                    </a:lnB>
+                    <a:solidFill>
+                      <a:srgbClr val="1F2330"/>
+                    </a:solidFill>
+                  </a:tcPr>
+                </a:tc>
+                <a:tc>
+                  <a:txBody>
+                    <a:bodyPr/>
+                    <a:lstStyle/>
+                    <a:p>
+                      <a:pPr algn="r" indent="0" marL="0">
+                        <a:buNone/>
+                      </a:pPr>
+                      <a:r>
+                        <a:rPr lang="en-US" sz="1200" b="1" dirty="0">
+                          <a:solidFill>
+                            <a:srgbClr val="FFD166"/>
+                          </a:solidFill>
+                          <a:latin typeface="Arial" pitchFamily="34" charset="0"/>
+                          <a:ea typeface="Arial" pitchFamily="34" charset="-122"/>
+                          <a:cs typeface="Arial" pitchFamily="34" charset="-120"/>
+                        </a:rPr>
+                        <a:t>2029</a:t>
+                      </a:r>
+                      <a:endParaRPr lang="en-US" sz="1200" dirty="0">
+                        <a:latin typeface="Arial" charset="0"/>
+                        <a:ea typeface="Arial" charset="0"/>
+                        <a:cs typeface="Arial" charset="0"/>
+                      </a:endParaRPr>
+                    </a:p>
+                  </a:txBody>
+                  <a:tcPr marL="91440" marR="91440" marT="0" marB="0" anchor="ctr">
+                    <a:lnL w="12700" cap="flat" cmpd="sng" algn="ctr">
+                      <a:solidFill>
+                        <a:srgbClr val="0F1115"/>
+                      </a:solidFill>
+                      <a:prstDash val="solid"/>
+                      <a:round/>
+                      <a:headEnd type="none" w="med" len="med"/>
+                      <a:tailEnd type="none" w="med" len="med"/>
+                    </a:lnL>
+                    <a:lnR w="12700" cap="flat" cmpd="sng" algn="ctr">
+                      <a:solidFill>
+                        <a:srgbClr val="0F1115"/>
+                      </a:solidFill>
+                      <a:prstDash val="solid"/>
+                      <a:round/>
+                      <a:headEnd type="none" w="med" len="med"/>
+                      <a:tailEnd type="none" w="med" len="med"/>
+                    </a:lnR>
+                    <a:lnT w="12700" cap="flat" cmpd="sng" algn="ctr">
+                      <a:solidFill>
+                        <a:srgbClr val="0F1115"/>
+                      </a:solidFill>
+                      <a:prstDash val="solid"/>
+                      <a:round/>
+                      <a:headEnd type="none" w="med" len="med"/>
+                      <a:tailEnd type="none" w="med" len="med"/>
+                    </a:lnT>
+                    <a:lnB w="12700" cap="flat" cmpd="sng" algn="ctr">
+                      <a:solidFill>
+                        <a:srgbClr val="0F1115"/>
+                      </a:solidFill>
+                      <a:prstDash val="solid"/>
+                      <a:round/>
+                      <a:headEnd type="none" w="med" len="med"/>
+                      <a:tailEnd type="none" w="med" len="med"/>
+                    </a:lnB>
+                    <a:solidFill>
+                      <a:srgbClr val="1F2330"/>
+                    </a:solidFill>
+                  </a:tcPr>
+                </a:tc>
+                <a:tc>
+                  <a:txBody>
+                    <a:bodyPr/>
+                    <a:lstStyle/>
+                    <a:p>
+                      <a:pPr algn="r" indent="0" marL="0">
+                        <a:buNone/>
+                      </a:pPr>
+                      <a:r>
+                        <a:rPr lang="en-US" sz="1200" b="1" dirty="0">
+                          <a:solidFill>
+                            <a:srgbClr val="FFD166"/>
+                          </a:solidFill>
+                          <a:latin typeface="Arial" pitchFamily="34" charset="0"/>
+                          <a:ea typeface="Arial" pitchFamily="34" charset="-122"/>
+                          <a:cs typeface="Arial" pitchFamily="34" charset="-120"/>
+                        </a:rPr>
+                        <a:t>2030</a:t>
+                      </a:r>
+                      <a:endParaRPr lang="en-US" sz="1200" dirty="0">
+                        <a:latin typeface="Arial" charset="0"/>
+                        <a:ea typeface="Arial" charset="0"/>
+                        <a:cs typeface="Arial" charset="0"/>
+                      </a:endParaRPr>
+                    </a:p>
+                  </a:txBody>
+                  <a:tcPr marL="91440" marR="91440" marT="0" marB="0" anchor="ctr">
+                    <a:lnL w="12700" cap="flat" cmpd="sng" algn="ctr">
+                      <a:solidFill>
+                        <a:srgbClr val="0F1115"/>
+                      </a:solidFill>
+                      <a:prstDash val="solid"/>
+                      <a:round/>
+                      <a:headEnd type="none" w="med" len="med"/>
+                      <a:tailEnd type="none" w="med" len="med"/>
+                    </a:lnL>
+                    <a:lnR w="12700" cap="flat" cmpd="sng" algn="ctr">
+                      <a:solidFill>
+                        <a:srgbClr val="0F1115"/>
+                      </a:solidFill>
+                      <a:prstDash val="solid"/>
+                      <a:round/>
+                      <a:headEnd type="none" w="med" len="med"/>
+                      <a:tailEnd type="none" w="med" len="med"/>
+                    </a:lnR>
+                    <a:lnT w="12700" cap="flat" cmpd="sng" algn="ctr">
+                      <a:solidFill>
+                        <a:srgbClr val="0F1115"/>
+                      </a:solidFill>
+                      <a:prstDash val="solid"/>
+                      <a:round/>
+                      <a:headEnd type="none" w="med" len="med"/>
+                      <a:tailEnd type="none" w="med" len="med"/>
+                    </a:lnT>
+                    <a:lnB w="12700" cap="flat" cmpd="sng" algn="ctr">
+                      <a:solidFill>
+                        <a:srgbClr val="0F1115"/>
+                      </a:solidFill>
+                      <a:prstDash val="solid"/>
+                      <a:round/>
+                      <a:headEnd type="none" w="med" len="med"/>
+                      <a:tailEnd type="none" w="med" len="med"/>
+                    </a:lnB>
+                    <a:solidFill>
+                      <a:srgbClr val="1F2330"/>
+                    </a:solidFill>
+                  </a:tcPr>
+                </a:tc>
+                <a:tc>
+                  <a:txBody>
+                    <a:bodyPr/>
+                    <a:lstStyle/>
+                    <a:p>
+                      <a:pPr algn="r" indent="0" marL="0">
+                        <a:buNone/>
+                      </a:pPr>
+                      <a:r>
+                        <a:rPr lang="en-US" sz="1200" b="1" dirty="0">
+                          <a:solidFill>
+                            <a:srgbClr val="FFD166"/>
+                          </a:solidFill>
+                          <a:latin typeface="Arial" pitchFamily="34" charset="0"/>
+                          <a:ea typeface="Arial" pitchFamily="34" charset="-122"/>
+                          <a:cs typeface="Arial" pitchFamily="34" charset="-120"/>
+                        </a:rPr>
+                        <a:t>2031</a:t>
+                      </a:r>
+                      <a:endParaRPr lang="en-US" sz="1200" dirty="0">
+                        <a:latin typeface="Arial" charset="0"/>
+                        <a:ea typeface="Arial" charset="0"/>
+                        <a:cs typeface="Arial" charset="0"/>
+                      </a:endParaRPr>
+                    </a:p>
+                  </a:txBody>
+                  <a:tcPr marL="91440" marR="91440" marT="0" marB="0" anchor="ctr">
+                    <a:lnL w="12700" cap="flat" cmpd="sng" algn="ctr">
+                      <a:solidFill>
+                        <a:srgbClr val="0F1115"/>
+                      </a:solidFill>
+                      <a:prstDash val="solid"/>
+                      <a:round/>
+                      <a:headEnd type="none" w="med" len="med"/>
+                      <a:tailEnd type="none" w="med" len="med"/>
+                    </a:lnL>
+                    <a:lnR w="12700" cap="flat" cmpd="sng" algn="ctr">
+                      <a:solidFill>
+                        <a:srgbClr val="0F1115"/>
+                      </a:solidFill>
+                      <a:prstDash val="solid"/>
+                      <a:round/>
+                      <a:headEnd type="none" w="med" len="med"/>
+                      <a:tailEnd type="none" w="med" len="med"/>
+                    </a:lnR>
+                    <a:lnT w="12700" cap="flat" cmpd="sng" algn="ctr">
+                      <a:solidFill>
+                        <a:srgbClr val="0F1115"/>
+                      </a:solidFill>
+                      <a:prstDash val="solid"/>
+                      <a:round/>
+                      <a:headEnd type="none" w="med" len="med"/>
+                      <a:tailEnd type="none" w="med" len="med"/>
+                    </a:lnT>
+                    <a:lnB w="12700" cap="flat" cmpd="sng" algn="ctr">
+                      <a:solidFill>
+                        <a:srgbClr val="0F1115"/>
+                      </a:solidFill>
+                      <a:prstDash val="solid"/>
+                      <a:round/>
+                      <a:headEnd type="none" w="med" len="med"/>
+                      <a:tailEnd type="none" w="med" len="med"/>
+                    </a:lnB>
+                    <a:solidFill>
+                      <a:srgbClr val="1F2330"/>
+                    </a:solidFill>
+                  </a:tcPr>
+                </a:tc>
+              </a:tr>
+              <a:tr h="365760">
+                <a:tc>
+                  <a:txBody>
+                    <a:bodyPr/>
+                    <a:lstStyle/>
+                    <a:p>
+                      <a:pPr algn="l" indent="0" marL="0">
+                        <a:buNone/>
+                      </a:pPr>
+                      <a:r>
+                        <a:rPr lang="en-US" sz="1200" b="1" dirty="0">
+                          <a:solidFill>
+                            <a:srgbClr val="9AA3B5"/>
+                          </a:solidFill>
+                          <a:latin typeface="Arial" pitchFamily="34" charset="0"/>
+                          <a:ea typeface="Arial" pitchFamily="34" charset="-122"/>
+                          <a:cs typeface="Arial" pitchFamily="34" charset="-120"/>
+                        </a:rPr>
+                        <a:t>Revenue</a:t>
+                      </a:r>
+                      <a:endParaRPr lang="en-US" sz="1200" dirty="0">
+                        <a:latin typeface="Arial" charset="0"/>
+                        <a:ea typeface="Arial" charset="0"/>
+                        <a:cs typeface="Arial" charset="0"/>
+                      </a:endParaRPr>
+                    </a:p>
+                  </a:txBody>
+                  <a:tcPr marL="91440" marR="91440" marT="0" marB="0" anchor="ctr">
+                    <a:lnL w="12700" cap="flat" cmpd="sng" algn="ctr">
+                      <a:solidFill>
+                        <a:srgbClr val="0F1115"/>
+                      </a:solidFill>
+                      <a:prstDash val="solid"/>
+                      <a:round/>
+                      <a:headEnd type="none" w="med" len="med"/>
+                      <a:tailEnd type="none" w="med" len="med"/>
+                    </a:lnL>
+                    <a:lnR w="12700" cap="flat" cmpd="sng" algn="ctr">
+                      <a:solidFill>
+                        <a:srgbClr val="0F1115"/>
+                      </a:solidFill>
+                      <a:prstDash val="solid"/>
+                      <a:round/>
+                      <a:headEnd type="none" w="med" len="med"/>
+                      <a:tailEnd type="none" w="med" len="med"/>
+                    </a:lnR>
+                    <a:lnT w="12700" cap="flat" cmpd="sng" algn="ctr">
+                      <a:solidFill>
+                        <a:srgbClr val="0F1115"/>
+                      </a:solidFill>
+                      <a:prstDash val="solid"/>
+                      <a:round/>
+                      <a:headEnd type="none" w="med" len="med"/>
+                      <a:tailEnd type="none" w="med" len="med"/>
+                    </a:lnT>
+                    <a:lnB w="12700" cap="flat" cmpd="sng" algn="ctr">
+                      <a:solidFill>
+                        <a:srgbClr val="0F1115"/>
+                      </a:solidFill>
+                      <a:prstDash val="solid"/>
+                      <a:round/>
+                      <a:headEnd type="none" w="med" len="med"/>
+                      <a:tailEnd type="none" w="med" len="med"/>
+                    </a:lnB>
+                    <a:solidFill>
+                      <a:srgbClr val="181B23"/>
+                    </a:solidFill>
+                  </a:tcPr>
+                </a:tc>
+                <a:tc>
+                  <a:txBody>
+                    <a:bodyPr/>
+                    <a:lstStyle/>
+                    <a:p>
+                      <a:pPr algn="r" indent="0" marL="0">
+                        <a:buNone/>
+                      </a:pPr>
+                      <a:r>
+                        <a:rPr lang="en-US" sz="1200" dirty="0">
+                          <a:solidFill>
+                            <a:srgbClr val="FFFFFF"/>
+                          </a:solidFill>
+                          <a:latin typeface="Arial" pitchFamily="34" charset="0"/>
+                          <a:ea typeface="Arial" pitchFamily="34" charset="-122"/>
+                          <a:cs typeface="Arial" pitchFamily="34" charset="-120"/>
+                        </a:rPr>
+                        <a:t>51</a:t>
+                      </a:r>
+                      <a:endParaRPr lang="en-US" sz="1200" dirty="0">
+                        <a:latin typeface="Arial" charset="0"/>
+                        <a:ea typeface="Arial" charset="0"/>
+                        <a:cs typeface="Arial" charset="0"/>
+                      </a:endParaRPr>
+                    </a:p>
+                  </a:txBody>
+                  <a:tcPr marL="91440" marR="91440" marT="0" marB="0" anchor="ctr">
+                    <a:lnL w="12700" cap="flat" cmpd="sng" algn="ctr">
+                      <a:solidFill>
+                        <a:srgbClr val="0F1115"/>
+                      </a:solidFill>
+                      <a:prstDash val="solid"/>
+                      <a:round/>
+                      <a:headEnd type="none" w="med" len="med"/>
+                      <a:tailEnd type="none" w="med" len="med"/>
+                    </a:lnL>
+                    <a:lnR w="12700" cap="flat" cmpd="sng" algn="ctr">
+                      <a:solidFill>
+                        <a:srgbClr val="0F1115"/>
+                      </a:solidFill>
+                      <a:prstDash val="solid"/>
+                      <a:round/>
+                      <a:headEnd type="none" w="med" len="med"/>
+                      <a:tailEnd type="none" w="med" len="med"/>
+                    </a:lnR>
+                    <a:lnT w="12700" cap="flat" cmpd="sng" algn="ctr">
+                      <a:solidFill>
+                        <a:srgbClr val="0F1115"/>
+                      </a:solidFill>
+                      <a:prstDash val="solid"/>
+                      <a:round/>
+                      <a:headEnd type="none" w="med" len="med"/>
+                      <a:tailEnd type="none" w="med" len="med"/>
+                    </a:lnT>
+                    <a:lnB w="12700" cap="flat" cmpd="sng" algn="ctr">
+                      <a:solidFill>
+                        <a:srgbClr val="0F1115"/>
+                      </a:solidFill>
+                      <a:prstDash val="solid"/>
+                      <a:round/>
+                      <a:headEnd type="none" w="med" len="med"/>
+                      <a:tailEnd type="none" w="med" len="med"/>
+                    </a:lnB>
+                    <a:solidFill>
+                      <a:srgbClr val="181B23"/>
+                    </a:solidFill>
+                  </a:tcPr>
+                </a:tc>
+                <a:tc>
+                  <a:txBody>
+                    <a:bodyPr/>
+                    <a:lstStyle/>
+                    <a:p>
+                      <a:pPr algn="r" indent="0" marL="0">
+                        <a:buNone/>
+                      </a:pPr>
+                      <a:r>
+                        <a:rPr lang="en-US" sz="1200" dirty="0">
+                          <a:solidFill>
+                            <a:srgbClr val="FFFFFF"/>
+                          </a:solidFill>
+                          <a:latin typeface="Arial" pitchFamily="34" charset="0"/>
+                          <a:ea typeface="Arial" pitchFamily="34" charset="-122"/>
+                          <a:cs typeface="Arial" pitchFamily="34" charset="-120"/>
+                        </a:rPr>
+                        <a:t>336</a:t>
+                      </a:r>
+                      <a:endParaRPr lang="en-US" sz="1200" dirty="0">
+                        <a:latin typeface="Arial" charset="0"/>
+                        <a:ea typeface="Arial" charset="0"/>
+                        <a:cs typeface="Arial" charset="0"/>
+                      </a:endParaRPr>
+                    </a:p>
+                  </a:txBody>
+                  <a:tcPr marL="91440" marR="91440" marT="0" marB="0" anchor="ctr">
+                    <a:lnL w="12700" cap="flat" cmpd="sng" algn="ctr">
+                      <a:solidFill>
+                        <a:srgbClr val="0F1115"/>
+                      </a:solidFill>
+                      <a:prstDash val="solid"/>
+                      <a:round/>
+                      <a:headEnd type="none" w="med" len="med"/>
+                      <a:tailEnd type="none" w="med" len="med"/>
+                    </a:lnL>
+                    <a:lnR w="12700" cap="flat" cmpd="sng" algn="ctr">
+                      <a:solidFill>
+                        <a:srgbClr val="0F1115"/>
+                      </a:solidFill>
+                      <a:prstDash val="solid"/>
+                      <a:round/>
+                      <a:headEnd type="none" w="med" len="med"/>
+                      <a:tailEnd type="none" w="med" len="med"/>
+                    </a:lnR>
+                    <a:lnT w="12700" cap="flat" cmpd="sng" algn="ctr">
+                      <a:solidFill>
+                        <a:srgbClr val="0F1115"/>
+                      </a:solidFill>
+                      <a:prstDash val="solid"/>
+                      <a:round/>
+                      <a:headEnd type="none" w="med" len="med"/>
+                      <a:tailEnd type="none" w="med" len="med"/>
+                    </a:lnT>
+                    <a:lnB w="12700" cap="flat" cmpd="sng" algn="ctr">
+                      <a:solidFill>
+                        <a:srgbClr val="0F1115"/>
+                      </a:solidFill>
+                      <a:prstDash val="solid"/>
+                      <a:round/>
+                      <a:headEnd type="none" w="med" len="med"/>
+                      <a:tailEnd type="none" w="med" len="med"/>
+                    </a:lnB>
+                    <a:solidFill>
+                      <a:srgbClr val="181B23"/>
+                    </a:solidFill>
+                  </a:tcPr>
+                </a:tc>
+                <a:tc>
+                  <a:txBody>
+                    <a:bodyPr/>
+                    <a:lstStyle/>
+                    <a:p>
+                      <a:pPr algn="r" indent="0" marL="0">
+                        <a:buNone/>
+                      </a:pPr>
+                      <a:r>
+                        <a:rPr lang="en-US" sz="1200" dirty="0">
+                          <a:solidFill>
+                            <a:srgbClr val="FFFFFF"/>
+                          </a:solidFill>
+                          <a:latin typeface="Arial" pitchFamily="34" charset="0"/>
+                          <a:ea typeface="Arial" pitchFamily="34" charset="-122"/>
+                          <a:cs typeface="Arial" pitchFamily="34" charset="-120"/>
+                        </a:rPr>
+                        <a:t>1,038</a:t>
+                      </a:r>
+                      <a:endParaRPr lang="en-US" sz="1200" dirty="0">
+                        <a:latin typeface="Arial" charset="0"/>
+                        <a:ea typeface="Arial" charset="0"/>
+                        <a:cs typeface="Arial" charset="0"/>
+                      </a:endParaRPr>
+                    </a:p>
+                  </a:txBody>
+                  <a:tcPr marL="91440" marR="91440" marT="0" marB="0" anchor="ctr">
+                    <a:lnL w="12700" cap="flat" cmpd="sng" algn="ctr">
+                      <a:solidFill>
+                        <a:srgbClr val="0F1115"/>
+                      </a:solidFill>
+                      <a:prstDash val="solid"/>
+                      <a:round/>
+                      <a:headEnd type="none" w="med" len="med"/>
+                      <a:tailEnd type="none" w="med" len="med"/>
+                    </a:lnL>
+                    <a:lnR w="12700" cap="flat" cmpd="sng" algn="ctr">
+                      <a:solidFill>
+                        <a:srgbClr val="0F1115"/>
+                      </a:solidFill>
+                      <a:prstDash val="solid"/>
+                      <a:round/>
+                      <a:headEnd type="none" w="med" len="med"/>
+                      <a:tailEnd type="none" w="med" len="med"/>
+                    </a:lnR>
+                    <a:lnT w="12700" cap="flat" cmpd="sng" algn="ctr">
+                      <a:solidFill>
+                        <a:srgbClr val="0F1115"/>
+                      </a:solidFill>
+                      <a:prstDash val="solid"/>
+                      <a:round/>
+                      <a:headEnd type="none" w="med" len="med"/>
+                      <a:tailEnd type="none" w="med" len="med"/>
+                    </a:lnT>
+                    <a:lnB w="12700" cap="flat" cmpd="sng" algn="ctr">
+                      <a:solidFill>
+                        <a:srgbClr val="0F1115"/>
+                      </a:solidFill>
+                      <a:prstDash val="solid"/>
+                      <a:round/>
+                      <a:headEnd type="none" w="med" len="med"/>
+                      <a:tailEnd type="none" w="med" len="med"/>
+                    </a:lnB>
+                    <a:solidFill>
+                      <a:srgbClr val="181B23"/>
+                    </a:solidFill>
+                  </a:tcPr>
+                </a:tc>
+                <a:tc>
+                  <a:txBody>
+                    <a:bodyPr/>
+                    <a:lstStyle/>
+                    <a:p>
+                      <a:pPr algn="r" indent="0" marL="0">
+                        <a:buNone/>
+                      </a:pPr>
+                      <a:r>
+                        <a:rPr lang="en-US" sz="1200" dirty="0">
+                          <a:solidFill>
+                            <a:srgbClr val="FFFFFF"/>
+                          </a:solidFill>
+                          <a:latin typeface="Arial" pitchFamily="34" charset="0"/>
+                          <a:ea typeface="Arial" pitchFamily="34" charset="-122"/>
+                          <a:cs typeface="Arial" pitchFamily="34" charset="-120"/>
+                        </a:rPr>
+                        <a:t>1,984</a:t>
+                      </a:r>
+                      <a:endParaRPr lang="en-US" sz="1200" dirty="0">
+                        <a:latin typeface="Arial" charset="0"/>
+                        <a:ea typeface="Arial" charset="0"/>
+                        <a:cs typeface="Arial" charset="0"/>
+                      </a:endParaRPr>
+                    </a:p>
+                  </a:txBody>
+                  <a:tcPr marL="91440" marR="91440" marT="0" marB="0" anchor="ctr">
+                    <a:lnL w="12700" cap="flat" cmpd="sng" algn="ctr">
+                      <a:solidFill>
+                        <a:srgbClr val="0F1115"/>
+                      </a:solidFill>
+                      <a:prstDash val="solid"/>
+                      <a:round/>
+                      <a:headEnd type="none" w="med" len="med"/>
+                      <a:tailEnd type="none" w="med" len="med"/>
+                    </a:lnL>
+                    <a:lnR w="12700" cap="flat" cmpd="sng" algn="ctr">
+                      <a:solidFill>
+                        <a:srgbClr val="0F1115"/>
+                      </a:solidFill>
+                      <a:prstDash val="solid"/>
+                      <a:round/>
+                      <a:headEnd type="none" w="med" len="med"/>
+                      <a:tailEnd type="none" w="med" len="med"/>
+                    </a:lnR>
+                    <a:lnT w="12700" cap="flat" cmpd="sng" algn="ctr">
+                      <a:solidFill>
+                        <a:srgbClr val="0F1115"/>
+                      </a:solidFill>
+                      <a:prstDash val="solid"/>
+                      <a:round/>
+                      <a:headEnd type="none" w="med" len="med"/>
+                      <a:tailEnd type="none" w="med" len="med"/>
+                    </a:lnT>
+                    <a:lnB w="12700" cap="flat" cmpd="sng" algn="ctr">
+                      <a:solidFill>
+                        <a:srgbClr val="0F1115"/>
+                      </a:solidFill>
+                      <a:prstDash val="solid"/>
+                      <a:round/>
+                      <a:headEnd type="none" w="med" len="med"/>
+                      <a:tailEnd type="none" w="med" len="med"/>
+                    </a:lnB>
+                    <a:solidFill>
+                      <a:srgbClr val="181B23"/>
+                    </a:solidFill>
+                  </a:tcPr>
+                </a:tc>
+                <a:tc>
+                  <a:txBody>
+                    <a:bodyPr/>
+                    <a:lstStyle/>
+                    <a:p>
+                      <a:pPr algn="r" indent="0" marL="0">
+                        <a:buNone/>
+                      </a:pPr>
+                      <a:r>
+                        <a:rPr lang="en-US" sz="1200" dirty="0">
+                          <a:solidFill>
+                            <a:srgbClr val="FFFFFF"/>
+                          </a:solidFill>
+                          <a:latin typeface="Arial" pitchFamily="34" charset="0"/>
+                          <a:ea typeface="Arial" pitchFamily="34" charset="-122"/>
+                          <a:cs typeface="Arial" pitchFamily="34" charset="-120"/>
+                        </a:rPr>
+                        <a:t>3,152</a:t>
+                      </a:r>
+                      <a:endParaRPr lang="en-US" sz="1200" dirty="0">
+                        <a:latin typeface="Arial" charset="0"/>
+                        <a:ea typeface="Arial" charset="0"/>
+                        <a:cs typeface="Arial" charset="0"/>
+                      </a:endParaRPr>
+                    </a:p>
+                  </a:txBody>
+                  <a:tcPr marL="91440" marR="91440" marT="0" marB="0" anchor="ctr">
+                    <a:lnL w="12700" cap="flat" cmpd="sng" algn="ctr">
+                      <a:solidFill>
+                        <a:srgbClr val="0F1115"/>
+                      </a:solidFill>
+                      <a:prstDash val="solid"/>
+                      <a:round/>
+                      <a:headEnd type="none" w="med" len="med"/>
+                      <a:tailEnd type="none" w="med" len="med"/>
+                    </a:lnL>
+                    <a:lnR w="12700" cap="flat" cmpd="sng" algn="ctr">
+                      <a:solidFill>
+                        <a:srgbClr val="0F1115"/>
+                      </a:solidFill>
+                      <a:prstDash val="solid"/>
+                      <a:round/>
+                      <a:headEnd type="none" w="med" len="med"/>
+                      <a:tailEnd type="none" w="med" len="med"/>
+                    </a:lnR>
+                    <a:lnT w="12700" cap="flat" cmpd="sng" algn="ctr">
+                      <a:solidFill>
+                        <a:srgbClr val="0F1115"/>
+                      </a:solidFill>
+                      <a:prstDash val="solid"/>
+                      <a:round/>
+                      <a:headEnd type="none" w="med" len="med"/>
+                      <a:tailEnd type="none" w="med" len="med"/>
+                    </a:lnT>
+                    <a:lnB w="12700" cap="flat" cmpd="sng" algn="ctr">
+                      <a:solidFill>
+                        <a:srgbClr val="0F1115"/>
+                      </a:solidFill>
+                      <a:prstDash val="solid"/>
+                      <a:round/>
+                      <a:headEnd type="none" w="med" len="med"/>
+                      <a:tailEnd type="none" w="med" len="med"/>
+                    </a:lnB>
+                    <a:solidFill>
+                      <a:srgbClr val="181B23"/>
+                    </a:solidFill>
+                  </a:tcPr>
+                </a:tc>
+              </a:tr>
+              <a:tr h="365760">
+                <a:tc>
+                  <a:txBody>
+                    <a:bodyPr/>
+                    <a:lstStyle/>
+                    <a:p>
+                      <a:pPr algn="l" indent="0" marL="0">
+                        <a:buNone/>
+                      </a:pPr>
+                      <a:r>
+                        <a:rPr lang="en-US" sz="1200" b="1" dirty="0">
+                          <a:solidFill>
+                            <a:srgbClr val="9AA3B5"/>
+                          </a:solidFill>
+                          <a:latin typeface="Arial" pitchFamily="34" charset="0"/>
+                          <a:ea typeface="Arial" pitchFamily="34" charset="-122"/>
+                          <a:cs typeface="Arial" pitchFamily="34" charset="-120"/>
+                        </a:rPr>
+                        <a:t>Costs</a:t>
+                      </a:r>
+                      <a:endParaRPr lang="en-US" sz="1200" dirty="0">
+                        <a:latin typeface="Arial" charset="0"/>
+                        <a:ea typeface="Arial" charset="0"/>
+                        <a:cs typeface="Arial" charset="0"/>
+                      </a:endParaRPr>
+                    </a:p>
+                  </a:txBody>
+                  <a:tcPr marL="91440" marR="91440" marT="0" marB="0" anchor="ctr">
+                    <a:lnL w="12700" cap="flat" cmpd="sng" algn="ctr">
+                      <a:solidFill>
+                        <a:srgbClr val="0F1115"/>
+                      </a:solidFill>
+                      <a:prstDash val="solid"/>
+                      <a:round/>
+                      <a:headEnd type="none" w="med" len="med"/>
+                      <a:tailEnd type="none" w="med" len="med"/>
+                    </a:lnL>
+                    <a:lnR w="12700" cap="flat" cmpd="sng" algn="ctr">
+                      <a:solidFill>
+                        <a:srgbClr val="0F1115"/>
+                      </a:solidFill>
+                      <a:prstDash val="solid"/>
+                      <a:round/>
+                      <a:headEnd type="none" w="med" len="med"/>
+                      <a:tailEnd type="none" w="med" len="med"/>
+                    </a:lnR>
+                    <a:lnT w="12700" cap="flat" cmpd="sng" algn="ctr">
+                      <a:solidFill>
+                        <a:srgbClr val="0F1115"/>
+                      </a:solidFill>
+                      <a:prstDash val="solid"/>
+                      <a:round/>
+                      <a:headEnd type="none" w="med" len="med"/>
+                      <a:tailEnd type="none" w="med" len="med"/>
+                    </a:lnT>
+                    <a:lnB w="12700" cap="flat" cmpd="sng" algn="ctr">
+                      <a:solidFill>
+                        <a:srgbClr val="0F1115"/>
+                      </a:solidFill>
+                      <a:prstDash val="solid"/>
+                      <a:round/>
+                      <a:headEnd type="none" w="med" len="med"/>
+                      <a:tailEnd type="none" w="med" len="med"/>
+                    </a:lnB>
+                    <a:solidFill>
+                      <a:srgbClr val="181B23"/>
+                    </a:solidFill>
+                  </a:tcPr>
+                </a:tc>
+                <a:tc>
+                  <a:txBody>
+                    <a:bodyPr/>
+                    <a:lstStyle/>
+                    <a:p>
+                      <a:pPr algn="r" indent="0" marL="0">
+                        <a:buNone/>
+                      </a:pPr>
+                      <a:r>
+                        <a:rPr lang="en-US" sz="1200" dirty="0">
+                          <a:solidFill>
+                            <a:srgbClr val="FFFFFF"/>
+                          </a:solidFill>
+                          <a:latin typeface="Arial" pitchFamily="34" charset="0"/>
+                          <a:ea typeface="Arial" pitchFamily="34" charset="-122"/>
+                          <a:cs typeface="Arial" pitchFamily="34" charset="-120"/>
+                        </a:rPr>
+                        <a:t>166</a:t>
+                      </a:r>
+                      <a:endParaRPr lang="en-US" sz="1200" dirty="0">
+                        <a:latin typeface="Arial" charset="0"/>
+                        <a:ea typeface="Arial" charset="0"/>
+                        <a:cs typeface="Arial" charset="0"/>
+                      </a:endParaRPr>
+                    </a:p>
+                  </a:txBody>
+                  <a:tcPr marL="91440" marR="91440" marT="0" marB="0" anchor="ctr">
+                    <a:lnL w="12700" cap="flat" cmpd="sng" algn="ctr">
+                      <a:solidFill>
+                        <a:srgbClr val="0F1115"/>
+                      </a:solidFill>
+                      <a:prstDash val="solid"/>
+                      <a:round/>
+                      <a:headEnd type="none" w="med" len="med"/>
+                      <a:tailEnd type="none" w="med" len="med"/>
+                    </a:lnL>
+                    <a:lnR w="12700" cap="flat" cmpd="sng" algn="ctr">
+                      <a:solidFill>
+                        <a:srgbClr val="0F1115"/>
+                      </a:solidFill>
+                      <a:prstDash val="solid"/>
+                      <a:round/>
+                      <a:headEnd type="none" w="med" len="med"/>
+                      <a:tailEnd type="none" w="med" len="med"/>
+                    </a:lnR>
+                    <a:lnT w="12700" cap="flat" cmpd="sng" algn="ctr">
+                      <a:solidFill>
+                        <a:srgbClr val="0F1115"/>
+                      </a:solidFill>
+                      <a:prstDash val="solid"/>
+                      <a:round/>
+                      <a:headEnd type="none" w="med" len="med"/>
+                      <a:tailEnd type="none" w="med" len="med"/>
+                    </a:lnT>
+                    <a:lnB w="12700" cap="flat" cmpd="sng" algn="ctr">
+                      <a:solidFill>
+                        <a:srgbClr val="0F1115"/>
+                      </a:solidFill>
+                      <a:prstDash val="solid"/>
+                      <a:round/>
+                      <a:headEnd type="none" w="med" len="med"/>
+                      <a:tailEnd type="none" w="med" len="med"/>
+                    </a:lnB>
+                    <a:solidFill>
+                      <a:srgbClr val="181B23"/>
+                    </a:solidFill>
+                  </a:tcPr>
+                </a:tc>
+                <a:tc>
+                  <a:txBody>
+                    <a:bodyPr/>
+                    <a:lstStyle/>
+                    <a:p>
+                      <a:pPr algn="r" indent="0" marL="0">
+                        <a:buNone/>
+                      </a:pPr>
+                      <a:r>
+                        <a:rPr lang="en-US" sz="1200" dirty="0">
+                          <a:solidFill>
+                            <a:srgbClr val="FFFFFF"/>
+                          </a:solidFill>
+                          <a:latin typeface="Arial" pitchFamily="34" charset="0"/>
+                          <a:ea typeface="Arial" pitchFamily="34" charset="-122"/>
+                          <a:cs typeface="Arial" pitchFamily="34" charset="-120"/>
+                        </a:rPr>
+                        <a:t>295</a:t>
+                      </a:r>
+                      <a:endParaRPr lang="en-US" sz="1200" dirty="0">
+                        <a:latin typeface="Arial" charset="0"/>
+                        <a:ea typeface="Arial" charset="0"/>
+                        <a:cs typeface="Arial" charset="0"/>
+                      </a:endParaRPr>
+                    </a:p>
+                  </a:txBody>
+                  <a:tcPr marL="91440" marR="91440" marT="0" marB="0" anchor="ctr">
+                    <a:lnL w="12700" cap="flat" cmpd="sng" algn="ctr">
+                      <a:solidFill>
+                        <a:srgbClr val="0F1115"/>
+                      </a:solidFill>
+                      <a:prstDash val="solid"/>
+                      <a:round/>
+                      <a:headEnd type="none" w="med" len="med"/>
+                      <a:tailEnd type="none" w="med" len="med"/>
+                    </a:lnL>
+                    <a:lnR w="12700" cap="flat" cmpd="sng" algn="ctr">
+                      <a:solidFill>
+                        <a:srgbClr val="0F1115"/>
+                      </a:solidFill>
+                      <a:prstDash val="solid"/>
+                      <a:round/>
+                      <a:headEnd type="none" w="med" len="med"/>
+                      <a:tailEnd type="none" w="med" len="med"/>
+                    </a:lnR>
+                    <a:lnT w="12700" cap="flat" cmpd="sng" algn="ctr">
+                      <a:solidFill>
+                        <a:srgbClr val="0F1115"/>
+                      </a:solidFill>
+                      <a:prstDash val="solid"/>
+                      <a:round/>
+                      <a:headEnd type="none" w="med" len="med"/>
+                      <a:tailEnd type="none" w="med" len="med"/>
+                    </a:lnT>
+                    <a:lnB w="12700" cap="flat" cmpd="sng" algn="ctr">
+                      <a:solidFill>
+                        <a:srgbClr val="0F1115"/>
+                      </a:solidFill>
+                      <a:prstDash val="solid"/>
+                      <a:round/>
+                      <a:headEnd type="none" w="med" len="med"/>
+                      <a:tailEnd type="none" w="med" len="med"/>
+                    </a:lnB>
+                    <a:solidFill>
+                      <a:srgbClr val="181B23"/>
+                    </a:solidFill>
+                  </a:tcPr>
+                </a:tc>
+                <a:tc>
+                  <a:txBody>
+                    <a:bodyPr/>
+                    <a:lstStyle/>
+                    <a:p>
+                      <a:pPr algn="r" indent="0" marL="0">
+                        <a:buNone/>
+                      </a:pPr>
+                      <a:r>
+                        <a:rPr lang="en-US" sz="1200" dirty="0">
+                          <a:solidFill>
+                            <a:srgbClr val="FFFFFF"/>
+                          </a:solidFill>
+                          <a:latin typeface="Arial" pitchFamily="34" charset="0"/>
+                          <a:ea typeface="Arial" pitchFamily="34" charset="-122"/>
+                          <a:cs typeface="Arial" pitchFamily="34" charset="-120"/>
+                        </a:rPr>
+                        <a:t>710</a:t>
+                      </a:r>
+                      <a:endParaRPr lang="en-US" sz="1200" dirty="0">
+                        <a:latin typeface="Arial" charset="0"/>
+                        <a:ea typeface="Arial" charset="0"/>
+                        <a:cs typeface="Arial" charset="0"/>
+                      </a:endParaRPr>
+                    </a:p>
+                  </a:txBody>
+                  <a:tcPr marL="91440" marR="91440" marT="0" marB="0" anchor="ctr">
+                    <a:lnL w="12700" cap="flat" cmpd="sng" algn="ctr">
+                      <a:solidFill>
+                        <a:srgbClr val="0F1115"/>
+                      </a:solidFill>
+                      <a:prstDash val="solid"/>
+                      <a:round/>
+                      <a:headEnd type="none" w="med" len="med"/>
+                      <a:tailEnd type="none" w="med" len="med"/>
+                    </a:lnL>
+                    <a:lnR w="12700" cap="flat" cmpd="sng" algn="ctr">
+                      <a:solidFill>
+                        <a:srgbClr val="0F1115"/>
+                      </a:solidFill>
+                      <a:prstDash val="solid"/>
+                      <a:round/>
+                      <a:headEnd type="none" w="med" len="med"/>
+                      <a:tailEnd type="none" w="med" len="med"/>
+                    </a:lnR>
+                    <a:lnT w="12700" cap="flat" cmpd="sng" algn="ctr">
+                      <a:solidFill>
+                        <a:srgbClr val="0F1115"/>
+                      </a:solidFill>
+                      <a:prstDash val="solid"/>
+                      <a:round/>
+                      <a:headEnd type="none" w="med" len="med"/>
+                      <a:tailEnd type="none" w="med" len="med"/>
+                    </a:lnT>
+                    <a:lnB w="12700" cap="flat" cmpd="sng" algn="ctr">
+                      <a:solidFill>
+                        <a:srgbClr val="0F1115"/>
+                      </a:solidFill>
+                      <a:prstDash val="solid"/>
+                      <a:round/>
+                      <a:headEnd type="none" w="med" len="med"/>
+                      <a:tailEnd type="none" w="med" len="med"/>
+                    </a:lnB>
+                    <a:solidFill>
+                      <a:srgbClr val="181B23"/>
+                    </a:solidFill>
+                  </a:tcPr>
+                </a:tc>
+                <a:tc>
+                  <a:txBody>
+                    <a:bodyPr/>
+                    <a:lstStyle/>
+                    <a:p>
+                      <a:pPr algn="r" indent="0" marL="0">
+                        <a:buNone/>
+                      </a:pPr>
+                      <a:r>
+                        <a:rPr lang="en-US" sz="1200" dirty="0">
+                          <a:solidFill>
+                            <a:srgbClr val="FFFFFF"/>
+                          </a:solidFill>
+                          <a:latin typeface="Arial" pitchFamily="34" charset="0"/>
+                          <a:ea typeface="Arial" pitchFamily="34" charset="-122"/>
+                          <a:cs typeface="Arial" pitchFamily="34" charset="-120"/>
+                        </a:rPr>
+                        <a:t>1,065</a:t>
+                      </a:r>
+                      <a:endParaRPr lang="en-US" sz="1200" dirty="0">
+                        <a:latin typeface="Arial" charset="0"/>
+                        <a:ea typeface="Arial" charset="0"/>
+                        <a:cs typeface="Arial" charset="0"/>
+                      </a:endParaRPr>
+                    </a:p>
+                  </a:txBody>
+                  <a:tcPr marL="91440" marR="91440" marT="0" marB="0" anchor="ctr">
+                    <a:lnL w="12700" cap="flat" cmpd="sng" algn="ctr">
+                      <a:solidFill>
+                        <a:srgbClr val="0F1115"/>
+                      </a:solidFill>
+                      <a:prstDash val="solid"/>
+                      <a:round/>
+                      <a:headEnd type="none" w="med" len="med"/>
+                      <a:tailEnd type="none" w="med" len="med"/>
+                    </a:lnL>
+                    <a:lnR w="12700" cap="flat" cmpd="sng" algn="ctr">
+                      <a:solidFill>
+                        <a:srgbClr val="0F1115"/>
+                      </a:solidFill>
+                      <a:prstDash val="solid"/>
+                      <a:round/>
+                      <a:headEnd type="none" w="med" len="med"/>
+                      <a:tailEnd type="none" w="med" len="med"/>
+                    </a:lnR>
+                    <a:lnT w="12700" cap="flat" cmpd="sng" algn="ctr">
+                      <a:solidFill>
+                        <a:srgbClr val="0F1115"/>
+                      </a:solidFill>
+                      <a:prstDash val="solid"/>
+                      <a:round/>
+                      <a:headEnd type="none" w="med" len="med"/>
+                      <a:tailEnd type="none" w="med" len="med"/>
+                    </a:lnT>
+                    <a:lnB w="12700" cap="flat" cmpd="sng" algn="ctr">
+                      <a:solidFill>
+                        <a:srgbClr val="0F1115"/>
+                      </a:solidFill>
+                      <a:prstDash val="solid"/>
+                      <a:round/>
+                      <a:headEnd type="none" w="med" len="med"/>
+                      <a:tailEnd type="none" w="med" len="med"/>
+                    </a:lnB>
+                    <a:solidFill>
+                      <a:srgbClr val="181B23"/>
+                    </a:solidFill>
+                  </a:tcPr>
+                </a:tc>
+                <a:tc>
+                  <a:txBody>
+                    <a:bodyPr/>
+                    <a:lstStyle/>
+                    <a:p>
+                      <a:pPr algn="r" indent="0" marL="0">
+                        <a:buNone/>
+                      </a:pPr>
+                      <a:r>
+                        <a:rPr lang="en-US" sz="1200" dirty="0">
+                          <a:solidFill>
+                            <a:srgbClr val="FFFFFF"/>
+                          </a:solidFill>
+                          <a:latin typeface="Arial" pitchFamily="34" charset="0"/>
+                          <a:ea typeface="Arial" pitchFamily="34" charset="-122"/>
+                          <a:cs typeface="Arial" pitchFamily="34" charset="-120"/>
+                        </a:rPr>
+                        <a:t>1,491</a:t>
+                      </a:r>
+                      <a:endParaRPr lang="en-US" sz="1200" dirty="0">
+                        <a:latin typeface="Arial" charset="0"/>
+                        <a:ea typeface="Arial" charset="0"/>
+                        <a:cs typeface="Arial" charset="0"/>
+                      </a:endParaRPr>
+                    </a:p>
+                  </a:txBody>
+                  <a:tcPr marL="91440" marR="91440" marT="0" marB="0" anchor="ctr">
+                    <a:lnL w="12700" cap="flat" cmpd="sng" algn="ctr">
+                      <a:solidFill>
+                        <a:srgbClr val="0F1115"/>
+                      </a:solidFill>
+                      <a:prstDash val="solid"/>
+                      <a:round/>
+                      <a:headEnd type="none" w="med" len="med"/>
+                      <a:tailEnd type="none" w="med" len="med"/>
+                    </a:lnL>
+                    <a:lnR w="12700" cap="flat" cmpd="sng" algn="ctr">
+                      <a:solidFill>
+                        <a:srgbClr val="0F1115"/>
+                      </a:solidFill>
+                      <a:prstDash val="solid"/>
+                      <a:round/>
+                      <a:headEnd type="none" w="med" len="med"/>
+                      <a:tailEnd type="none" w="med" len="med"/>
+                    </a:lnR>
+                    <a:lnT w="12700" cap="flat" cmpd="sng" algn="ctr">
+                      <a:solidFill>
+                        <a:srgbClr val="0F1115"/>
+                      </a:solidFill>
+                      <a:prstDash val="solid"/>
+                      <a:round/>
+                      <a:headEnd type="none" w="med" len="med"/>
+                      <a:tailEnd type="none" w="med" len="med"/>
+                    </a:lnT>
+                    <a:lnB w="12700" cap="flat" cmpd="sng" algn="ctr">
+                      <a:solidFill>
+                        <a:srgbClr val="0F1115"/>
+                      </a:solidFill>
+                      <a:prstDash val="solid"/>
+                      <a:round/>
+                      <a:headEnd type="none" w="med" len="med"/>
+                      <a:tailEnd type="none" w="med" len="med"/>
+                    </a:lnB>
+                    <a:solidFill>
+                      <a:srgbClr val="181B23"/>
+                    </a:solidFill>
+                  </a:tcPr>
+                </a:tc>
+              </a:tr>
+              <a:tr h="365760">
+                <a:tc>
+                  <a:txBody>
+                    <a:bodyPr/>
+                    <a:lstStyle/>
+                    <a:p>
+                      <a:pPr algn="l" indent="0" marL="0">
+                        <a:buNone/>
+                      </a:pPr>
+                      <a:r>
+                        <a:rPr lang="en-US" sz="1200" b="1" dirty="0">
+                          <a:solidFill>
+                            <a:srgbClr val="9AA3B5"/>
+                          </a:solidFill>
+                          <a:latin typeface="Arial" pitchFamily="34" charset="0"/>
+                          <a:ea typeface="Arial" pitchFamily="34" charset="-122"/>
+                          <a:cs typeface="Arial" pitchFamily="34" charset="-120"/>
+                        </a:rPr>
+                        <a:t>EBITDA</a:t>
+                      </a:r>
+                      <a:endParaRPr lang="en-US" sz="1200" dirty="0">
+                        <a:latin typeface="Arial" charset="0"/>
+                        <a:ea typeface="Arial" charset="0"/>
+                        <a:cs typeface="Arial" charset="0"/>
+                      </a:endParaRPr>
+                    </a:p>
+                  </a:txBody>
+                  <a:tcPr marL="91440" marR="91440" marT="0" marB="0" anchor="ctr">
+                    <a:lnL w="12700" cap="flat" cmpd="sng" algn="ctr">
+                      <a:solidFill>
+                        <a:srgbClr val="0F1115"/>
+                      </a:solidFill>
+                      <a:prstDash val="solid"/>
+                      <a:round/>
+                      <a:headEnd type="none" w="med" len="med"/>
+                      <a:tailEnd type="none" w="med" len="med"/>
+                    </a:lnL>
+                    <a:lnR w="12700" cap="flat" cmpd="sng" algn="ctr">
+                      <a:solidFill>
+                        <a:srgbClr val="0F1115"/>
+                      </a:solidFill>
+                      <a:prstDash val="solid"/>
+                      <a:round/>
+                      <a:headEnd type="none" w="med" len="med"/>
+                      <a:tailEnd type="none" w="med" len="med"/>
+                    </a:lnR>
+                    <a:lnT w="12700" cap="flat" cmpd="sng" algn="ctr">
+                      <a:solidFill>
+                        <a:srgbClr val="0F1115"/>
+                      </a:solidFill>
+                      <a:prstDash val="solid"/>
+                      <a:round/>
+                      <a:headEnd type="none" w="med" len="med"/>
+                      <a:tailEnd type="none" w="med" len="med"/>
+                    </a:lnT>
+                    <a:lnB w="12700" cap="flat" cmpd="sng" algn="ctr">
+                      <a:solidFill>
+                        <a:srgbClr val="0F1115"/>
+                      </a:solidFill>
+                      <a:prstDash val="solid"/>
+                      <a:round/>
+                      <a:headEnd type="none" w="med" len="med"/>
+                      <a:tailEnd type="none" w="med" len="med"/>
+                    </a:lnB>
+                    <a:solidFill>
+                      <a:srgbClr val="2A1530"/>
+                    </a:solidFill>
+                  </a:tcPr>
+                </a:tc>
+                <a:tc>
+                  <a:txBody>
+                    <a:bodyPr/>
+                    <a:lstStyle/>
+                    <a:p>
+                      <a:pPr algn="r" indent="0" marL="0">
+                        <a:buNone/>
+                      </a:pPr>
+                      <a:r>
+                        <a:rPr lang="en-US" sz="1200" b="1" dirty="0">
+                          <a:solidFill>
+                            <a:srgbClr val="FF2D75"/>
+                          </a:solidFill>
+                          <a:latin typeface="Arial" pitchFamily="34" charset="0"/>
+                          <a:ea typeface="Arial" pitchFamily="34" charset="-122"/>
+                          <a:cs typeface="Arial" pitchFamily="34" charset="-120"/>
+                        </a:rPr>
+                        <a:t>−116</a:t>
+                      </a:r>
+                      <a:endParaRPr lang="en-US" sz="1200" dirty="0">
+                        <a:latin typeface="Arial" charset="0"/>
+                        <a:ea typeface="Arial" charset="0"/>
+                        <a:cs typeface="Arial" charset="0"/>
+                      </a:endParaRPr>
+                    </a:p>
+                  </a:txBody>
+                  <a:tcPr marL="91440" marR="91440" marT="0" marB="0" anchor="ctr">
+                    <a:lnL w="12700" cap="flat" cmpd="sng" algn="ctr">
+                      <a:solidFill>
+                        <a:srgbClr val="0F1115"/>
+                      </a:solidFill>
+                      <a:prstDash val="solid"/>
+                      <a:round/>
+                      <a:headEnd type="none" w="med" len="med"/>
+                      <a:tailEnd type="none" w="med" len="med"/>
+                    </a:lnL>
+                    <a:lnR w="12700" cap="flat" cmpd="sng" algn="ctr">
+                      <a:solidFill>
+                        <a:srgbClr val="0F1115"/>
+                      </a:solidFill>
+                      <a:prstDash val="solid"/>
+                      <a:round/>
+                      <a:headEnd type="none" w="med" len="med"/>
+                      <a:tailEnd type="none" w="med" len="med"/>
+                    </a:lnR>
+                    <a:lnT w="12700" cap="flat" cmpd="sng" algn="ctr">
+                      <a:solidFill>
+                        <a:srgbClr val="0F1115"/>
+                      </a:solidFill>
+                      <a:prstDash val="solid"/>
+                      <a:round/>
+                      <a:headEnd type="none" w="med" len="med"/>
+                      <a:tailEnd type="none" w="med" len="med"/>
+                    </a:lnT>
+                    <a:lnB w="12700" cap="flat" cmpd="sng" algn="ctr">
+                      <a:solidFill>
+                        <a:srgbClr val="0F1115"/>
+                      </a:solidFill>
+                      <a:prstDash val="solid"/>
+                      <a:round/>
+                      <a:headEnd type="none" w="med" len="med"/>
+                      <a:tailEnd type="none" w="med" len="med"/>
+                    </a:lnB>
+                    <a:solidFill>
+                      <a:srgbClr val="2A1530"/>
+                    </a:solidFill>
+                  </a:tcPr>
+                </a:tc>
+                <a:tc>
+                  <a:txBody>
+                    <a:bodyPr/>
+                    <a:lstStyle/>
+                    <a:p>
+                      <a:pPr algn="r" indent="0" marL="0">
+                        <a:buNone/>
+                      </a:pPr>
+                      <a:r>
+                        <a:rPr lang="en-US" sz="1200" b="1" dirty="0">
+                          <a:solidFill>
+                            <a:srgbClr val="FF2D75"/>
+                          </a:solidFill>
+                          <a:latin typeface="Arial" pitchFamily="34" charset="0"/>
+                          <a:ea typeface="Arial" pitchFamily="34" charset="-122"/>
+                          <a:cs typeface="Arial" pitchFamily="34" charset="-120"/>
+                        </a:rPr>
+                        <a:t>+41</a:t>
+                      </a:r>
+                      <a:endParaRPr lang="en-US" sz="1200" dirty="0">
+                        <a:latin typeface="Arial" charset="0"/>
+                        <a:ea typeface="Arial" charset="0"/>
+                        <a:cs typeface="Arial" charset="0"/>
+                      </a:endParaRPr>
+                    </a:p>
+                  </a:txBody>
+                  <a:tcPr marL="91440" marR="91440" marT="0" marB="0" anchor="ctr">
+                    <a:lnL w="12700" cap="flat" cmpd="sng" algn="ctr">
+                      <a:solidFill>
+                        <a:srgbClr val="0F1115"/>
+                      </a:solidFill>
+                      <a:prstDash val="solid"/>
+                      <a:round/>
+                      <a:headEnd type="none" w="med" len="med"/>
+                      <a:tailEnd type="none" w="med" len="med"/>
+                    </a:lnL>
+                    <a:lnR w="12700" cap="flat" cmpd="sng" algn="ctr">
+                      <a:solidFill>
+                        <a:srgbClr val="0F1115"/>
+                      </a:solidFill>
+                      <a:prstDash val="solid"/>
+                      <a:round/>
+                      <a:headEnd type="none" w="med" len="med"/>
+                      <a:tailEnd type="none" w="med" len="med"/>
+                    </a:lnR>
+                    <a:lnT w="12700" cap="flat" cmpd="sng" algn="ctr">
+                      <a:solidFill>
+                        <a:srgbClr val="0F1115"/>
+                      </a:solidFill>
+                      <a:prstDash val="solid"/>
+                      <a:round/>
+                      <a:headEnd type="none" w="med" len="med"/>
+                      <a:tailEnd type="none" w="med" len="med"/>
+                    </a:lnT>
+                    <a:lnB w="12700" cap="flat" cmpd="sng" algn="ctr">
+                      <a:solidFill>
+                        <a:srgbClr val="0F1115"/>
+                      </a:solidFill>
+                      <a:prstDash val="solid"/>
+                      <a:round/>
+                      <a:headEnd type="none" w="med" len="med"/>
+                      <a:tailEnd type="none" w="med" len="med"/>
+                    </a:lnB>
+                    <a:solidFill>
+                      <a:srgbClr val="2A1530"/>
+                    </a:solidFill>
+                  </a:tcPr>
+                </a:tc>
+                <a:tc>
+                  <a:txBody>
+                    <a:bodyPr/>
+                    <a:lstStyle/>
+                    <a:p>
+                      <a:pPr algn="r" indent="0" marL="0">
+                        <a:buNone/>
+                      </a:pPr>
+                      <a:r>
+                        <a:rPr lang="en-US" sz="1200" b="1" dirty="0">
+                          <a:solidFill>
+                            <a:srgbClr val="FF2D75"/>
+                          </a:solidFill>
+                          <a:latin typeface="Arial" pitchFamily="34" charset="0"/>
+                          <a:ea typeface="Arial" pitchFamily="34" charset="-122"/>
+                          <a:cs typeface="Arial" pitchFamily="34" charset="-120"/>
+                        </a:rPr>
+                        <a:t>+328</a:t>
+                      </a:r>
+                      <a:endParaRPr lang="en-US" sz="1200" dirty="0">
+                        <a:latin typeface="Arial" charset="0"/>
+                        <a:ea typeface="Arial" charset="0"/>
+                        <a:cs typeface="Arial" charset="0"/>
+                      </a:endParaRPr>
+                    </a:p>
+                  </a:txBody>
+                  <a:tcPr marL="91440" marR="91440" marT="0" marB="0" anchor="ctr">
+                    <a:lnL w="12700" cap="flat" cmpd="sng" algn="ctr">
+                      <a:solidFill>
+                        <a:srgbClr val="0F1115"/>
+                      </a:solidFill>
+                      <a:prstDash val="solid"/>
+                      <a:round/>
+                      <a:headEnd type="none" w="med" len="med"/>
+                      <a:tailEnd type="none" w="med" len="med"/>
+                    </a:lnL>
+                    <a:lnR w="12700" cap="flat" cmpd="sng" algn="ctr">
+                      <a:solidFill>
+                        <a:srgbClr val="0F1115"/>
+                      </a:solidFill>
+                      <a:prstDash val="solid"/>
+                      <a:round/>
+                      <a:headEnd type="none" w="med" len="med"/>
+                      <a:tailEnd type="none" w="med" len="med"/>
+                    </a:lnR>
+                    <a:lnT w="12700" cap="flat" cmpd="sng" algn="ctr">
+                      <a:solidFill>
+                        <a:srgbClr val="0F1115"/>
+                      </a:solidFill>
+                      <a:prstDash val="solid"/>
+                      <a:round/>
+                      <a:headEnd type="none" w="med" len="med"/>
+                      <a:tailEnd type="none" w="med" len="med"/>
+                    </a:lnT>
+                    <a:lnB w="12700" cap="flat" cmpd="sng" algn="ctr">
+                      <a:solidFill>
+                        <a:srgbClr val="0F1115"/>
+                      </a:solidFill>
+                      <a:prstDash val="solid"/>
+                      <a:round/>
+                      <a:headEnd type="none" w="med" len="med"/>
+                      <a:tailEnd type="none" w="med" len="med"/>
+                    </a:lnB>
+                    <a:solidFill>
+                      <a:srgbClr val="2A1530"/>
+                    </a:solidFill>
+                  </a:tcPr>
+                </a:tc>
+                <a:tc>
+                  <a:txBody>
+                    <a:bodyPr/>
+                    <a:lstStyle/>
+                    <a:p>
+                      <a:pPr algn="r" indent="0" marL="0">
+                        <a:buNone/>
+                      </a:pPr>
+                      <a:r>
+                        <a:rPr lang="en-US" sz="1200" b="1" dirty="0">
+                          <a:solidFill>
+                            <a:srgbClr val="FF2D75"/>
+                          </a:solidFill>
+                          <a:latin typeface="Arial" pitchFamily="34" charset="0"/>
+                          <a:ea typeface="Arial" pitchFamily="34" charset="-122"/>
+                          <a:cs typeface="Arial" pitchFamily="34" charset="-120"/>
+                        </a:rPr>
+                        <a:t>+919</a:t>
+                      </a:r>
+                      <a:endParaRPr lang="en-US" sz="1200" dirty="0">
+                        <a:latin typeface="Arial" charset="0"/>
+                        <a:ea typeface="Arial" charset="0"/>
+                        <a:cs typeface="Arial" charset="0"/>
+                      </a:endParaRPr>
+                    </a:p>
+                  </a:txBody>
+                  <a:tcPr marL="91440" marR="91440" marT="0" marB="0" anchor="ctr">
+                    <a:lnL w="12700" cap="flat" cmpd="sng" algn="ctr">
+                      <a:solidFill>
+                        <a:srgbClr val="0F1115"/>
+                      </a:solidFill>
+                      <a:prstDash val="solid"/>
+                      <a:round/>
+                      <a:headEnd type="none" w="med" len="med"/>
+                      <a:tailEnd type="none" w="med" len="med"/>
+                    </a:lnL>
+                    <a:lnR w="12700" cap="flat" cmpd="sng" algn="ctr">
+                      <a:solidFill>
+                        <a:srgbClr val="0F1115"/>
+                      </a:solidFill>
+                      <a:prstDash val="solid"/>
+                      <a:round/>
+                      <a:headEnd type="none" w="med" len="med"/>
+                      <a:tailEnd type="none" w="med" len="med"/>
+                    </a:lnR>
+                    <a:lnT w="12700" cap="flat" cmpd="sng" algn="ctr">
+                      <a:solidFill>
+                        <a:srgbClr val="0F1115"/>
+                      </a:solidFill>
+                      <a:prstDash val="solid"/>
+                      <a:round/>
+                      <a:headEnd type="none" w="med" len="med"/>
+                      <a:tailEnd type="none" w="med" len="med"/>
+                    </a:lnT>
+                    <a:lnB w="12700" cap="flat" cmpd="sng" algn="ctr">
+                      <a:solidFill>
+                        <a:srgbClr val="0F1115"/>
+                      </a:solidFill>
+                      <a:prstDash val="solid"/>
+                      <a:round/>
+                      <a:headEnd type="none" w="med" len="med"/>
+                      <a:tailEnd type="none" w="med" len="med"/>
+                    </a:lnB>
+                    <a:solidFill>
+                      <a:srgbClr val="2A1530"/>
+                    </a:solidFill>
+                  </a:tcPr>
+                </a:tc>
+                <a:tc>
+                  <a:txBody>
+                    <a:bodyPr/>
+                    <a:lstStyle/>
+                    <a:p>
+                      <a:pPr algn="r" indent="0" marL="0">
+                        <a:buNone/>
+                      </a:pPr>
+                      <a:r>
+                        <a:rPr lang="en-US" sz="1200" b="1" dirty="0">
+                          <a:solidFill>
+                            <a:srgbClr val="FF2D75"/>
+                          </a:solidFill>
+                          <a:latin typeface="Arial" pitchFamily="34" charset="0"/>
+                          <a:ea typeface="Arial" pitchFamily="34" charset="-122"/>
+                          <a:cs typeface="Arial" pitchFamily="34" charset="-120"/>
+                        </a:rPr>
+                        <a:t>+1,661</a:t>
+                      </a:r>
+                      <a:endParaRPr lang="en-US" sz="1200" dirty="0">
+                        <a:latin typeface="Arial" charset="0"/>
+                        <a:ea typeface="Arial" charset="0"/>
+                        <a:cs typeface="Arial" charset="0"/>
+                      </a:endParaRPr>
+                    </a:p>
+                  </a:txBody>
+                  <a:tcPr marL="91440" marR="91440" marT="0" marB="0" anchor="ctr">
+                    <a:lnL w="12700" cap="flat" cmpd="sng" algn="ctr">
+                      <a:solidFill>
+                        <a:srgbClr val="0F1115"/>
+                      </a:solidFill>
+                      <a:prstDash val="solid"/>
+                      <a:round/>
+                      <a:headEnd type="none" w="med" len="med"/>
+                      <a:tailEnd type="none" w="med" len="med"/>
+                    </a:lnL>
+                    <a:lnR w="12700" cap="flat" cmpd="sng" algn="ctr">
+                      <a:solidFill>
+                        <a:srgbClr val="0F1115"/>
+                      </a:solidFill>
+                      <a:prstDash val="solid"/>
+                      <a:round/>
+                      <a:headEnd type="none" w="med" len="med"/>
+                      <a:tailEnd type="none" w="med" len="med"/>
+                    </a:lnR>
+                    <a:lnT w="12700" cap="flat" cmpd="sng" algn="ctr">
+                      <a:solidFill>
+                        <a:srgbClr val="0F1115"/>
+                      </a:solidFill>
+                      <a:prstDash val="solid"/>
+                      <a:round/>
+                      <a:headEnd type="none" w="med" len="med"/>
+                      <a:tailEnd type="none" w="med" len="med"/>
+                    </a:lnT>
+                    <a:lnB w="12700" cap="flat" cmpd="sng" algn="ctr">
+                      <a:solidFill>
+                        <a:srgbClr val="0F1115"/>
+                      </a:solidFill>
+                      <a:prstDash val="solid"/>
+                      <a:round/>
+                      <a:headEnd type="none" w="med" len="med"/>
+                      <a:tailEnd type="none" w="med" len="med"/>
+                    </a:lnB>
+                    <a:solidFill>
+                      <a:srgbClr val="2A1530"/>
+                    </a:solidFill>
+                  </a:tcPr>
+                </a:tc>
+              </a:tr>
+              <a:tr h="365760">
+                <a:tc>
+                  <a:txBody>
+                    <a:bodyPr/>
+                    <a:lstStyle/>
+                    <a:p>
+                      <a:pPr algn="l" indent="0" marL="0">
+                        <a:buNone/>
+                      </a:pPr>
+                      <a:r>
+                        <a:rPr lang="en-US" sz="1200" b="1" dirty="0">
+                          <a:solidFill>
+                            <a:srgbClr val="9AA3B5"/>
+                          </a:solidFill>
+                          <a:latin typeface="Arial" pitchFamily="34" charset="0"/>
+                          <a:ea typeface="Arial" pitchFamily="34" charset="-122"/>
+                          <a:cs typeface="Arial" pitchFamily="34" charset="-120"/>
+                        </a:rPr>
+                        <a:t>Cash, year end</a:t>
+                      </a:r>
+                      <a:endParaRPr lang="en-US" sz="1200" dirty="0">
+                        <a:latin typeface="Arial" charset="0"/>
+                        <a:ea typeface="Arial" charset="0"/>
+                        <a:cs typeface="Arial" charset="0"/>
+                      </a:endParaRPr>
+                    </a:p>
+                  </a:txBody>
+                  <a:tcPr marL="91440" marR="91440" marT="0" marB="0" anchor="ctr">
+                    <a:lnL w="12700" cap="flat" cmpd="sng" algn="ctr">
+                      <a:solidFill>
+                        <a:srgbClr val="0F1115"/>
+                      </a:solidFill>
+                      <a:prstDash val="solid"/>
+                      <a:round/>
+                      <a:headEnd type="none" w="med" len="med"/>
+                      <a:tailEnd type="none" w="med" len="med"/>
+                    </a:lnL>
+                    <a:lnR w="12700" cap="flat" cmpd="sng" algn="ctr">
+                      <a:solidFill>
+                        <a:srgbClr val="0F1115"/>
+                      </a:solidFill>
+                      <a:prstDash val="solid"/>
+                      <a:round/>
+                      <a:headEnd type="none" w="med" len="med"/>
+                      <a:tailEnd type="none" w="med" len="med"/>
+                    </a:lnR>
+                    <a:lnT w="12700" cap="flat" cmpd="sng" algn="ctr">
+                      <a:solidFill>
+                        <a:srgbClr val="0F1115"/>
+                      </a:solidFill>
+                      <a:prstDash val="solid"/>
+                      <a:round/>
+                      <a:headEnd type="none" w="med" len="med"/>
+                      <a:tailEnd type="none" w="med" len="med"/>
+                    </a:lnT>
+                    <a:lnB w="12700" cap="flat" cmpd="sng" algn="ctr">
+                      <a:solidFill>
+                        <a:srgbClr val="0F1115"/>
+                      </a:solidFill>
+                      <a:prstDash val="solid"/>
+                      <a:round/>
+                      <a:headEnd type="none" w="med" len="med"/>
+                      <a:tailEnd type="none" w="med" len="med"/>
+                    </a:lnB>
+                    <a:solidFill>
+                      <a:srgbClr val="181B23"/>
+                    </a:solidFill>
+                  </a:tcPr>
+                </a:tc>
+                <a:tc>
+                  <a:txBody>
+                    <a:bodyPr/>
+                    <a:lstStyle/>
+                    <a:p>
+                      <a:pPr algn="r" indent="0" marL="0">
+                        <a:buNone/>
+                      </a:pPr>
+                      <a:r>
+                        <a:rPr lang="en-US" sz="1200" dirty="0">
+                          <a:solidFill>
+                            <a:srgbClr val="FFFFFF"/>
+                          </a:solidFill>
+                          <a:latin typeface="Arial" pitchFamily="34" charset="0"/>
+                          <a:ea typeface="Arial" pitchFamily="34" charset="-122"/>
+                          <a:cs typeface="Arial" pitchFamily="34" charset="-120"/>
+                        </a:rPr>
+                        <a:t>134</a:t>
+                      </a:r>
+                      <a:endParaRPr lang="en-US" sz="1200" dirty="0">
+                        <a:latin typeface="Arial" charset="0"/>
+                        <a:ea typeface="Arial" charset="0"/>
+                        <a:cs typeface="Arial" charset="0"/>
+                      </a:endParaRPr>
+                    </a:p>
+                  </a:txBody>
+                  <a:tcPr marL="91440" marR="91440" marT="0" marB="0" anchor="ctr">
+                    <a:lnL w="12700" cap="flat" cmpd="sng" algn="ctr">
+                      <a:solidFill>
+                        <a:srgbClr val="0F1115"/>
+                      </a:solidFill>
+                      <a:prstDash val="solid"/>
+                      <a:round/>
+                      <a:headEnd type="none" w="med" len="med"/>
+                      <a:tailEnd type="none" w="med" len="med"/>
+                    </a:lnL>
+                    <a:lnR w="12700" cap="flat" cmpd="sng" algn="ctr">
+                      <a:solidFill>
+                        <a:srgbClr val="0F1115"/>
+                      </a:solidFill>
+                      <a:prstDash val="solid"/>
+                      <a:round/>
+                      <a:headEnd type="none" w="med" len="med"/>
+                      <a:tailEnd type="none" w="med" len="med"/>
+                    </a:lnR>
+                    <a:lnT w="12700" cap="flat" cmpd="sng" algn="ctr">
+                      <a:solidFill>
+                        <a:srgbClr val="0F1115"/>
+                      </a:solidFill>
+                      <a:prstDash val="solid"/>
+                      <a:round/>
+                      <a:headEnd type="none" w="med" len="med"/>
+                      <a:tailEnd type="none" w="med" len="med"/>
+                    </a:lnT>
+                    <a:lnB w="12700" cap="flat" cmpd="sng" algn="ctr">
+                      <a:solidFill>
+                        <a:srgbClr val="0F1115"/>
+                      </a:solidFill>
+                      <a:prstDash val="solid"/>
+                      <a:round/>
+                      <a:headEnd type="none" w="med" len="med"/>
+                      <a:tailEnd type="none" w="med" len="med"/>
+                    </a:lnB>
+                    <a:solidFill>
+                      <a:srgbClr val="181B23"/>
+                    </a:solidFill>
+                  </a:tcPr>
+                </a:tc>
+                <a:tc>
+                  <a:txBody>
+                    <a:bodyPr/>
+                    <a:lstStyle/>
+                    <a:p>
+                      <a:pPr algn="r" indent="0" marL="0">
+                        <a:buNone/>
+                      </a:pPr>
+                      <a:r>
+                        <a:rPr lang="en-US" sz="1200" dirty="0">
+                          <a:solidFill>
+                            <a:srgbClr val="FFFFFF"/>
+                          </a:solidFill>
+                          <a:latin typeface="Arial" pitchFamily="34" charset="0"/>
+                          <a:ea typeface="Arial" pitchFamily="34" charset="-122"/>
+                          <a:cs typeface="Arial" pitchFamily="34" charset="-120"/>
+                        </a:rPr>
+                        <a:t>175</a:t>
+                      </a:r>
+                      <a:endParaRPr lang="en-US" sz="1200" dirty="0">
+                        <a:latin typeface="Arial" charset="0"/>
+                        <a:ea typeface="Arial" charset="0"/>
+                        <a:cs typeface="Arial" charset="0"/>
+                      </a:endParaRPr>
+                    </a:p>
+                  </a:txBody>
+                  <a:tcPr marL="91440" marR="91440" marT="0" marB="0" anchor="ctr">
+                    <a:lnL w="12700" cap="flat" cmpd="sng" algn="ctr">
+                      <a:solidFill>
+                        <a:srgbClr val="0F1115"/>
+                      </a:solidFill>
+                      <a:prstDash val="solid"/>
+                      <a:round/>
+                      <a:headEnd type="none" w="med" len="med"/>
+                      <a:tailEnd type="none" w="med" len="med"/>
+                    </a:lnL>
+                    <a:lnR w="12700" cap="flat" cmpd="sng" algn="ctr">
+                      <a:solidFill>
+                        <a:srgbClr val="0F1115"/>
+                      </a:solidFill>
+                      <a:prstDash val="solid"/>
+                      <a:round/>
+                      <a:headEnd type="none" w="med" len="med"/>
+                      <a:tailEnd type="none" w="med" len="med"/>
+                    </a:lnR>
+                    <a:lnT w="12700" cap="flat" cmpd="sng" algn="ctr">
+                      <a:solidFill>
+                        <a:srgbClr val="0F1115"/>
+                      </a:solidFill>
+                      <a:prstDash val="solid"/>
+                      <a:round/>
+                      <a:headEnd type="none" w="med" len="med"/>
+                      <a:tailEnd type="none" w="med" len="med"/>
+                    </a:lnT>
+                    <a:lnB w="12700" cap="flat" cmpd="sng" algn="ctr">
+                      <a:solidFill>
+                        <a:srgbClr val="0F1115"/>
+                      </a:solidFill>
+                      <a:prstDash val="solid"/>
+                      <a:round/>
+                      <a:headEnd type="none" w="med" len="med"/>
+                      <a:tailEnd type="none" w="med" len="med"/>
+                    </a:lnB>
+                    <a:solidFill>
+                      <a:srgbClr val="181B23"/>
+                    </a:solidFill>
+                  </a:tcPr>
+                </a:tc>
+                <a:tc>
+                  <a:txBody>
+                    <a:bodyPr/>
+                    <a:lstStyle/>
+                    <a:p>
+                      <a:pPr algn="r" indent="0" marL="0">
+                        <a:buNone/>
+                      </a:pPr>
+                      <a:r>
+                        <a:rPr lang="en-US" sz="1200" dirty="0">
+                          <a:solidFill>
+                            <a:srgbClr val="FFFFFF"/>
+                          </a:solidFill>
+                          <a:latin typeface="Arial" pitchFamily="34" charset="0"/>
+                          <a:ea typeface="Arial" pitchFamily="34" charset="-122"/>
+                          <a:cs typeface="Arial" pitchFamily="34" charset="-120"/>
+                        </a:rPr>
+                        <a:t>503</a:t>
+                      </a:r>
+                      <a:endParaRPr lang="en-US" sz="1200" dirty="0">
+                        <a:latin typeface="Arial" charset="0"/>
+                        <a:ea typeface="Arial" charset="0"/>
+                        <a:cs typeface="Arial" charset="0"/>
+                      </a:endParaRPr>
+                    </a:p>
+                  </a:txBody>
+                  <a:tcPr marL="91440" marR="91440" marT="0" marB="0" anchor="ctr">
+                    <a:lnL w="12700" cap="flat" cmpd="sng" algn="ctr">
+                      <a:solidFill>
+                        <a:srgbClr val="0F1115"/>
+                      </a:solidFill>
+                      <a:prstDash val="solid"/>
+                      <a:round/>
+                      <a:headEnd type="none" w="med" len="med"/>
+                      <a:tailEnd type="none" w="med" len="med"/>
+                    </a:lnL>
+                    <a:lnR w="12700" cap="flat" cmpd="sng" algn="ctr">
+                      <a:solidFill>
+                        <a:srgbClr val="0F1115"/>
+                      </a:solidFill>
+                      <a:prstDash val="solid"/>
+                      <a:round/>
+                      <a:headEnd type="none" w="med" len="med"/>
+                      <a:tailEnd type="none" w="med" len="med"/>
+                    </a:lnR>
+                    <a:lnT w="12700" cap="flat" cmpd="sng" algn="ctr">
+                      <a:solidFill>
+                        <a:srgbClr val="0F1115"/>
+                      </a:solidFill>
+                      <a:prstDash val="solid"/>
+                      <a:round/>
+                      <a:headEnd type="none" w="med" len="med"/>
+                      <a:tailEnd type="none" w="med" len="med"/>
+                    </a:lnT>
+                    <a:lnB w="12700" cap="flat" cmpd="sng" algn="ctr">
+                      <a:solidFill>
+                        <a:srgbClr val="0F1115"/>
+                      </a:solidFill>
+                      <a:prstDash val="solid"/>
+                      <a:round/>
+                      <a:headEnd type="none" w="med" len="med"/>
+                      <a:tailEnd type="none" w="med" len="med"/>
+                    </a:lnB>
+                    <a:solidFill>
+                      <a:srgbClr val="181B23"/>
+                    </a:solidFill>
+                  </a:tcPr>
+                </a:tc>
+                <a:tc>
+                  <a:txBody>
+                    <a:bodyPr/>
+                    <a:lstStyle/>
+                    <a:p>
+                      <a:pPr algn="r" indent="0" marL="0">
+                        <a:buNone/>
+                      </a:pPr>
+                      <a:r>
+                        <a:rPr lang="en-US" sz="1200" dirty="0">
+                          <a:solidFill>
+                            <a:srgbClr val="FFFFFF"/>
+                          </a:solidFill>
+                          <a:latin typeface="Arial" pitchFamily="34" charset="0"/>
+                          <a:ea typeface="Arial" pitchFamily="34" charset="-122"/>
+                          <a:cs typeface="Arial" pitchFamily="34" charset="-120"/>
+                        </a:rPr>
+                        <a:t>1,422</a:t>
+                      </a:r>
+                      <a:endParaRPr lang="en-US" sz="1200" dirty="0">
+                        <a:latin typeface="Arial" charset="0"/>
+                        <a:ea typeface="Arial" charset="0"/>
+                        <a:cs typeface="Arial" charset="0"/>
+                      </a:endParaRPr>
+                    </a:p>
+                  </a:txBody>
+                  <a:tcPr marL="91440" marR="91440" marT="0" marB="0" anchor="ctr">
+                    <a:lnL w="12700" cap="flat" cmpd="sng" algn="ctr">
+                      <a:solidFill>
+                        <a:srgbClr val="0F1115"/>
+                      </a:solidFill>
+                      <a:prstDash val="solid"/>
+                      <a:round/>
+                      <a:headEnd type="none" w="med" len="med"/>
+                      <a:tailEnd type="none" w="med" len="med"/>
+                    </a:lnL>
+                    <a:lnR w="12700" cap="flat" cmpd="sng" algn="ctr">
+                      <a:solidFill>
+                        <a:srgbClr val="0F1115"/>
+                      </a:solidFill>
+                      <a:prstDash val="solid"/>
+                      <a:round/>
+                      <a:headEnd type="none" w="med" len="med"/>
+                      <a:tailEnd type="none" w="med" len="med"/>
+                    </a:lnR>
+                    <a:lnT w="12700" cap="flat" cmpd="sng" algn="ctr">
+                      <a:solidFill>
+                        <a:srgbClr val="0F1115"/>
+                      </a:solidFill>
+                      <a:prstDash val="solid"/>
+                      <a:round/>
+                      <a:headEnd type="none" w="med" len="med"/>
+                      <a:tailEnd type="none" w="med" len="med"/>
+                    </a:lnT>
+                    <a:lnB w="12700" cap="flat" cmpd="sng" algn="ctr">
+                      <a:solidFill>
+                        <a:srgbClr val="0F1115"/>
+                      </a:solidFill>
+                      <a:prstDash val="solid"/>
+                      <a:round/>
+                      <a:headEnd type="none" w="med" len="med"/>
+                      <a:tailEnd type="none" w="med" len="med"/>
+                    </a:lnB>
+                    <a:solidFill>
+                      <a:srgbClr val="181B23"/>
+                    </a:solidFill>
+                  </a:tcPr>
+                </a:tc>
+                <a:tc>
+                  <a:txBody>
+                    <a:bodyPr/>
+                    <a:lstStyle/>
+                    <a:p>
+                      <a:pPr algn="r" indent="0" marL="0">
+                        <a:buNone/>
+                      </a:pPr>
+                      <a:r>
+                        <a:rPr lang="en-US" sz="1200" dirty="0">
+                          <a:solidFill>
+                            <a:srgbClr val="FFFFFF"/>
+                          </a:solidFill>
+                          <a:latin typeface="Arial" pitchFamily="34" charset="0"/>
+                          <a:ea typeface="Arial" pitchFamily="34" charset="-122"/>
+                          <a:cs typeface="Arial" pitchFamily="34" charset="-120"/>
+                        </a:rPr>
+                        <a:t>3,083</a:t>
+                      </a:r>
+                      <a:endParaRPr lang="en-US" sz="1200" dirty="0">
+                        <a:latin typeface="Arial" charset="0"/>
+                        <a:ea typeface="Arial" charset="0"/>
+                        <a:cs typeface="Arial" charset="0"/>
+                      </a:endParaRPr>
+                    </a:p>
+                  </a:txBody>
+                  <a:tcPr marL="91440" marR="91440" marT="0" marB="0" anchor="ctr">
+                    <a:lnL w="12700" cap="flat" cmpd="sng" algn="ctr">
+                      <a:solidFill>
+                        <a:srgbClr val="0F1115"/>
+                      </a:solidFill>
+                      <a:prstDash val="solid"/>
+                      <a:round/>
+                      <a:headEnd type="none" w="med" len="med"/>
+                      <a:tailEnd type="none" w="med" len="med"/>
+                    </a:lnL>
+                    <a:lnR w="12700" cap="flat" cmpd="sng" algn="ctr">
+                      <a:solidFill>
+                        <a:srgbClr val="0F1115"/>
+                      </a:solidFill>
+                      <a:prstDash val="solid"/>
+                      <a:round/>
+                      <a:headEnd type="none" w="med" len="med"/>
+                      <a:tailEnd type="none" w="med" len="med"/>
+                    </a:lnR>
+                    <a:lnT w="12700" cap="flat" cmpd="sng" algn="ctr">
+                      <a:solidFill>
+                        <a:srgbClr val="0F1115"/>
+                      </a:solidFill>
+                      <a:prstDash val="solid"/>
+                      <a:round/>
+                      <a:headEnd type="none" w="med" len="med"/>
+                      <a:tailEnd type="none" w="med" len="med"/>
+                    </a:lnT>
+                    <a:lnB w="12700" cap="flat" cmpd="sng" algn="ctr">
+                      <a:solidFill>
+                        <a:srgbClr val="0F1115"/>
+                      </a:solidFill>
+                      <a:prstDash val="solid"/>
+                      <a:round/>
+                      <a:headEnd type="none" w="med" len="med"/>
+                      <a:tailEnd type="none" w="med" len="med"/>
+                    </a:lnB>
+                    <a:solidFill>
+                      <a:srgbClr val="181B23"/>
+                    </a:solidFill>
+                  </a:tcPr>
+                </a:tc>
+              </a:tr>
+            </a:tbl>
+          </a:graphicData>
+        </a:graphic>
+      </p:graphicFrame>
+      <p:sp>
+        <p:nvSpPr>
+          <p:cNvPr id="8" name="Text 4"/>
+          <p:cNvSpPr txBox="1"/>
+          <p:nvPr/>
+        </p:nvSpPr>
+        <p:spPr>
+          <a:xfrm>
+            <a:off x="548640" y="3529584"/>
+            <a:ext cx="6583680" cy="384048"/>
+          </a:xfrm>
+          <a:prstGeom prst="rect">
+            <a:avLst/>
+          </a:prstGeom>
+          <a:noFill/>
+          <a:ln/>
+        </p:spPr>
+        <p:txBody>
+          <a:bodyPr wrap="square" lIns="0" tIns="0" rIns="0" bIns="0" rtlCol="0" anchor="t">
+            <a:normAutofit/>
+          </a:bodyPr>
+          <a:lstStyle/>
+          <a:p>
+            <a:pPr indent="0" marL="0">
+              <a:buNone/>
+            </a:pPr>
+            <a:r>
+              <a:rPr lang="en-US" sz="1000" i="1" dirty="0">
+                <a:solidFill>
+                  <a:srgbClr val="9AA3B5"/>
+                </a:solidFill>
+                <a:latin typeface="Arial" pitchFamily="34" charset="0"/>
+                <a:ea typeface="Arial" pitchFamily="34" charset="-122"/>
+                <a:cs typeface="Arial" pitchFamily="34" charset="-120"/>
+              </a:rPr>
+              <a:t>Revenue 2031: conservative €602k · optimistic €7.44M. Years 4–5 extrapolated; no revenue yet.</a:t>
+            </a:r>
+            <a:endParaRPr lang="en-US" sz="1000" dirty="0"/>
+          </a:p>
+        </p:txBody>
+      </p:sp>
+      <p:sp>
+        <p:nvSpPr>
+          <p:cNvPr id="9" name="Shape 5"/>
+          <p:cNvSpPr/>
+          <p:nvPr/>
+        </p:nvSpPr>
+        <p:spPr>
+          <a:xfrm>
+            <a:off x="548640" y="4160520"/>
+            <a:ext cx="2103120" cy="1417320"/>
+          </a:xfrm>
+          <a:prstGeom prst="roundRect">
+            <a:avLst>
+              <a:gd name="adj" fmla="val 7742"/>
+            </a:avLst>
+          </a:prstGeom>
+          <a:solidFill>
+            <a:srgbClr val="181B23"/>
+          </a:solidFill>
+          <a:ln w="12700">
+            <a:solidFill>
+              <a:srgbClr val="181B23"/>
+            </a:solidFill>
+            <a:prstDash val="solid"/>
+          </a:ln>
+        </p:spPr>
+      </p:sp>
+      <p:sp>
+        <p:nvSpPr>
+          <p:cNvPr id="10" name="Text 6"/>
+          <p:cNvSpPr txBox="1"/>
+          <p:nvPr/>
+        </p:nvSpPr>
+        <p:spPr>
+          <a:xfrm>
+            <a:off x="713232" y="4270248"/>
+            <a:ext cx="1773936" cy="502920"/>
+          </a:xfrm>
+          <a:prstGeom prst="rect">
+            <a:avLst/>
+          </a:prstGeom>
+          <a:noFill/>
+          <a:ln/>
+        </p:spPr>
+        <p:txBody>
+          <a:bodyPr wrap="square" lIns="0" tIns="0" rIns="0" bIns="0" rtlCol="0" anchor="t">
+            <a:normAutofit/>
+          </a:bodyPr>
+          <a:lstStyle/>
+          <a:p>
+            <a:pPr indent="0" marL="0">
+              <a:buNone/>
+            </a:pPr>
+            <a:r>
+              <a:rPr lang="en-US" sz="2200" b="1" dirty="0">
+                <a:solidFill>
+                  <a:srgbClr val="2DFFB5"/>
+                </a:solidFill>
+                <a:latin typeface="Arial" pitchFamily="34" charset="0"/>
+                <a:ea typeface="Arial" pitchFamily="34" charset="-122"/>
+                <a:cs typeface="Arial" pitchFamily="34" charset="-120"/>
+              </a:rPr>
+              <a:t>18 months</a:t>
+            </a:r>
+            <a:endParaRPr lang="en-US" sz="2200" dirty="0"/>
+          </a:p>
+        </p:txBody>
+      </p:sp>
+      <p:sp>
+        <p:nvSpPr>
+          <p:cNvPr id="11" name="Text 7"/>
+          <p:cNvSpPr txBox="1"/>
+          <p:nvPr/>
+        </p:nvSpPr>
+        <p:spPr>
+          <a:xfrm>
+            <a:off x="713232" y="4818888"/>
+            <a:ext cx="1773936" cy="694944"/>
+          </a:xfrm>
+          <a:prstGeom prst="rect">
+            <a:avLst/>
+          </a:prstGeom>
+          <a:noFill/>
+          <a:ln/>
+        </p:spPr>
+        <p:txBody>
+          <a:bodyPr wrap="square" lIns="0" tIns="0" rIns="0" bIns="0" rtlCol="0" anchor="t">
+            <a:normAutofit/>
+          </a:bodyPr>
+          <a:lstStyle/>
+          <a:p>
+            <a:pPr indent="0" marL="0">
+              <a:buNone/>
+            </a:pPr>
+            <a:r>
+              <a:rPr lang="en-US" sz="1100" dirty="0">
+                <a:solidFill>
+                  <a:srgbClr val="9AA3B5"/>
+                </a:solidFill>
+                <a:latin typeface="Arial" pitchFamily="34" charset="0"/>
+                <a:ea typeface="Arial" pitchFamily="34" charset="-122"/>
+                <a:cs typeface="Arial" pitchFamily="34" charset="-120"/>
+              </a:rPr>
+              <a:t>runway with no revenue at all – average burn €13,444 per month</a:t>
+            </a:r>
+            <a:endParaRPr lang="en-US" sz="1100" dirty="0"/>
+          </a:p>
+        </p:txBody>
+      </p:sp>
+      <p:sp>
+        <p:nvSpPr>
+          <p:cNvPr id="12" name="Shape 8"/>
+          <p:cNvSpPr/>
+          <p:nvPr/>
+        </p:nvSpPr>
+        <p:spPr>
+          <a:xfrm>
+            <a:off x="2788920" y="4160520"/>
+            <a:ext cx="2103120" cy="1417320"/>
+          </a:xfrm>
+          <a:prstGeom prst="roundRect">
+            <a:avLst>
+              <a:gd name="adj" fmla="val 7742"/>
+            </a:avLst>
+          </a:prstGeom>
+          <a:solidFill>
+            <a:srgbClr val="181B23"/>
+          </a:solidFill>
+          <a:ln w="12700">
+            <a:solidFill>
+              <a:srgbClr val="181B23"/>
+            </a:solidFill>
+            <a:prstDash val="solid"/>
+          </a:ln>
+        </p:spPr>
+      </p:sp>
+      <p:sp>
+        <p:nvSpPr>
+          <p:cNvPr id="13" name="Text 9"/>
+          <p:cNvSpPr txBox="1"/>
+          <p:nvPr/>
+        </p:nvSpPr>
+        <p:spPr>
+          <a:xfrm>
+            <a:off x="2953512" y="4270248"/>
+            <a:ext cx="1773936" cy="502920"/>
+          </a:xfrm>
+          <a:prstGeom prst="rect">
+            <a:avLst/>
+          </a:prstGeom>
+          <a:noFill/>
+          <a:ln/>
+        </p:spPr>
+        <p:txBody>
+          <a:bodyPr wrap="square" lIns="0" tIns="0" rIns="0" bIns="0" rtlCol="0" anchor="t">
+            <a:normAutofit/>
+          </a:bodyPr>
+          <a:lstStyle/>
+          <a:p>
+            <a:pPr indent="0" marL="0">
+              <a:buNone/>
+            </a:pPr>
+            <a:r>
+              <a:rPr lang="en-US" sz="1700" b="1" dirty="0">
+                <a:solidFill>
+                  <a:srgbClr val="5AD1FF"/>
+                </a:solidFill>
+                <a:latin typeface="Arial" pitchFamily="34" charset="0"/>
+                <a:ea typeface="Arial" pitchFamily="34" charset="-122"/>
+                <a:cs typeface="Arial" pitchFamily="34" charset="-120"/>
+              </a:rPr>
+              <a:t>€49k · €146k · €369k</a:t>
+            </a:r>
+            <a:endParaRPr lang="en-US" sz="1700" dirty="0"/>
+          </a:p>
+        </p:txBody>
+      </p:sp>
+      <p:sp>
+        <p:nvSpPr>
+          <p:cNvPr id="14" name="Text 10"/>
+          <p:cNvSpPr txBox="1"/>
+          <p:nvPr/>
+        </p:nvSpPr>
+        <p:spPr>
+          <a:xfrm>
+            <a:off x="2953512" y="4818888"/>
+            <a:ext cx="1773936" cy="694944"/>
+          </a:xfrm>
+          <a:prstGeom prst="rect">
+            <a:avLst/>
+          </a:prstGeom>
+          <a:noFill/>
+          <a:ln/>
+        </p:spPr>
+        <p:txBody>
+          <a:bodyPr wrap="square" lIns="0" tIns="0" rIns="0" bIns="0" rtlCol="0" anchor="t">
+            <a:normAutofit/>
+          </a:bodyPr>
+          <a:lstStyle/>
+          <a:p>
+            <a:pPr indent="0" marL="0">
+              <a:buNone/>
+            </a:pPr>
+            <a:r>
+              <a:rPr lang="en-US" sz="1100" dirty="0">
+                <a:solidFill>
+                  <a:srgbClr val="9AA3B5"/>
+                </a:solidFill>
+                <a:latin typeface="Arial" pitchFamily="34" charset="0"/>
+                <a:ea typeface="Arial" pitchFamily="34" charset="-122"/>
+                <a:cs typeface="Arial" pitchFamily="34" charset="-120"/>
+              </a:rPr>
+              <a:t>cash at month 18: conservative · base · optimistic</a:t>
+            </a:r>
+            <a:endParaRPr lang="en-US" sz="1100" dirty="0"/>
+          </a:p>
+        </p:txBody>
+      </p:sp>
+      <p:sp>
+        <p:nvSpPr>
+          <p:cNvPr id="15" name="Shape 11"/>
+          <p:cNvSpPr/>
+          <p:nvPr/>
+        </p:nvSpPr>
+        <p:spPr>
+          <a:xfrm>
+            <a:off x="5029200" y="4160520"/>
+            <a:ext cx="2103120" cy="1417320"/>
+          </a:xfrm>
+          <a:prstGeom prst="roundRect">
+            <a:avLst>
+              <a:gd name="adj" fmla="val 7742"/>
+            </a:avLst>
+          </a:prstGeom>
+          <a:solidFill>
+            <a:srgbClr val="181B23"/>
+          </a:solidFill>
+          <a:ln w="12700">
+            <a:solidFill>
+              <a:srgbClr val="181B23"/>
+            </a:solidFill>
+            <a:prstDash val="solid"/>
+          </a:ln>
+        </p:spPr>
+      </p:sp>
+      <p:sp>
+        <p:nvSpPr>
+          <p:cNvPr id="16" name="Text 12"/>
+          <p:cNvSpPr txBox="1"/>
+          <p:nvPr/>
+        </p:nvSpPr>
+        <p:spPr>
+          <a:xfrm>
+            <a:off x="5193792" y="4270248"/>
+            <a:ext cx="1773936" cy="502920"/>
+          </a:xfrm>
+          <a:prstGeom prst="rect">
+            <a:avLst/>
+          </a:prstGeom>
+          <a:noFill/>
+          <a:ln/>
+        </p:spPr>
+        <p:txBody>
+          <a:bodyPr wrap="square" lIns="0" tIns="0" rIns="0" bIns="0" rtlCol="0" anchor="t">
+            <a:normAutofit/>
+          </a:bodyPr>
+          <a:lstStyle/>
+          <a:p>
+            <a:pPr indent="0" marL="0">
+              <a:buNone/>
+            </a:pPr>
+            <a:r>
+              <a:rPr lang="en-US" sz="2200" b="1" dirty="0">
+                <a:solidFill>
+                  <a:srgbClr val="FF2D75"/>
+                </a:solidFill>
+                <a:latin typeface="Arial" pitchFamily="34" charset="0"/>
+                <a:ea typeface="Arial" pitchFamily="34" charset="-122"/>
+                <a:cs typeface="Arial" pitchFamily="34" charset="-120"/>
+              </a:rPr>
+              <a:t>~€350k</a:t>
+            </a:r>
+            <a:endParaRPr lang="en-US" sz="2200" dirty="0"/>
+          </a:p>
+        </p:txBody>
+      </p:sp>
+      <p:sp>
+        <p:nvSpPr>
+          <p:cNvPr id="17" name="Text 13"/>
+          <p:cNvSpPr txBox="1"/>
+          <p:nvPr/>
+        </p:nvSpPr>
+        <p:spPr>
+          <a:xfrm>
+            <a:off x="5193792" y="4818888"/>
+            <a:ext cx="1773936" cy="694944"/>
+          </a:xfrm>
+          <a:prstGeom prst="rect">
+            <a:avLst/>
+          </a:prstGeom>
+          <a:noFill/>
+          <a:ln/>
+        </p:spPr>
+        <p:txBody>
+          <a:bodyPr wrap="square" lIns="0" tIns="0" rIns="0" bIns="0" rtlCol="0" anchor="t">
+            <a:normAutofit/>
+          </a:bodyPr>
+          <a:lstStyle/>
+          <a:p>
+            <a:pPr indent="0" marL="0">
+              <a:buNone/>
+            </a:pPr>
+            <a:r>
+              <a:rPr lang="en-US" sz="1100" dirty="0">
+                <a:solidFill>
+                  <a:srgbClr val="9AA3B5"/>
+                </a:solidFill>
+                <a:latin typeface="Arial" pitchFamily="34" charset="0"/>
+                <a:ea typeface="Arial" pitchFamily="34" charset="-122"/>
+                <a:cs typeface="Arial" pitchFamily="34" charset="-120"/>
+              </a:rPr>
+              <a:t>seed round after Gate 2 (months 15–18)</a:t>
+            </a:r>
+            <a:endParaRPr lang="en-US" sz="1100" dirty="0"/>
+          </a:p>
+        </p:txBody>
+      </p:sp>
+      <p:sp>
+        <p:nvSpPr>
+          <p:cNvPr id="18" name="Text 14"/>
+          <p:cNvSpPr txBox="1"/>
+          <p:nvPr/>
+        </p:nvSpPr>
+        <p:spPr>
+          <a:xfrm>
+            <a:off x="7406640" y="1298448"/>
+            <a:ext cx="4236415" cy="292608"/>
+          </a:xfrm>
+          <a:prstGeom prst="rect">
+            <a:avLst/>
+          </a:prstGeom>
+          <a:noFill/>
+          <a:ln/>
+        </p:spPr>
+        <p:txBody>
+          <a:bodyPr wrap="square" lIns="0" tIns="0" rIns="0" bIns="0" rtlCol="0" anchor="t">
+            <a:normAutofit/>
+          </a:bodyPr>
+          <a:lstStyle/>
+          <a:p>
+            <a:pPr indent="0" marL="0">
+              <a:buNone/>
+            </a:pPr>
+            <a:r>
+              <a:rPr lang="en-US" sz="1300" b="1" dirty="0">
+                <a:solidFill>
+                  <a:srgbClr val="FFD166"/>
+                </a:solidFill>
+                <a:latin typeface="Arial" pitchFamily="34" charset="0"/>
+                <a:ea typeface="Arial" pitchFamily="34" charset="-122"/>
+                <a:cs typeface="Arial" pitchFamily="34" charset="-120"/>
+              </a:rPr>
+              <a:t>Reference methods (pre-money)</a:t>
+            </a:r>
+            <a:endParaRPr lang="en-US" sz="1300" dirty="0"/>
+          </a:p>
+        </p:txBody>
+      </p:sp>
+      <p:sp>
+        <p:nvSpPr>
+          <p:cNvPr id="19" name="Text 15"/>
+          <p:cNvSpPr txBox="1"/>
+          <p:nvPr/>
+        </p:nvSpPr>
+        <p:spPr>
+          <a:xfrm>
+            <a:off x="7406640" y="1691640"/>
+            <a:ext cx="1143000" cy="292608"/>
+          </a:xfrm>
+          <a:prstGeom prst="rect">
+            <a:avLst/>
+          </a:prstGeom>
+          <a:noFill/>
+          <a:ln/>
+        </p:spPr>
+        <p:txBody>
+          <a:bodyPr wrap="square" lIns="0" tIns="0" rIns="0" bIns="0" rtlCol="0" anchor="ctr">
+            <a:normAutofit/>
+          </a:bodyPr>
+          <a:lstStyle/>
+          <a:p>
+            <a:pPr indent="0" marL="0">
+              <a:buNone/>
+            </a:pPr>
+            <a:r>
+              <a:rPr lang="en-US" sz="1100" dirty="0">
+                <a:solidFill>
+                  <a:srgbClr val="FFFFFF"/>
+                </a:solidFill>
+                <a:latin typeface="Arial" pitchFamily="34" charset="0"/>
+                <a:ea typeface="Arial" pitchFamily="34" charset="-122"/>
+                <a:cs typeface="Arial" pitchFamily="34" charset="-120"/>
+              </a:rPr>
+              <a:t>Berkus</a:t>
+            </a:r>
+            <a:endParaRPr lang="en-US" sz="1100" dirty="0"/>
+          </a:p>
+        </p:txBody>
+      </p:sp>
+      <p:sp>
+        <p:nvSpPr>
+          <p:cNvPr id="20" name="Shape 16"/>
+          <p:cNvSpPr/>
+          <p:nvPr/>
+        </p:nvSpPr>
+        <p:spPr>
+          <a:xfrm>
+            <a:off x="8641080" y="1737360"/>
+            <a:ext cx="1671081" cy="201168"/>
+          </a:xfrm>
+          <a:prstGeom prst="rect">
+            <a:avLst/>
+          </a:prstGeom>
+          <a:solidFill>
+            <a:srgbClr val="2DFFB5"/>
+          </a:solidFill>
+          <a:ln/>
+        </p:spPr>
+      </p:sp>
+      <p:sp>
+        <p:nvSpPr>
+          <p:cNvPr id="21" name="Text 17"/>
+          <p:cNvSpPr txBox="1"/>
+          <p:nvPr/>
+        </p:nvSpPr>
+        <p:spPr>
+          <a:xfrm>
+            <a:off x="10385313" y="1691640"/>
+            <a:ext cx="822960" cy="292608"/>
+          </a:xfrm>
+          <a:prstGeom prst="rect">
+            <a:avLst/>
+          </a:prstGeom>
+          <a:noFill/>
+          <a:ln/>
+        </p:spPr>
+        <p:txBody>
+          <a:bodyPr wrap="square" lIns="0" tIns="0" rIns="0" bIns="0" rtlCol="0" anchor="ctr">
+            <a:normAutofit/>
+          </a:bodyPr>
+          <a:lstStyle/>
+          <a:p>
+            <a:pPr indent="0" marL="0">
+              <a:buNone/>
+            </a:pPr>
+            <a:r>
+              <a:rPr lang="en-US" sz="1100" b="1" dirty="0">
+                <a:solidFill>
+                  <a:srgbClr val="2DFFB5"/>
+                </a:solidFill>
+                <a:latin typeface="Arial" pitchFamily="34" charset="0"/>
+                <a:ea typeface="Arial" pitchFamily="34" charset="-122"/>
+                <a:cs typeface="Arial" pitchFamily="34" charset="-120"/>
+              </a:rPr>
+              <a:t>€2.35M</a:t>
+            </a:r>
+            <a:endParaRPr lang="en-US" sz="1100" dirty="0"/>
+          </a:p>
+        </p:txBody>
+      </p:sp>
+      <p:sp>
+        <p:nvSpPr>
+          <p:cNvPr id="22" name="Text 18"/>
+          <p:cNvSpPr txBox="1"/>
+          <p:nvPr/>
+        </p:nvSpPr>
+        <p:spPr>
+          <a:xfrm>
+            <a:off x="7406640" y="2075688"/>
+            <a:ext cx="1143000" cy="292608"/>
+          </a:xfrm>
+          <a:prstGeom prst="rect">
+            <a:avLst/>
+          </a:prstGeom>
+          <a:noFill/>
+          <a:ln/>
+        </p:spPr>
+        <p:txBody>
+          <a:bodyPr wrap="square" lIns="0" tIns="0" rIns="0" bIns="0" rtlCol="0" anchor="ctr">
+            <a:normAutofit/>
+          </a:bodyPr>
+          <a:lstStyle/>
+          <a:p>
+            <a:pPr indent="0" marL="0">
+              <a:buNone/>
+            </a:pPr>
+            <a:r>
+              <a:rPr lang="en-US" sz="1100" dirty="0">
+                <a:solidFill>
+                  <a:srgbClr val="FFFFFF"/>
+                </a:solidFill>
+                <a:latin typeface="Arial" pitchFamily="34" charset="0"/>
+                <a:ea typeface="Arial" pitchFamily="34" charset="-122"/>
+                <a:cs typeface="Arial" pitchFamily="34" charset="-120"/>
+              </a:rPr>
+              <a:t>Scorecard</a:t>
+            </a:r>
+            <a:endParaRPr lang="en-US" sz="1100" dirty="0"/>
+          </a:p>
+        </p:txBody>
+      </p:sp>
+      <p:sp>
+        <p:nvSpPr>
+          <p:cNvPr id="23" name="Shape 19"/>
+          <p:cNvSpPr/>
+          <p:nvPr/>
+        </p:nvSpPr>
+        <p:spPr>
+          <a:xfrm>
+            <a:off x="8641080" y="2121408"/>
+            <a:ext cx="2097740" cy="201168"/>
+          </a:xfrm>
+          <a:prstGeom prst="rect">
+            <a:avLst/>
+          </a:prstGeom>
+          <a:solidFill>
+            <a:srgbClr val="5AD1FF"/>
+          </a:solidFill>
+          <a:ln/>
+        </p:spPr>
+      </p:sp>
+      <p:sp>
+        <p:nvSpPr>
+          <p:cNvPr id="24" name="Text 20"/>
+          <p:cNvSpPr txBox="1"/>
+          <p:nvPr/>
+        </p:nvSpPr>
+        <p:spPr>
+          <a:xfrm>
+            <a:off x="10811972" y="2075688"/>
+            <a:ext cx="822960" cy="292608"/>
+          </a:xfrm>
+          <a:prstGeom prst="rect">
+            <a:avLst/>
+          </a:prstGeom>
+          <a:noFill/>
+          <a:ln/>
+        </p:spPr>
+        <p:txBody>
+          <a:bodyPr wrap="square" lIns="0" tIns="0" rIns="0" bIns="0" rtlCol="0" anchor="ctr">
+            <a:normAutofit/>
+          </a:bodyPr>
+          <a:lstStyle/>
+          <a:p>
+            <a:pPr indent="0" marL="0">
+              <a:buNone/>
+            </a:pPr>
+            <a:r>
+              <a:rPr lang="en-US" sz="1100" b="1" dirty="0">
+                <a:solidFill>
+                  <a:srgbClr val="5AD1FF"/>
+                </a:solidFill>
+                <a:latin typeface="Arial" pitchFamily="34" charset="0"/>
+                <a:ea typeface="Arial" pitchFamily="34" charset="-122"/>
+                <a:cs typeface="Arial" pitchFamily="34" charset="-120"/>
+              </a:rPr>
+              <a:t>€2.95M</a:t>
+            </a:r>
+            <a:endParaRPr lang="en-US" sz="1100" dirty="0"/>
+          </a:p>
+        </p:txBody>
+      </p:sp>
+      <p:sp>
+        <p:nvSpPr>
+          <p:cNvPr id="25" name="Text 21"/>
+          <p:cNvSpPr txBox="1"/>
+          <p:nvPr/>
+        </p:nvSpPr>
+        <p:spPr>
+          <a:xfrm>
+            <a:off x="7406640" y="2459736"/>
+            <a:ext cx="1143000" cy="292608"/>
+          </a:xfrm>
+          <a:prstGeom prst="rect">
+            <a:avLst/>
+          </a:prstGeom>
+          <a:noFill/>
+          <a:ln/>
+        </p:spPr>
+        <p:txBody>
+          <a:bodyPr wrap="square" lIns="0" tIns="0" rIns="0" bIns="0" rtlCol="0" anchor="ctr">
+            <a:normAutofit/>
+          </a:bodyPr>
+          <a:lstStyle/>
+          <a:p>
+            <a:pPr indent="0" marL="0">
+              <a:buNone/>
+            </a:pPr>
+            <a:r>
+              <a:rPr lang="en-US" sz="1100" dirty="0">
+                <a:solidFill>
+                  <a:srgbClr val="FFFFFF"/>
+                </a:solidFill>
+                <a:latin typeface="Arial" pitchFamily="34" charset="0"/>
+                <a:ea typeface="Arial" pitchFamily="34" charset="-122"/>
+                <a:cs typeface="Arial" pitchFamily="34" charset="-120"/>
+              </a:rPr>
+              <a:t>VC method</a:t>
+            </a:r>
+            <a:endParaRPr lang="en-US" sz="1100" dirty="0"/>
+          </a:p>
+        </p:txBody>
+      </p:sp>
+      <p:sp>
+        <p:nvSpPr>
+          <p:cNvPr id="26" name="Shape 22"/>
+          <p:cNvSpPr/>
+          <p:nvPr/>
+        </p:nvSpPr>
+        <p:spPr>
+          <a:xfrm>
+            <a:off x="8641080" y="2505456"/>
+            <a:ext cx="1727969" cy="201168"/>
+          </a:xfrm>
+          <a:prstGeom prst="rect">
+            <a:avLst/>
+          </a:prstGeom>
+          <a:solidFill>
+            <a:srgbClr val="9AA3B5"/>
+          </a:solidFill>
+          <a:ln/>
+        </p:spPr>
+      </p:sp>
+      <p:sp>
+        <p:nvSpPr>
+          <p:cNvPr id="27" name="Text 23"/>
+          <p:cNvSpPr txBox="1"/>
+          <p:nvPr/>
+        </p:nvSpPr>
+        <p:spPr>
+          <a:xfrm>
+            <a:off x="10442201" y="2459736"/>
+            <a:ext cx="822960" cy="292608"/>
+          </a:xfrm>
+          <a:prstGeom prst="rect">
+            <a:avLst/>
+          </a:prstGeom>
+          <a:noFill/>
+          <a:ln/>
+        </p:spPr>
+        <p:txBody>
+          <a:bodyPr wrap="square" lIns="0" tIns="0" rIns="0" bIns="0" rtlCol="0" anchor="ctr">
+            <a:normAutofit/>
+          </a:bodyPr>
+          <a:lstStyle/>
+          <a:p>
+            <a:pPr indent="0" marL="0">
+              <a:buNone/>
+            </a:pPr>
+            <a:r>
+              <a:rPr lang="en-US" sz="1100" b="1" dirty="0">
+                <a:solidFill>
+                  <a:srgbClr val="9AA3B5"/>
+                </a:solidFill>
+                <a:latin typeface="Arial" pitchFamily="34" charset="0"/>
+                <a:ea typeface="Arial" pitchFamily="34" charset="-122"/>
+                <a:cs typeface="Arial" pitchFamily="34" charset="-120"/>
+              </a:rPr>
+              <a:t>€2.43M</a:t>
+            </a:r>
+            <a:endParaRPr lang="en-US" sz="1100" dirty="0"/>
+          </a:p>
+        </p:txBody>
+      </p:sp>
+      <p:sp>
+        <p:nvSpPr>
+          <p:cNvPr id="28" name="Text 24"/>
+          <p:cNvSpPr txBox="1"/>
+          <p:nvPr/>
+        </p:nvSpPr>
+        <p:spPr>
+          <a:xfrm>
+            <a:off x="7406640" y="2843784"/>
+            <a:ext cx="1143000" cy="292608"/>
+          </a:xfrm>
+          <a:prstGeom prst="rect">
+            <a:avLst/>
+          </a:prstGeom>
+          <a:noFill/>
+          <a:ln/>
+        </p:spPr>
+        <p:txBody>
+          <a:bodyPr wrap="square" lIns="0" tIns="0" rIns="0" bIns="0" rtlCol="0" anchor="ctr">
+            <a:normAutofit/>
+          </a:bodyPr>
+          <a:lstStyle/>
+          <a:p>
+            <a:pPr indent="0" marL="0">
+              <a:buNone/>
+            </a:pPr>
+            <a:r>
+              <a:rPr lang="en-US" sz="1100" dirty="0">
+                <a:solidFill>
+                  <a:srgbClr val="FFFFFF"/>
+                </a:solidFill>
+                <a:latin typeface="Arial" pitchFamily="34" charset="0"/>
+                <a:ea typeface="Arial" pitchFamily="34" charset="-122"/>
+                <a:cs typeface="Arial" pitchFamily="34" charset="-120"/>
+              </a:rPr>
+              <a:t>Risk factor sum.</a:t>
+            </a:r>
+            <a:endParaRPr lang="en-US" sz="1100" dirty="0"/>
+          </a:p>
+        </p:txBody>
+      </p:sp>
+      <p:sp>
+        <p:nvSpPr>
+          <p:cNvPr id="29" name="Shape 25"/>
+          <p:cNvSpPr/>
+          <p:nvPr/>
+        </p:nvSpPr>
+        <p:spPr>
+          <a:xfrm>
+            <a:off x="8641080" y="2889504"/>
+            <a:ext cx="2133295" cy="201168"/>
+          </a:xfrm>
+          <a:prstGeom prst="rect">
+            <a:avLst/>
+          </a:prstGeom>
+          <a:solidFill>
+            <a:srgbClr val="2DFFB5"/>
+          </a:solidFill>
+          <a:ln/>
+        </p:spPr>
+      </p:sp>
+      <p:sp>
+        <p:nvSpPr>
+          <p:cNvPr id="30" name="Text 26"/>
+          <p:cNvSpPr txBox="1"/>
+          <p:nvPr/>
+        </p:nvSpPr>
+        <p:spPr>
+          <a:xfrm>
+            <a:off x="10847527" y="2843784"/>
+            <a:ext cx="822960" cy="292608"/>
+          </a:xfrm>
+          <a:prstGeom prst="rect">
+            <a:avLst/>
+          </a:prstGeom>
+          <a:noFill/>
+          <a:ln/>
+        </p:spPr>
+        <p:txBody>
+          <a:bodyPr wrap="square" lIns="0" tIns="0" rIns="0" bIns="0" rtlCol="0" anchor="ctr">
+            <a:normAutofit/>
+          </a:bodyPr>
+          <a:lstStyle/>
+          <a:p>
+            <a:pPr indent="0" marL="0">
+              <a:buNone/>
+            </a:pPr>
+            <a:r>
+              <a:rPr lang="en-US" sz="1100" b="1" dirty="0">
+                <a:solidFill>
+                  <a:srgbClr val="2DFFB5"/>
+                </a:solidFill>
+                <a:latin typeface="Arial" pitchFamily="34" charset="0"/>
+                <a:ea typeface="Arial" pitchFamily="34" charset="-122"/>
+                <a:cs typeface="Arial" pitchFamily="34" charset="-120"/>
+              </a:rPr>
+              <a:t>€3.0M</a:t>
+            </a:r>
+            <a:endParaRPr lang="en-US" sz="1100" dirty="0"/>
+          </a:p>
+        </p:txBody>
+      </p:sp>
+      <p:sp>
+        <p:nvSpPr>
+          <p:cNvPr id="31" name="Shape 27"/>
+          <p:cNvSpPr/>
+          <p:nvPr/>
+        </p:nvSpPr>
+        <p:spPr>
+          <a:xfrm>
+            <a:off x="7406640" y="3337560"/>
+            <a:ext cx="4236415" cy="1325880"/>
+          </a:xfrm>
+          <a:prstGeom prst="roundRect">
+            <a:avLst>
+              <a:gd name="adj" fmla="val 8276"/>
+            </a:avLst>
+          </a:prstGeom>
+          <a:solidFill>
+            <a:srgbClr val="1F2330"/>
+          </a:solidFill>
+          <a:ln w="15875">
+            <a:solidFill>
+              <a:srgbClr val="FF2D75"/>
+            </a:solidFill>
+            <a:prstDash val="solid"/>
+          </a:ln>
+        </p:spPr>
+      </p:sp>
+      <p:sp>
+        <p:nvSpPr>
+          <p:cNvPr id="32" name="Text 28"/>
+          <p:cNvSpPr txBox="1"/>
+          <p:nvPr/>
+        </p:nvSpPr>
+        <p:spPr>
+          <a:xfrm>
+            <a:off x="7607808" y="3429000"/>
+            <a:ext cx="3834079" cy="274320"/>
+          </a:xfrm>
+          <a:prstGeom prst="rect">
+            <a:avLst/>
+          </a:prstGeom>
+          <a:noFill/>
+          <a:ln/>
+        </p:spPr>
+        <p:txBody>
+          <a:bodyPr wrap="square" lIns="0" tIns="0" rIns="0" bIns="0" rtlCol="0" anchor="t">
+            <a:normAutofit/>
+          </a:bodyPr>
+          <a:lstStyle/>
+          <a:p>
+            <a:pPr indent="0" marL="0">
+              <a:buNone/>
+            </a:pPr>
+            <a:r>
+              <a:rPr lang="en-US" sz="1100" b="1" dirty="0">
+                <a:solidFill>
+                  <a:srgbClr val="9AA3B5"/>
+                </a:solidFill>
+                <a:latin typeface="Arial" pitchFamily="34" charset="0"/>
+                <a:ea typeface="Arial" pitchFamily="34" charset="-122"/>
+                <a:cs typeface="Arial" pitchFamily="34" charset="-120"/>
+              </a:rPr>
+              <a:t>Founder offer · below every reference method</a:t>
+            </a:r>
+            <a:endParaRPr lang="en-US" sz="1100" dirty="0"/>
+          </a:p>
+        </p:txBody>
+      </p:sp>
+      <p:sp>
+        <p:nvSpPr>
+          <p:cNvPr id="33" name="Text 29"/>
+          <p:cNvSpPr txBox="1"/>
+          <p:nvPr/>
+        </p:nvSpPr>
+        <p:spPr>
+          <a:xfrm>
+            <a:off x="7607808" y="3685032"/>
+            <a:ext cx="3834079" cy="548640"/>
+          </a:xfrm>
+          <a:prstGeom prst="rect">
+            <a:avLst/>
+          </a:prstGeom>
+          <a:noFill/>
+          <a:ln/>
+        </p:spPr>
+        <p:txBody>
+          <a:bodyPr wrap="square" lIns="0" tIns="0" rIns="0" bIns="0" rtlCol="0" anchor="t">
+            <a:normAutofit/>
+          </a:bodyPr>
+          <a:lstStyle/>
+          <a:p>
+            <a:pPr indent="0" marL="0">
+              <a:buNone/>
+            </a:pPr>
+            <a:r>
+              <a:rPr lang="en-US" sz="3200" b="1" dirty="0">
+                <a:solidFill>
+                  <a:srgbClr val="FF2D75"/>
+                </a:solidFill>
+                <a:latin typeface="Arial" pitchFamily="34" charset="0"/>
+                <a:ea typeface="Arial" pitchFamily="34" charset="-122"/>
+                <a:cs typeface="Arial" pitchFamily="34" charset="-120"/>
+              </a:rPr>
+              <a:t>€2.25M</a:t>
+            </a:r>
+            <a:endParaRPr lang="en-US" sz="3200" dirty="0"/>
+          </a:p>
+        </p:txBody>
+      </p:sp>
+      <p:sp>
+        <p:nvSpPr>
+          <p:cNvPr id="34" name="Text 30"/>
+          <p:cNvSpPr txBox="1"/>
+          <p:nvPr/>
+        </p:nvSpPr>
+        <p:spPr>
+          <a:xfrm>
+            <a:off x="7607808" y="4233672"/>
+            <a:ext cx="3834079" cy="365760"/>
+          </a:xfrm>
+          <a:prstGeom prst="rect">
+            <a:avLst/>
+          </a:prstGeom>
+          <a:noFill/>
+          <a:ln/>
+        </p:spPr>
+        <p:txBody>
+          <a:bodyPr wrap="square" lIns="0" tIns="0" rIns="0" bIns="0" rtlCol="0" anchor="t">
+            <a:normAutofit/>
+          </a:bodyPr>
+          <a:lstStyle/>
+          <a:p>
+            <a:pPr indent="0" marL="0">
+              <a:buNone/>
+            </a:pPr>
+            <a:r>
+              <a:rPr lang="en-US" sz="1200" b="1" dirty="0">
+                <a:solidFill>
+                  <a:srgbClr val="FFFFFF"/>
+                </a:solidFill>
+                <a:latin typeface="Arial" pitchFamily="34" charset="0"/>
+                <a:ea typeface="Arial" pitchFamily="34" charset="-122"/>
+                <a:cs typeface="Arial" pitchFamily="34" charset="-120"/>
+              </a:rPr>
+              <a:t>pre-money · €250k for 10.0% · post-money €2.5M</a:t>
+            </a:r>
+            <a:endParaRPr lang="en-US" sz="1200" dirty="0"/>
+          </a:p>
+        </p:txBody>
+      </p:sp>
+      <p:sp>
+        <p:nvSpPr>
+          <p:cNvPr id="35" name="Shape 31"/>
+          <p:cNvSpPr/>
+          <p:nvPr/>
+        </p:nvSpPr>
+        <p:spPr>
+          <a:xfrm>
+            <a:off x="7406640" y="4800600"/>
+            <a:ext cx="4236415" cy="777240"/>
+          </a:xfrm>
+          <a:prstGeom prst="roundRect">
+            <a:avLst>
+              <a:gd name="adj" fmla="val 14118"/>
+            </a:avLst>
+          </a:prstGeom>
+          <a:solidFill>
+            <a:srgbClr val="181B23"/>
+          </a:solidFill>
+          <a:ln w="12700">
+            <a:solidFill>
+              <a:srgbClr val="181B23"/>
+            </a:solidFill>
+            <a:prstDash val="solid"/>
+          </a:ln>
+        </p:spPr>
+      </p:sp>
+      <p:sp>
+        <p:nvSpPr>
+          <p:cNvPr id="36" name="Text 32"/>
+          <p:cNvSpPr txBox="1"/>
+          <p:nvPr/>
+        </p:nvSpPr>
+        <p:spPr>
+          <a:xfrm>
+            <a:off x="7607808" y="4892040"/>
+            <a:ext cx="3834079" cy="274320"/>
+          </a:xfrm>
+          <a:prstGeom prst="rect">
+            <a:avLst/>
+          </a:prstGeom>
+          <a:noFill/>
+          <a:ln/>
+        </p:spPr>
+        <p:txBody>
+          <a:bodyPr wrap="square" lIns="0" tIns="0" rIns="0" bIns="0" rtlCol="0" anchor="t">
+            <a:normAutofit/>
+          </a:bodyPr>
+          <a:lstStyle/>
+          <a:p>
+            <a:pPr indent="0" marL="0">
+              <a:buNone/>
+            </a:pPr>
+            <a:r>
+              <a:rPr lang="en-US" sz="1200" b="1" dirty="0">
+                <a:solidFill>
+                  <a:srgbClr val="5AD1FF"/>
+                </a:solidFill>
+                <a:latin typeface="Arial" pitchFamily="34" charset="0"/>
+                <a:ea typeface="Arial" pitchFamily="34" charset="-122"/>
+                <a:cs typeface="Arial" pitchFamily="34" charset="-120"/>
+              </a:rPr>
+              <a:t>Alternative: SAFE / convertible loan</a:t>
+            </a:r>
+            <a:endParaRPr lang="en-US" sz="1200" dirty="0"/>
+          </a:p>
+        </p:txBody>
+      </p:sp>
+      <p:sp>
+        <p:nvSpPr>
+          <p:cNvPr id="37" name="Text 33"/>
+          <p:cNvSpPr txBox="1"/>
+          <p:nvPr/>
+        </p:nvSpPr>
+        <p:spPr>
+          <a:xfrm>
+            <a:off x="7607808" y="5184648"/>
+            <a:ext cx="3834079" cy="320040"/>
+          </a:xfrm>
+          <a:prstGeom prst="rect">
+            <a:avLst/>
+          </a:prstGeom>
+          <a:noFill/>
+          <a:ln/>
+        </p:spPr>
+        <p:txBody>
+          <a:bodyPr wrap="square" lIns="0" tIns="0" rIns="0" bIns="0" rtlCol="0" anchor="t">
+            <a:normAutofit/>
+          </a:bodyPr>
+          <a:lstStyle/>
+          <a:p>
+            <a:pPr indent="0" marL="0">
+              <a:buNone/>
+            </a:pPr>
+            <a:r>
+              <a:rPr lang="en-US" sz="1100" dirty="0">
+                <a:solidFill>
+                  <a:srgbClr val="FFFFFF"/>
+                </a:solidFill>
+                <a:latin typeface="Arial" pitchFamily="34" charset="0"/>
+                <a:ea typeface="Arial" pitchFamily="34" charset="-122"/>
+                <a:cs typeface="Arial" pitchFamily="34" charset="-120"/>
+              </a:rPr>
+              <a:t>Valuation cap €2.25M · 20% discount (15–20% negotiable) · no interest · converts in the seed round – max. 10%</a:t>
+            </a:r>
+            <a:endParaRPr lang="en-US" sz="1100" dirty="0"/>
+          </a:p>
+        </p:txBody>
+      </p:sp>
+      <p:sp>
+        <p:nvSpPr>
+          <p:cNvPr id="38" name="Text 34"/>
+          <p:cNvSpPr txBox="1"/>
+          <p:nvPr/>
+        </p:nvSpPr>
+        <p:spPr>
+          <a:xfrm>
+            <a:off x="548640" y="5760720"/>
+            <a:ext cx="9997135" cy="457200"/>
+          </a:xfrm>
+          <a:prstGeom prst="rect">
+            <a:avLst/>
+          </a:prstGeom>
+          <a:noFill/>
+          <a:ln/>
+        </p:spPr>
+        <p:txBody>
+          <a:bodyPr wrap="square" lIns="0" tIns="0" rIns="0" bIns="0" rtlCol="0" anchor="t">
+            <a:normAutofit/>
+          </a:bodyPr>
+          <a:lstStyle/>
+          <a:p>
+            <a:pPr indent="0" marL="0">
+              <a:buNone/>
+            </a:pPr>
+            <a:r>
+              <a:rPr lang="en-US" sz="1000" i="1" dirty="0">
+                <a:solidFill>
+                  <a:srgbClr val="FFD166"/>
+                </a:solidFill>
+                <a:latin typeface="Arial" pitchFamily="34" charset="0"/>
+                <a:ea typeface="Arial" pitchFamily="34" charset="-122"/>
+                <a:cs typeface="Arial" pitchFamily="34" charset="-120"/>
+              </a:rPr>
+              <a:t>Negotiation basis – review with tax/legal advisor. All figures are estimates from LiveFX_Finanzmodell.xlsx (weighted reference value €2.71M).</a:t>
+            </a:r>
+            <a:endParaRPr lang="en-US" sz="1000" dirty="0"/>
+          </a:p>
+        </p:txBody>
+      </p:sp>
+    </p:spTree>
+  </p:cSld>
+  <p:clrMapOvr>
+    <a:masterClrMapping/>
+  </p:clrMapOvr>
+</p:sld>
+</file>
+
+<file path=ppt/slides/slide18.xml><?xml version="1.0" encoding="utf-8"?>
+<p:sld xmlns:a="http://schemas.openxmlformats.org/drawingml/2006/main" xmlns:r="http://schemas.openxmlformats.org/officeDocument/2006/relationships" xmlns:p="http://schemas.openxmlformats.org/presentationml/2006/main">
+  <p:cSld name="Slide 18">
+    <p:bg>
+      <p:bgPr>
+        <a:solidFill>
+          <a:srgbClr val="0F1115"/>
+        </a:solidFill>
+      </p:bgPr>
+    </p:bg>
+    <p:spTree>
+      <p:nvGrpSpPr>
+        <p:cNvPr id="1" name=""/>
+        <p:cNvGrpSpPr/>
+        <p:nvPr/>
+      </p:nvGrpSpPr>
+      <p:grpSpPr>
+        <a:xfrm>
+          <a:off x="0" y="0"/>
+          <a:ext cx="0" cy="0"/>
+          <a:chOff x="0" y="0"/>
+          <a:chExt cx="0" cy="0"/>
+        </a:xfrm>
+      </p:grpSpPr>
+      <p:sp>
+        <p:nvSpPr>
+          <p:cNvPr id="2" name="Kicker"/>
+          <p:cNvSpPr txBox="1"/>
+          <p:nvPr/>
+        </p:nvSpPr>
+        <p:spPr>
+          <a:xfrm>
+            <a:off x="548640" y="182880"/>
+            <a:ext cx="8229600" cy="237744"/>
+          </a:xfrm>
+          <a:prstGeom prst="rect">
+            <a:avLst/>
+          </a:prstGeom>
+          <a:noFill/>
+          <a:ln/>
+        </p:spPr>
+        <p:txBody>
+          <a:bodyPr wrap="square" lIns="0" tIns="0" rIns="0" bIns="0" rtlCol="0" anchor="ctr"/>
+          <a:lstStyle/>
+          <a:p>
+            <a:pPr indent="0" marL="0">
+              <a:buNone/>
+            </a:pPr>
+            <a:r>
+              <a:rPr lang="en-US" sz="1000" b="1" spc="300" kern="0" dirty="0">
+                <a:solidFill>
+                  <a:srgbClr val="2DFFB5"/>
+                </a:solidFill>
+                <a:latin typeface="Arial" pitchFamily="34" charset="0"/>
+                <a:ea typeface="Arial" pitchFamily="34" charset="-122"/>
+                <a:cs typeface="Arial" pitchFamily="34" charset="-120"/>
+              </a:rPr>
+              <a:t>MILESTONES · 18 MONTHS</a:t>
+            </a:r>
+            <a:endParaRPr lang="en-US" sz="1000" dirty="0"/>
+          </a:p>
+        </p:txBody>
+      </p:sp>
+      <p:sp>
+        <p:nvSpPr>
+          <p:cNvPr id="3" name="Titel"/>
+          <p:cNvSpPr txBox="1"/>
+          <p:nvPr/>
+        </p:nvSpPr>
+        <p:spPr>
+          <a:xfrm>
+            <a:off x="548640" y="438912"/>
+            <a:ext cx="11094415" cy="777240"/>
+          </a:xfrm>
+          <a:prstGeom prst="rect">
+            <a:avLst/>
+          </a:prstGeom>
+          <a:noFill/>
+          <a:ln/>
+        </p:spPr>
+        <p:txBody>
+          <a:bodyPr wrap="square" lIns="0" tIns="0" rIns="0" bIns="0" rtlCol="0" anchor="t">
+            <a:normAutofit/>
+          </a:bodyPr>
+          <a:lstStyle/>
+          <a:p>
+            <a:pPr indent="0" marL="0">
+              <a:buNone/>
+            </a:pPr>
+            <a:r>
+              <a:rPr lang="en-US" sz="3200" b="1" dirty="0">
+                <a:solidFill>
+                  <a:srgbClr val="FFFFFF"/>
+                </a:solidFill>
+                <a:latin typeface="Arial" pitchFamily="34" charset="0"/>
+                <a:ea typeface="Arial" pitchFamily="34" charset="-122"/>
+                <a:cs typeface="Arial" pitchFamily="34" charset="-120"/>
+              </a:rPr>
+              <a:t>Gates: what the €250k must prove</a:t>
+            </a:r>
+            <a:endParaRPr lang="en-US" sz="3200" dirty="0"/>
+          </a:p>
+        </p:txBody>
+      </p:sp>
+      <p:sp>
+        <p:nvSpPr>
+          <p:cNvPr id="4" name="Fuß"/>
+          <p:cNvSpPr txBox="1"/>
+          <p:nvPr/>
+        </p:nvSpPr>
+        <p:spPr>
+          <a:xfrm>
+            <a:off x="7071055" y="6473952"/>
+            <a:ext cx="4572000" cy="228600"/>
+          </a:xfrm>
+          <a:prstGeom prst="rect">
+            <a:avLst/>
+          </a:prstGeom>
+          <a:noFill/>
+          <a:ln/>
+        </p:spPr>
+        <p:txBody>
+          <a:bodyPr wrap="square" lIns="0" tIns="0" rIns="0" bIns="0" rtlCol="0" anchor="ctr"/>
+          <a:lstStyle/>
+          <a:p>
+            <a:pPr algn="r" indent="0" marL="0">
+              <a:buNone/>
+            </a:pPr>
+            <a:r>
+              <a:rPr lang="en-US" sz="900" dirty="0">
+                <a:solidFill>
+                  <a:srgbClr val="6B7280"/>
+                </a:solidFill>
+                <a:latin typeface="Arial" pitchFamily="34" charset="0"/>
+                <a:ea typeface="Arial" pitchFamily="34" charset="-122"/>
+                <a:cs typeface="Arial" pitchFamily="34" charset="-120"/>
+              </a:rPr>
+              <a:t>Confidential · October 2026  ·  LiveFX  ·  18</a:t>
+            </a:r>
+            <a:endParaRPr lang="en-US" sz="900" dirty="0"/>
+          </a:p>
+        </p:txBody>
+      </p:sp>
+      <p:sp>
+        <p:nvSpPr>
+          <p:cNvPr id="6" name="Shape 3"/>
+          <p:cNvSpPr/>
+          <p:nvPr/>
+        </p:nvSpPr>
+        <p:spPr>
+          <a:xfrm>
+            <a:off x="822960" y="1618488"/>
+            <a:ext cx="10545775" cy="0"/>
+          </a:xfrm>
+          <a:prstGeom prst="line">
+            <a:avLst/>
+          </a:prstGeom>
+          <a:noFill/>
+          <a:ln w="25400">
+            <a:solidFill>
+              <a:srgbClr val="2A2F3C"/>
+            </a:solidFill>
+            <a:prstDash val="solid"/>
+          </a:ln>
+        </p:spPr>
+      </p:sp>
+      <p:sp>
+        <p:nvSpPr>
+          <p:cNvPr id="7" name="Shape 4"/>
+          <p:cNvSpPr/>
+          <p:nvPr/>
+        </p:nvSpPr>
+        <p:spPr>
+          <a:xfrm>
+            <a:off x="640080" y="1444752"/>
+            <a:ext cx="2487854" cy="347472"/>
+          </a:xfrm>
+          <a:prstGeom prst="roundRect">
+            <a:avLst>
+              <a:gd name="adj" fmla="val 50000"/>
+            </a:avLst>
+          </a:prstGeom>
+          <a:solidFill>
+            <a:srgbClr val="1F2330"/>
+          </a:solidFill>
+          <a:ln w="12700">
+            <a:solidFill>
+              <a:srgbClr val="FF2D75"/>
+            </a:solidFill>
+            <a:prstDash val="solid"/>
+          </a:ln>
+        </p:spPr>
+      </p:sp>
+      <p:sp>
+        <p:nvSpPr>
+          <p:cNvPr id="8" name="Text 5"/>
+          <p:cNvSpPr txBox="1"/>
+          <p:nvPr/>
+        </p:nvSpPr>
+        <p:spPr>
+          <a:xfrm>
+            <a:off x="640080" y="1444752"/>
+            <a:ext cx="2487854" cy="347472"/>
+          </a:xfrm>
+          <a:prstGeom prst="rect">
+            <a:avLst/>
+          </a:prstGeom>
+          <a:noFill/>
+          <a:ln/>
+        </p:spPr>
+        <p:txBody>
+          <a:bodyPr wrap="square" lIns="0" tIns="0" rIns="0" bIns="0" rtlCol="0" anchor="ctr">
+            <a:normAutofit/>
+          </a:bodyPr>
+          <a:lstStyle/>
+          <a:p>
+            <a:pPr algn="ctr" indent="0" marL="0">
+              <a:buNone/>
+            </a:pPr>
+            <a:r>
+              <a:rPr lang="en-US" sz="1200" b="1" dirty="0">
+                <a:solidFill>
+                  <a:srgbClr val="FF2D75"/>
+                </a:solidFill>
+                <a:latin typeface="Arial" pitchFamily="34" charset="0"/>
+                <a:ea typeface="Arial" pitchFamily="34" charset="-122"/>
+                <a:cs typeface="Arial" pitchFamily="34" charset="-120"/>
+              </a:rPr>
+              <a:t>G0  ·  Month 3</a:t>
+            </a:r>
+            <a:endParaRPr lang="en-US" sz="1200" dirty="0"/>
+          </a:p>
+        </p:txBody>
+      </p:sp>
+      <p:sp>
+        <p:nvSpPr>
+          <p:cNvPr id="9" name="Shape 6"/>
+          <p:cNvSpPr/>
+          <p:nvPr/>
+        </p:nvSpPr>
+        <p:spPr>
+          <a:xfrm>
+            <a:off x="548640" y="1938528"/>
+            <a:ext cx="2670734" cy="3703320"/>
+          </a:xfrm>
+          <a:prstGeom prst="roundRect">
+            <a:avLst>
+              <a:gd name="adj" fmla="val 4109"/>
+            </a:avLst>
+          </a:prstGeom>
+          <a:solidFill>
+            <a:srgbClr val="181B23"/>
+          </a:solidFill>
+          <a:ln w="12700">
+            <a:solidFill>
+              <a:srgbClr val="181B23"/>
+            </a:solidFill>
+            <a:prstDash val="solid"/>
+          </a:ln>
+        </p:spPr>
+      </p:sp>
+      <p:sp>
+        <p:nvSpPr>
+          <p:cNvPr id="10" name="Text 7"/>
+          <p:cNvSpPr txBox="1"/>
+          <p:nvPr/>
+        </p:nvSpPr>
+        <p:spPr>
+          <a:xfrm>
+            <a:off x="749808" y="2048256"/>
+            <a:ext cx="2268398" cy="365760"/>
+          </a:xfrm>
+          <a:prstGeom prst="rect">
+            <a:avLst/>
+          </a:prstGeom>
+          <a:noFill/>
+          <a:ln/>
+        </p:spPr>
+        <p:txBody>
+          <a:bodyPr wrap="square" lIns="0" tIns="0" rIns="0" bIns="0" rtlCol="0" anchor="t">
+            <a:normAutofit/>
+          </a:bodyPr>
+          <a:lstStyle/>
+          <a:p>
+            <a:pPr indent="0" marL="0">
+              <a:buNone/>
+            </a:pPr>
+            <a:r>
+              <a:rPr lang="en-US" sz="1500" b="1" dirty="0">
+                <a:solidFill>
+                  <a:srgbClr val="FF2D75"/>
+                </a:solidFill>
+                <a:latin typeface="Arial" pitchFamily="34" charset="0"/>
+                <a:ea typeface="Arial" pitchFamily="34" charset="-122"/>
+                <a:cs typeface="Arial" pitchFamily="34" charset="-120"/>
+              </a:rPr>
+              <a:t>Start</a:t>
+            </a:r>
+            <a:endParaRPr lang="en-US" sz="1500" dirty="0"/>
+          </a:p>
+        </p:txBody>
+      </p:sp>
+      <p:sp>
+        <p:nvSpPr>
+          <p:cNvPr id="11" name="Text 8"/>
+          <p:cNvSpPr txBox="1"/>
+          <p:nvPr/>
+        </p:nvSpPr>
+        <p:spPr>
+          <a:xfrm>
+            <a:off x="749808" y="2468880"/>
+            <a:ext cx="2268398" cy="2286000"/>
+          </a:xfrm>
+          <a:prstGeom prst="rect">
+            <a:avLst/>
+          </a:prstGeom>
+          <a:noFill/>
+          <a:ln/>
+        </p:spPr>
+        <p:txBody>
+          <a:bodyPr wrap="square" lIns="0" tIns="0" rIns="0" bIns="0" rtlCol="0" anchor="t">
+            <a:normAutofit/>
+          </a:bodyPr>
+          <a:lstStyle/>
+          <a:p>
+            <a:pPr marL="203200" indent="-203200">
+              <a:spcAft>
+                <a:spcPts val="500"/>
+              </a:spcAft>
+              <a:buSzPct val="100000"/>
+              <a:buChar char="•"/>
+            </a:pPr>
+            <a:r>
+              <a:rPr lang="en-US" sz="1150" dirty="0">
+                <a:solidFill>
+                  <a:srgbClr val="FFFFFF"/>
+                </a:solidFill>
+                <a:latin typeface="Arial" pitchFamily="34" charset="0"/>
+                <a:ea typeface="Arial" pitchFamily="34" charset="-122"/>
+                <a:cs typeface="Arial" pitchFamily="34" charset="-120"/>
+              </a:rPr>
+              <a:t>Pro subscription live (payment)</a:t>
+            </a:r>
+            <a:endParaRPr lang="en-US" sz="1150" dirty="0"/>
+          </a:p>
+          <a:p>
+            <a:pPr marL="203200" indent="-203200">
+              <a:spcAft>
+                <a:spcPts val="500"/>
+              </a:spcAft>
+              <a:buSzPct val="100000"/>
+              <a:buChar char="•"/>
+            </a:pPr>
+            <a:r>
+              <a:rPr lang="en-US" sz="1150" dirty="0">
+                <a:solidFill>
+                  <a:srgbClr val="FFFFFF"/>
+                </a:solidFill>
+                <a:latin typeface="Arial" pitchFamily="34" charset="0"/>
+                <a:ea typeface="Arial" pitchFamily="34" charset="-122"/>
+                <a:cs typeface="Arial" pitchFamily="34" charset="-120"/>
+              </a:rPr>
+              <a:t>Mobile/web developer on board</a:t>
+            </a:r>
+            <a:endParaRPr lang="en-US" sz="1150" dirty="0"/>
+          </a:p>
+        </p:txBody>
+      </p:sp>
+      <p:sp>
+        <p:nvSpPr>
+          <p:cNvPr id="12" name="Shape 9"/>
+          <p:cNvSpPr/>
+          <p:nvPr/>
+        </p:nvSpPr>
+        <p:spPr>
+          <a:xfrm>
+            <a:off x="749808" y="4846320"/>
+            <a:ext cx="2268398" cy="0"/>
+          </a:xfrm>
+          <a:prstGeom prst="line">
+            <a:avLst/>
+          </a:prstGeom>
+          <a:noFill/>
+          <a:ln w="12700">
+            <a:solidFill>
+              <a:srgbClr val="2A2F3C"/>
+            </a:solidFill>
+            <a:prstDash val="solid"/>
+          </a:ln>
+        </p:spPr>
+      </p:sp>
+      <p:sp>
+        <p:nvSpPr>
+          <p:cNvPr id="13" name="Text 10"/>
+          <p:cNvSpPr txBox="1"/>
+          <p:nvPr/>
+        </p:nvSpPr>
+        <p:spPr>
+          <a:xfrm>
+            <a:off x="749808" y="4910328"/>
+            <a:ext cx="2268398" cy="219456"/>
+          </a:xfrm>
+          <a:prstGeom prst="rect">
+            <a:avLst/>
+          </a:prstGeom>
+          <a:noFill/>
+          <a:ln/>
+        </p:spPr>
+        <p:txBody>
+          <a:bodyPr wrap="square" lIns="0" tIns="0" rIns="0" bIns="0" rtlCol="0" anchor="t">
+            <a:normAutofit/>
+          </a:bodyPr>
+          <a:lstStyle/>
+          <a:p>
+            <a:pPr indent="0" marL="0">
+              <a:buNone/>
+            </a:pPr>
+            <a:r>
+              <a:rPr lang="en-US" sz="950" b="1" spc="100" kern="0" dirty="0">
+                <a:solidFill>
+                  <a:srgbClr val="9AA3B5"/>
+                </a:solidFill>
+                <a:latin typeface="Arial" pitchFamily="34" charset="0"/>
+                <a:ea typeface="Arial" pitchFamily="34" charset="-122"/>
+                <a:cs typeface="Arial" pitchFamily="34" charset="-120"/>
+              </a:rPr>
+              <a:t>RELEASES</a:t>
+            </a:r>
+            <a:endParaRPr lang="en-US" sz="950" dirty="0"/>
+          </a:p>
+        </p:txBody>
+      </p:sp>
+      <p:sp>
+        <p:nvSpPr>
+          <p:cNvPr id="14" name="Text 11"/>
+          <p:cNvSpPr txBox="1"/>
+          <p:nvPr/>
+        </p:nvSpPr>
+        <p:spPr>
+          <a:xfrm>
+            <a:off x="749808" y="5148072"/>
+            <a:ext cx="2268398" cy="457200"/>
+          </a:xfrm>
+          <a:prstGeom prst="rect">
+            <a:avLst/>
+          </a:prstGeom>
+          <a:noFill/>
+          <a:ln/>
+        </p:spPr>
+        <p:txBody>
+          <a:bodyPr wrap="square" lIns="0" tIns="0" rIns="0" bIns="0" rtlCol="0" anchor="t">
+            <a:normAutofit/>
+          </a:bodyPr>
+          <a:lstStyle/>
+          <a:p>
+            <a:pPr indent="0" marL="0">
+              <a:buNone/>
+            </a:pPr>
+            <a:r>
+              <a:rPr lang="en-US" sz="1100" b="1" dirty="0">
+                <a:solidFill>
+                  <a:srgbClr val="FF2D75"/>
+                </a:solidFill>
+                <a:latin typeface="Arial" pitchFamily="34" charset="0"/>
+                <a:ea typeface="Arial" pitchFamily="34" charset="-122"/>
+                <a:cs typeface="Arial" pitchFamily="34" charset="-120"/>
+              </a:rPr>
+              <a:t>Go-to-market budget phase 2</a:t>
+            </a:r>
+            <a:endParaRPr lang="en-US" sz="1100" dirty="0"/>
+          </a:p>
+        </p:txBody>
+      </p:sp>
+      <p:sp>
+        <p:nvSpPr>
+          <p:cNvPr id="15" name="Shape 12"/>
+          <p:cNvSpPr/>
+          <p:nvPr/>
+        </p:nvSpPr>
+        <p:spPr>
+          <a:xfrm>
+            <a:off x="3447974" y="1444752"/>
+            <a:ext cx="2487854" cy="347472"/>
+          </a:xfrm>
+          <a:prstGeom prst="roundRect">
+            <a:avLst>
+              <a:gd name="adj" fmla="val 50000"/>
+            </a:avLst>
+          </a:prstGeom>
+          <a:solidFill>
+            <a:srgbClr val="1F2330"/>
+          </a:solidFill>
+          <a:ln w="12700">
+            <a:solidFill>
+              <a:srgbClr val="2DFFB5"/>
+            </a:solidFill>
+            <a:prstDash val="solid"/>
+          </a:ln>
+        </p:spPr>
+      </p:sp>
+      <p:sp>
+        <p:nvSpPr>
+          <p:cNvPr id="16" name="Text 13"/>
+          <p:cNvSpPr txBox="1"/>
+          <p:nvPr/>
+        </p:nvSpPr>
+        <p:spPr>
+          <a:xfrm>
+            <a:off x="3447974" y="1444752"/>
+            <a:ext cx="2487854" cy="347472"/>
+          </a:xfrm>
+          <a:prstGeom prst="rect">
+            <a:avLst/>
+          </a:prstGeom>
+          <a:noFill/>
+          <a:ln/>
+        </p:spPr>
+        <p:txBody>
+          <a:bodyPr wrap="square" lIns="0" tIns="0" rIns="0" bIns="0" rtlCol="0" anchor="ctr">
+            <a:normAutofit/>
+          </a:bodyPr>
+          <a:lstStyle/>
+          <a:p>
+            <a:pPr algn="ctr" indent="0" marL="0">
+              <a:buNone/>
+            </a:pPr>
+            <a:r>
+              <a:rPr lang="en-US" sz="1200" b="1" dirty="0">
+                <a:solidFill>
+                  <a:srgbClr val="2DFFB5"/>
+                </a:solidFill>
+                <a:latin typeface="Arial" pitchFamily="34" charset="0"/>
+                <a:ea typeface="Arial" pitchFamily="34" charset="-122"/>
+                <a:cs typeface="Arial" pitchFamily="34" charset="-120"/>
+              </a:rPr>
+              <a:t>G1  ·  Month 6</a:t>
+            </a:r>
+            <a:endParaRPr lang="en-US" sz="1200" dirty="0"/>
+          </a:p>
+        </p:txBody>
+      </p:sp>
+      <p:sp>
+        <p:nvSpPr>
+          <p:cNvPr id="17" name="Shape 14"/>
+          <p:cNvSpPr/>
+          <p:nvPr/>
+        </p:nvSpPr>
+        <p:spPr>
+          <a:xfrm>
+            <a:off x="3356534" y="1938528"/>
+            <a:ext cx="2670734" cy="3703320"/>
+          </a:xfrm>
+          <a:prstGeom prst="roundRect">
+            <a:avLst>
+              <a:gd name="adj" fmla="val 4109"/>
+            </a:avLst>
+          </a:prstGeom>
+          <a:solidFill>
+            <a:srgbClr val="181B23"/>
+          </a:solidFill>
+          <a:ln w="12700">
+            <a:solidFill>
+              <a:srgbClr val="181B23"/>
+            </a:solidFill>
+            <a:prstDash val="solid"/>
+          </a:ln>
+        </p:spPr>
+      </p:sp>
+      <p:sp>
+        <p:nvSpPr>
+          <p:cNvPr id="18" name="Text 15"/>
+          <p:cNvSpPr txBox="1"/>
+          <p:nvPr/>
+        </p:nvSpPr>
+        <p:spPr>
+          <a:xfrm>
+            <a:off x="3557702" y="2048256"/>
+            <a:ext cx="2268398" cy="365760"/>
+          </a:xfrm>
+          <a:prstGeom prst="rect">
+            <a:avLst/>
+          </a:prstGeom>
+          <a:noFill/>
+          <a:ln/>
+        </p:spPr>
+        <p:txBody>
+          <a:bodyPr wrap="square" lIns="0" tIns="0" rIns="0" bIns="0" rtlCol="0" anchor="t">
+            <a:normAutofit/>
+          </a:bodyPr>
+          <a:lstStyle/>
+          <a:p>
+            <a:pPr indent="0" marL="0">
+              <a:buNone/>
+            </a:pPr>
+            <a:r>
+              <a:rPr lang="en-US" sz="1500" b="1" dirty="0">
+                <a:solidFill>
+                  <a:srgbClr val="2DFFB5"/>
+                </a:solidFill>
+                <a:latin typeface="Arial" pitchFamily="34" charset="0"/>
+                <a:ea typeface="Arial" pitchFamily="34" charset="-122"/>
+                <a:cs typeface="Arial" pitchFamily="34" charset="-120"/>
+              </a:rPr>
+              <a:t>Activation</a:t>
+            </a:r>
+            <a:endParaRPr lang="en-US" sz="1500" dirty="0"/>
+          </a:p>
+        </p:txBody>
+      </p:sp>
+      <p:sp>
+        <p:nvSpPr>
+          <p:cNvPr id="19" name="Text 16"/>
+          <p:cNvSpPr txBox="1"/>
+          <p:nvPr/>
+        </p:nvSpPr>
+        <p:spPr>
+          <a:xfrm>
+            <a:off x="3557702" y="2468880"/>
+            <a:ext cx="2268398" cy="2286000"/>
+          </a:xfrm>
+          <a:prstGeom prst="rect">
+            <a:avLst/>
+          </a:prstGeom>
+          <a:noFill/>
+          <a:ln/>
+        </p:spPr>
+        <p:txBody>
+          <a:bodyPr wrap="square" lIns="0" tIns="0" rIns="0" bIns="0" rtlCol="0" anchor="t">
+            <a:normAutofit/>
+          </a:bodyPr>
+          <a:lstStyle/>
+          <a:p>
+            <a:pPr marL="203200" indent="-203200">
+              <a:spcAft>
+                <a:spcPts val="500"/>
+              </a:spcAft>
+              <a:buSzPct val="100000"/>
+              <a:buChar char="•"/>
+            </a:pPr>
+            <a:r>
+              <a:rPr lang="en-US" sz="1150" dirty="0">
+                <a:solidFill>
+                  <a:srgbClr val="FFFFFF"/>
+                </a:solidFill>
+                <a:latin typeface="Arial" pitchFamily="34" charset="0"/>
+                <a:ea typeface="Arial" pitchFamily="34" charset="-122"/>
+                <a:cs typeface="Arial" pitchFamily="34" charset="-120"/>
+              </a:rPr>
+              <a:t>10,000 registered users (threshold 4,000)</a:t>
+            </a:r>
+            <a:endParaRPr lang="en-US" sz="1150" dirty="0"/>
+          </a:p>
+          <a:p>
+            <a:pPr marL="203200" indent="-203200">
+              <a:spcAft>
+                <a:spcPts val="500"/>
+              </a:spcAft>
+              <a:buSzPct val="100000"/>
+              <a:buChar char="•"/>
+            </a:pPr>
+            <a:r>
+              <a:rPr lang="en-US" sz="1150" dirty="0">
+                <a:solidFill>
+                  <a:srgbClr val="FFFFFF"/>
+                </a:solidFill>
+                <a:latin typeface="Arial" pitchFamily="34" charset="0"/>
+                <a:ea typeface="Arial" pitchFamily="34" charset="-122"/>
+                <a:cs typeface="Arial" pitchFamily="34" charset="-120"/>
+              </a:rPr>
+              <a:t>400 paying Pro (threshold 120)</a:t>
+            </a:r>
+            <a:endParaRPr lang="en-US" sz="1150" dirty="0"/>
+          </a:p>
+          <a:p>
+            <a:pPr marL="203200" indent="-203200">
+              <a:spcAft>
+                <a:spcPts val="500"/>
+              </a:spcAft>
+              <a:buSzPct val="100000"/>
+              <a:buChar char="•"/>
+            </a:pPr>
+            <a:r>
+              <a:rPr lang="en-US" sz="1150" dirty="0">
+                <a:solidFill>
+                  <a:srgbClr val="FFFFFF"/>
+                </a:solidFill>
+                <a:latin typeface="Arial" pitchFamily="34" charset="0"/>
+                <a:ea typeface="Arial" pitchFamily="34" charset="-122"/>
+                <a:cs typeface="Arial" pitchFamily="34" charset="-120"/>
+              </a:rPr>
+              <a:t>20 beta creators TR/DE, 10–20 ambassadors</a:t>
+            </a:r>
+            <a:endParaRPr lang="en-US" sz="1150" dirty="0"/>
+          </a:p>
+          <a:p>
+            <a:pPr marL="203200" indent="-203200">
+              <a:spcAft>
+                <a:spcPts val="500"/>
+              </a:spcAft>
+              <a:buSzPct val="100000"/>
+              <a:buChar char="•"/>
+            </a:pPr>
+            <a:r>
+              <a:rPr lang="en-US" sz="1150" dirty="0">
+                <a:solidFill>
+                  <a:srgbClr val="FFFFFF"/>
+                </a:solidFill>
+                <a:latin typeface="Arial" pitchFamily="34" charset="0"/>
+                <a:ea typeface="Arial" pitchFamily="34" charset="-122"/>
+                <a:cs typeface="Arial" pitchFamily="34" charset="-120"/>
+              </a:rPr>
+              <a:t>WortBild with 300 words</a:t>
+            </a:r>
+            <a:endParaRPr lang="en-US" sz="1150" dirty="0"/>
+          </a:p>
+          <a:p>
+            <a:pPr marL="203200" indent="-203200">
+              <a:spcAft>
+                <a:spcPts val="500"/>
+              </a:spcAft>
+              <a:buSzPct val="100000"/>
+              <a:buChar char="•"/>
+            </a:pPr>
+            <a:r>
+              <a:rPr lang="en-US" sz="1150" dirty="0">
+                <a:solidFill>
+                  <a:srgbClr val="FFFFFF"/>
+                </a:solidFill>
+                <a:latin typeface="Arial" pitchFamily="34" charset="0"/>
+                <a:ea typeface="Arial" pitchFamily="34" charset="-122"/>
+                <a:cs typeface="Arial" pitchFamily="34" charset="-120"/>
+              </a:rPr>
+              <a:t>Week-4 retention ≥ 30%</a:t>
+            </a:r>
+            <a:endParaRPr lang="en-US" sz="1150" dirty="0"/>
+          </a:p>
+        </p:txBody>
+      </p:sp>
+      <p:sp>
+        <p:nvSpPr>
+          <p:cNvPr id="20" name="Shape 17"/>
+          <p:cNvSpPr/>
+          <p:nvPr/>
+        </p:nvSpPr>
+        <p:spPr>
+          <a:xfrm>
+            <a:off x="3557702" y="4846320"/>
+            <a:ext cx="2268398" cy="0"/>
+          </a:xfrm>
+          <a:prstGeom prst="line">
+            <a:avLst/>
+          </a:prstGeom>
+          <a:noFill/>
+          <a:ln w="12700">
+            <a:solidFill>
+              <a:srgbClr val="2A2F3C"/>
+            </a:solidFill>
+            <a:prstDash val="solid"/>
+          </a:ln>
+        </p:spPr>
+      </p:sp>
+      <p:sp>
+        <p:nvSpPr>
+          <p:cNvPr id="21" name="Text 18"/>
+          <p:cNvSpPr txBox="1"/>
+          <p:nvPr/>
+        </p:nvSpPr>
+        <p:spPr>
+          <a:xfrm>
+            <a:off x="3557702" y="4910328"/>
+            <a:ext cx="2268398" cy="219456"/>
+          </a:xfrm>
+          <a:prstGeom prst="rect">
+            <a:avLst/>
+          </a:prstGeom>
+          <a:noFill/>
+          <a:ln/>
+        </p:spPr>
+        <p:txBody>
+          <a:bodyPr wrap="square" lIns="0" tIns="0" rIns="0" bIns="0" rtlCol="0" anchor="t">
+            <a:normAutofit/>
+          </a:bodyPr>
+          <a:lstStyle/>
+          <a:p>
+            <a:pPr indent="0" marL="0">
+              <a:buNone/>
+            </a:pPr>
+            <a:r>
+              <a:rPr lang="en-US" sz="950" b="1" spc="100" kern="0" dirty="0">
+                <a:solidFill>
+                  <a:srgbClr val="9AA3B5"/>
+                </a:solidFill>
+                <a:latin typeface="Arial" pitchFamily="34" charset="0"/>
+                <a:ea typeface="Arial" pitchFamily="34" charset="-122"/>
+                <a:cs typeface="Arial" pitchFamily="34" charset="-120"/>
+              </a:rPr>
+              <a:t>RELEASES</a:t>
+            </a:r>
+            <a:endParaRPr lang="en-US" sz="950" dirty="0"/>
+          </a:p>
+        </p:txBody>
+      </p:sp>
+      <p:sp>
+        <p:nvSpPr>
+          <p:cNvPr id="22" name="Text 19"/>
+          <p:cNvSpPr txBox="1"/>
+          <p:nvPr/>
+        </p:nvSpPr>
+        <p:spPr>
+          <a:xfrm>
+            <a:off x="3557702" y="5148072"/>
+            <a:ext cx="2268398" cy="457200"/>
+          </a:xfrm>
+          <a:prstGeom prst="rect">
+            <a:avLst/>
+          </a:prstGeom>
+          <a:noFill/>
+          <a:ln/>
+        </p:spPr>
+        <p:txBody>
+          <a:bodyPr wrap="square" lIns="0" tIns="0" rIns="0" bIns="0" rtlCol="0" anchor="t">
+            <a:normAutofit/>
+          </a:bodyPr>
+          <a:lstStyle/>
+          <a:p>
+            <a:pPr indent="0" marL="0">
+              <a:buNone/>
+            </a:pPr>
+            <a:r>
+              <a:rPr lang="en-US" sz="1100" b="1" dirty="0">
+                <a:solidFill>
+                  <a:srgbClr val="2DFFB5"/>
+                </a:solidFill>
+                <a:latin typeface="Arial" pitchFamily="34" charset="0"/>
+                <a:ea typeface="Arial" pitchFamily="34" charset="-122"/>
+                <a:cs typeface="Arial" pitchFamily="34" charset="-120"/>
+              </a:rPr>
+              <a:t>Mobile app/PWA release</a:t>
+            </a:r>
+            <a:endParaRPr lang="en-US" sz="1100" dirty="0"/>
+          </a:p>
+        </p:txBody>
+      </p:sp>
+      <p:sp>
+        <p:nvSpPr>
+          <p:cNvPr id="23" name="Shape 20"/>
+          <p:cNvSpPr/>
+          <p:nvPr/>
+        </p:nvSpPr>
+        <p:spPr>
+          <a:xfrm>
+            <a:off x="6255868" y="1444752"/>
+            <a:ext cx="2487854" cy="347472"/>
+          </a:xfrm>
+          <a:prstGeom prst="roundRect">
+            <a:avLst>
+              <a:gd name="adj" fmla="val 50000"/>
+            </a:avLst>
+          </a:prstGeom>
+          <a:solidFill>
+            <a:srgbClr val="1F2330"/>
+          </a:solidFill>
+          <a:ln w="12700">
+            <a:solidFill>
+              <a:srgbClr val="FFD166"/>
+            </a:solidFill>
+            <a:prstDash val="solid"/>
+          </a:ln>
+        </p:spPr>
+      </p:sp>
+      <p:sp>
+        <p:nvSpPr>
+          <p:cNvPr id="24" name="Text 21"/>
+          <p:cNvSpPr txBox="1"/>
+          <p:nvPr/>
+        </p:nvSpPr>
+        <p:spPr>
+          <a:xfrm>
+            <a:off x="6255868" y="1444752"/>
+            <a:ext cx="2487854" cy="347472"/>
+          </a:xfrm>
+          <a:prstGeom prst="rect">
+            <a:avLst/>
+          </a:prstGeom>
+          <a:noFill/>
+          <a:ln/>
+        </p:spPr>
+        <p:txBody>
+          <a:bodyPr wrap="square" lIns="0" tIns="0" rIns="0" bIns="0" rtlCol="0" anchor="ctr">
+            <a:normAutofit/>
+          </a:bodyPr>
+          <a:lstStyle/>
+          <a:p>
+            <a:pPr algn="ctr" indent="0" marL="0">
+              <a:buNone/>
+            </a:pPr>
+            <a:r>
+              <a:rPr lang="en-US" sz="1200" b="1" dirty="0">
+                <a:solidFill>
+                  <a:srgbClr val="FFD166"/>
+                </a:solidFill>
+                <a:latin typeface="Arial" pitchFamily="34" charset="0"/>
+                <a:ea typeface="Arial" pitchFamily="34" charset="-122"/>
+                <a:cs typeface="Arial" pitchFamily="34" charset="-120"/>
+              </a:rPr>
+              <a:t>G2a  ·  Month 12</a:t>
+            </a:r>
+            <a:endParaRPr lang="en-US" sz="1200" dirty="0"/>
+          </a:p>
+        </p:txBody>
+      </p:sp>
+      <p:sp>
+        <p:nvSpPr>
+          <p:cNvPr id="25" name="Shape 22"/>
+          <p:cNvSpPr/>
+          <p:nvPr/>
+        </p:nvSpPr>
+        <p:spPr>
+          <a:xfrm>
+            <a:off x="6164428" y="1938528"/>
+            <a:ext cx="2670734" cy="3703320"/>
+          </a:xfrm>
+          <a:prstGeom prst="roundRect">
+            <a:avLst>
+              <a:gd name="adj" fmla="val 4109"/>
+            </a:avLst>
+          </a:prstGeom>
+          <a:solidFill>
+            <a:srgbClr val="181B23"/>
+          </a:solidFill>
+          <a:ln w="12700">
+            <a:solidFill>
+              <a:srgbClr val="181B23"/>
+            </a:solidFill>
+            <a:prstDash val="solid"/>
+          </a:ln>
+        </p:spPr>
+      </p:sp>
+      <p:sp>
+        <p:nvSpPr>
+          <p:cNvPr id="26" name="Text 23"/>
+          <p:cNvSpPr txBox="1"/>
+          <p:nvPr/>
+        </p:nvSpPr>
+        <p:spPr>
+          <a:xfrm>
+            <a:off x="6365596" y="2048256"/>
+            <a:ext cx="2268398" cy="365760"/>
+          </a:xfrm>
+          <a:prstGeom prst="rect">
+            <a:avLst/>
+          </a:prstGeom>
+          <a:noFill/>
+          <a:ln/>
+        </p:spPr>
+        <p:txBody>
+          <a:bodyPr wrap="square" lIns="0" tIns="0" rIns="0" bIns="0" rtlCol="0" anchor="t">
+            <a:normAutofit/>
+          </a:bodyPr>
+          <a:lstStyle/>
+          <a:p>
+            <a:pPr indent="0" marL="0">
+              <a:buNone/>
+            </a:pPr>
+            <a:r>
+              <a:rPr lang="en-US" sz="1500" b="1" dirty="0">
+                <a:solidFill>
+                  <a:srgbClr val="FFD166"/>
+                </a:solidFill>
+                <a:latin typeface="Arial" pitchFamily="34" charset="0"/>
+                <a:ea typeface="Arial" pitchFamily="34" charset="-122"/>
+                <a:cs typeface="Arial" pitchFamily="34" charset="-120"/>
+              </a:rPr>
+              <a:t>Traction</a:t>
+            </a:r>
+            <a:endParaRPr lang="en-US" sz="1500" dirty="0"/>
+          </a:p>
+        </p:txBody>
+      </p:sp>
+      <p:sp>
+        <p:nvSpPr>
+          <p:cNvPr id="27" name="Text 24"/>
+          <p:cNvSpPr txBox="1"/>
+          <p:nvPr/>
+        </p:nvSpPr>
+        <p:spPr>
+          <a:xfrm>
+            <a:off x="6365596" y="2468880"/>
+            <a:ext cx="2268398" cy="2286000"/>
+          </a:xfrm>
+          <a:prstGeom prst="rect">
+            <a:avLst/>
+          </a:prstGeom>
+          <a:noFill/>
+          <a:ln/>
+        </p:spPr>
+        <p:txBody>
+          <a:bodyPr wrap="square" lIns="0" tIns="0" rIns="0" bIns="0" rtlCol="0" anchor="t">
+            <a:normAutofit/>
+          </a:bodyPr>
+          <a:lstStyle/>
+          <a:p>
+            <a:pPr marL="203200" indent="-203200">
+              <a:spcAft>
+                <a:spcPts val="500"/>
+              </a:spcAft>
+              <a:buSzPct val="100000"/>
+              <a:buChar char="•"/>
+            </a:pPr>
+            <a:r>
+              <a:rPr lang="en-US" sz="1150" dirty="0">
+                <a:solidFill>
+                  <a:srgbClr val="FFFFFF"/>
+                </a:solidFill>
+                <a:latin typeface="Arial" pitchFamily="34" charset="0"/>
+                <a:ea typeface="Arial" pitchFamily="34" charset="-122"/>
+                <a:cs typeface="Arial" pitchFamily="34" charset="-120"/>
+              </a:rPr>
+              <a:t>20,000 users (threshold 8,000)</a:t>
+            </a:r>
+            <a:endParaRPr lang="en-US" sz="1150" dirty="0"/>
+          </a:p>
+          <a:p>
+            <a:pPr marL="203200" indent="-203200">
+              <a:spcAft>
+                <a:spcPts val="500"/>
+              </a:spcAft>
+              <a:buSzPct val="100000"/>
+              <a:buChar char="•"/>
+            </a:pPr>
+            <a:r>
+              <a:rPr lang="en-US" sz="1150" dirty="0">
+                <a:solidFill>
+                  <a:srgbClr val="FFFFFF"/>
+                </a:solidFill>
+                <a:latin typeface="Arial" pitchFamily="34" charset="0"/>
+                <a:ea typeface="Arial" pitchFamily="34" charset="-122"/>
+                <a:cs typeface="Arial" pitchFamily="34" charset="-120"/>
+              </a:rPr>
+              <a:t>800 paying Pro (threshold 240)</a:t>
+            </a:r>
+            <a:endParaRPr lang="en-US" sz="1150" dirty="0"/>
+          </a:p>
+          <a:p>
+            <a:pPr marL="203200" indent="-203200">
+              <a:spcAft>
+                <a:spcPts val="500"/>
+              </a:spcAft>
+              <a:buSzPct val="100000"/>
+              <a:buChar char="•"/>
+            </a:pPr>
+            <a:r>
+              <a:rPr lang="en-US" sz="1150" dirty="0">
+                <a:solidFill>
+                  <a:srgbClr val="FFFFFF"/>
+                </a:solidFill>
+                <a:latin typeface="Arial" pitchFamily="34" charset="0"/>
+                <a:ea typeface="Arial" pitchFamily="34" charset="-122"/>
+                <a:cs typeface="Arial" pitchFamily="34" charset="-120"/>
+              </a:rPr>
+              <a:t>MRR €8,073 (threshold €2,500)</a:t>
+            </a:r>
+            <a:endParaRPr lang="en-US" sz="1150" dirty="0"/>
+          </a:p>
+          <a:p>
+            <a:pPr marL="203200" indent="-203200">
+              <a:spcAft>
+                <a:spcPts val="500"/>
+              </a:spcAft>
+              <a:buSzPct val="100000"/>
+              <a:buChar char="•"/>
+            </a:pPr>
+            <a:r>
+              <a:rPr lang="en-US" sz="1150" dirty="0">
+                <a:solidFill>
+                  <a:srgbClr val="FFFFFF"/>
+                </a:solidFill>
+                <a:latin typeface="Arial" pitchFamily="34" charset="0"/>
+                <a:ea typeface="Arial" pitchFamily="34" charset="-122"/>
+                <a:cs typeface="Arial" pitchFamily="34" charset="-120"/>
+              </a:rPr>
+              <a:t>1 platform or education pilot; WortBild in ≥ 3 courses/classes</a:t>
+            </a:r>
+            <a:endParaRPr lang="en-US" sz="1150" dirty="0"/>
+          </a:p>
+        </p:txBody>
+      </p:sp>
+      <p:sp>
+        <p:nvSpPr>
+          <p:cNvPr id="28" name="Shape 25"/>
+          <p:cNvSpPr/>
+          <p:nvPr/>
+        </p:nvSpPr>
+        <p:spPr>
+          <a:xfrm>
+            <a:off x="6365596" y="4846320"/>
+            <a:ext cx="2268398" cy="0"/>
+          </a:xfrm>
+          <a:prstGeom prst="line">
+            <a:avLst/>
+          </a:prstGeom>
+          <a:noFill/>
+          <a:ln w="12700">
+            <a:solidFill>
+              <a:srgbClr val="2A2F3C"/>
+            </a:solidFill>
+            <a:prstDash val="solid"/>
+          </a:ln>
+        </p:spPr>
+      </p:sp>
+      <p:sp>
+        <p:nvSpPr>
+          <p:cNvPr id="29" name="Text 26"/>
+          <p:cNvSpPr txBox="1"/>
+          <p:nvPr/>
+        </p:nvSpPr>
+        <p:spPr>
+          <a:xfrm>
+            <a:off x="6365596" y="4910328"/>
+            <a:ext cx="2268398" cy="219456"/>
+          </a:xfrm>
+          <a:prstGeom prst="rect">
+            <a:avLst/>
+          </a:prstGeom>
+          <a:noFill/>
+          <a:ln/>
+        </p:spPr>
+        <p:txBody>
+          <a:bodyPr wrap="square" lIns="0" tIns="0" rIns="0" bIns="0" rtlCol="0" anchor="t">
+            <a:normAutofit/>
+          </a:bodyPr>
+          <a:lstStyle/>
+          <a:p>
+            <a:pPr indent="0" marL="0">
+              <a:buNone/>
+            </a:pPr>
+            <a:r>
+              <a:rPr lang="en-US" sz="950" b="1" spc="100" kern="0" dirty="0">
+                <a:solidFill>
+                  <a:srgbClr val="9AA3B5"/>
+                </a:solidFill>
+                <a:latin typeface="Arial" pitchFamily="34" charset="0"/>
+                <a:ea typeface="Arial" pitchFamily="34" charset="-122"/>
+                <a:cs typeface="Arial" pitchFamily="34" charset="-120"/>
+              </a:rPr>
+              <a:t>RELEASES</a:t>
+            </a:r>
+            <a:endParaRPr lang="en-US" sz="950" dirty="0"/>
+          </a:p>
+        </p:txBody>
+      </p:sp>
+      <p:sp>
+        <p:nvSpPr>
+          <p:cNvPr id="30" name="Text 27"/>
+          <p:cNvSpPr txBox="1"/>
+          <p:nvPr/>
+        </p:nvSpPr>
+        <p:spPr>
+          <a:xfrm>
+            <a:off x="6365596" y="5148072"/>
+            <a:ext cx="2268398" cy="457200"/>
+          </a:xfrm>
+          <a:prstGeom prst="rect">
+            <a:avLst/>
+          </a:prstGeom>
+          <a:noFill/>
+          <a:ln/>
+        </p:spPr>
+        <p:txBody>
+          <a:bodyPr wrap="square" lIns="0" tIns="0" rIns="0" bIns="0" rtlCol="0" anchor="t">
+            <a:normAutofit/>
+          </a:bodyPr>
+          <a:lstStyle/>
+          <a:p>
+            <a:pPr indent="0" marL="0">
+              <a:buNone/>
+            </a:pPr>
+            <a:r>
+              <a:rPr lang="en-US" sz="1100" b="1" dirty="0">
+                <a:solidFill>
+                  <a:srgbClr val="FFD166"/>
+                </a:solidFill>
+                <a:latin typeface="Arial" pitchFamily="34" charset="0"/>
+                <a:ea typeface="Arial" pitchFamily="34" charset="-122"/>
+                <a:cs typeface="Arial" pitchFamily="34" charset="-120"/>
+              </a:rPr>
+              <a:t>DE/EN expansion, platform talks</a:t>
+            </a:r>
+            <a:endParaRPr lang="en-US" sz="1100" dirty="0"/>
+          </a:p>
+        </p:txBody>
+      </p:sp>
+      <p:sp>
+        <p:nvSpPr>
+          <p:cNvPr id="31" name="Shape 28"/>
+          <p:cNvSpPr/>
+          <p:nvPr/>
+        </p:nvSpPr>
+        <p:spPr>
+          <a:xfrm>
+            <a:off x="9063761" y="1444752"/>
+            <a:ext cx="2487854" cy="347472"/>
+          </a:xfrm>
+          <a:prstGeom prst="roundRect">
+            <a:avLst>
+              <a:gd name="adj" fmla="val 50000"/>
+            </a:avLst>
+          </a:prstGeom>
+          <a:solidFill>
+            <a:srgbClr val="1F2330"/>
+          </a:solidFill>
+          <a:ln w="12700">
+            <a:solidFill>
+              <a:srgbClr val="5AD1FF"/>
+            </a:solidFill>
+            <a:prstDash val="solid"/>
+          </a:ln>
+        </p:spPr>
+      </p:sp>
+      <p:sp>
+        <p:nvSpPr>
+          <p:cNvPr id="32" name="Text 29"/>
+          <p:cNvSpPr txBox="1"/>
+          <p:nvPr/>
+        </p:nvSpPr>
+        <p:spPr>
+          <a:xfrm>
+            <a:off x="9063761" y="1444752"/>
+            <a:ext cx="2487854" cy="347472"/>
+          </a:xfrm>
+          <a:prstGeom prst="rect">
+            <a:avLst/>
+          </a:prstGeom>
+          <a:noFill/>
+          <a:ln/>
+        </p:spPr>
+        <p:txBody>
+          <a:bodyPr wrap="square" lIns="0" tIns="0" rIns="0" bIns="0" rtlCol="0" anchor="ctr">
+            <a:normAutofit/>
+          </a:bodyPr>
+          <a:lstStyle/>
+          <a:p>
+            <a:pPr algn="ctr" indent="0" marL="0">
+              <a:buNone/>
+            </a:pPr>
+            <a:r>
+              <a:rPr lang="en-US" sz="1200" b="1" dirty="0">
+                <a:solidFill>
+                  <a:srgbClr val="5AD1FF"/>
+                </a:solidFill>
+                <a:latin typeface="Arial" pitchFamily="34" charset="0"/>
+                <a:ea typeface="Arial" pitchFamily="34" charset="-122"/>
+                <a:cs typeface="Arial" pitchFamily="34" charset="-120"/>
+              </a:rPr>
+              <a:t>G2  ·  Month 18</a:t>
+            </a:r>
+            <a:endParaRPr lang="en-US" sz="1200" dirty="0"/>
+          </a:p>
+        </p:txBody>
+      </p:sp>
+      <p:sp>
+        <p:nvSpPr>
+          <p:cNvPr id="33" name="Shape 30"/>
+          <p:cNvSpPr/>
+          <p:nvPr/>
+        </p:nvSpPr>
+        <p:spPr>
+          <a:xfrm>
+            <a:off x="8972321" y="1938528"/>
+            <a:ext cx="2670734" cy="3703320"/>
+          </a:xfrm>
+          <a:prstGeom prst="roundRect">
+            <a:avLst>
+              <a:gd name="adj" fmla="val 4109"/>
+            </a:avLst>
+          </a:prstGeom>
+          <a:solidFill>
+            <a:srgbClr val="181B23"/>
+          </a:solidFill>
+          <a:ln w="12700">
+            <a:solidFill>
+              <a:srgbClr val="181B23"/>
+            </a:solidFill>
+            <a:prstDash val="solid"/>
+          </a:ln>
+        </p:spPr>
+      </p:sp>
+      <p:sp>
+        <p:nvSpPr>
+          <p:cNvPr id="34" name="Text 31"/>
+          <p:cNvSpPr txBox="1"/>
+          <p:nvPr/>
+        </p:nvSpPr>
+        <p:spPr>
+          <a:xfrm>
+            <a:off x="9173489" y="2048256"/>
+            <a:ext cx="2268398" cy="365760"/>
+          </a:xfrm>
+          <a:prstGeom prst="rect">
+            <a:avLst/>
+          </a:prstGeom>
+          <a:noFill/>
+          <a:ln/>
+        </p:spPr>
+        <p:txBody>
+          <a:bodyPr wrap="square" lIns="0" tIns="0" rIns="0" bIns="0" rtlCol="0" anchor="t">
+            <a:normAutofit/>
+          </a:bodyPr>
+          <a:lstStyle/>
+          <a:p>
+            <a:pPr indent="0" marL="0">
+              <a:buNone/>
+            </a:pPr>
+            <a:r>
+              <a:rPr lang="en-US" sz="1500" b="1" dirty="0">
+                <a:solidFill>
+                  <a:srgbClr val="5AD1FF"/>
+                </a:solidFill>
+                <a:latin typeface="Arial" pitchFamily="34" charset="0"/>
+                <a:ea typeface="Arial" pitchFamily="34" charset="-122"/>
+                <a:cs typeface="Arial" pitchFamily="34" charset="-120"/>
+              </a:rPr>
+              <a:t>Follow-on round</a:t>
+            </a:r>
+            <a:endParaRPr lang="en-US" sz="1500" dirty="0"/>
+          </a:p>
+        </p:txBody>
+      </p:sp>
+      <p:sp>
+        <p:nvSpPr>
+          <p:cNvPr id="35" name="Text 32"/>
+          <p:cNvSpPr txBox="1"/>
+          <p:nvPr/>
+        </p:nvSpPr>
+        <p:spPr>
+          <a:xfrm>
+            <a:off x="9173489" y="2468880"/>
+            <a:ext cx="2268398" cy="2286000"/>
+          </a:xfrm>
+          <a:prstGeom prst="rect">
+            <a:avLst/>
+          </a:prstGeom>
+          <a:noFill/>
+          <a:ln/>
+        </p:spPr>
+        <p:txBody>
+          <a:bodyPr wrap="square" lIns="0" tIns="0" rIns="0" bIns="0" rtlCol="0" anchor="t">
+            <a:normAutofit/>
+          </a:bodyPr>
+          <a:lstStyle/>
+          <a:p>
+            <a:pPr marL="203200" indent="-203200">
+              <a:spcAft>
+                <a:spcPts val="500"/>
+              </a:spcAft>
+              <a:buSzPct val="100000"/>
+              <a:buChar char="•"/>
+            </a:pPr>
+            <a:r>
+              <a:rPr lang="en-US" sz="1150" dirty="0">
+                <a:solidFill>
+                  <a:srgbClr val="FFFFFF"/>
+                </a:solidFill>
+                <a:latin typeface="Arial" pitchFamily="34" charset="0"/>
+                <a:ea typeface="Arial" pitchFamily="34" charset="-122"/>
+                <a:cs typeface="Arial" pitchFamily="34" charset="-120"/>
+              </a:rPr>
+              <a:t>50,000 users (threshold 19,000)</a:t>
+            </a:r>
+            <a:endParaRPr lang="en-US" sz="1150" dirty="0"/>
+          </a:p>
+          <a:p>
+            <a:pPr marL="203200" indent="-203200">
+              <a:spcAft>
+                <a:spcPts val="500"/>
+              </a:spcAft>
+              <a:buSzPct val="100000"/>
+              <a:buChar char="•"/>
+            </a:pPr>
+            <a:r>
+              <a:rPr lang="en-US" sz="1150" dirty="0">
+                <a:solidFill>
+                  <a:srgbClr val="FFFFFF"/>
+                </a:solidFill>
+                <a:latin typeface="Arial" pitchFamily="34" charset="0"/>
+                <a:ea typeface="Arial" pitchFamily="34" charset="-122"/>
+                <a:cs typeface="Arial" pitchFamily="34" charset="-120"/>
+              </a:rPr>
+              <a:t>2,000 paying Pro (threshold 570)</a:t>
+            </a:r>
+            <a:endParaRPr lang="en-US" sz="1150" dirty="0"/>
+          </a:p>
+          <a:p>
+            <a:pPr marL="203200" indent="-203200">
+              <a:spcAft>
+                <a:spcPts val="500"/>
+              </a:spcAft>
+              <a:buSzPct val="100000"/>
+              <a:buChar char="•"/>
+            </a:pPr>
+            <a:r>
+              <a:rPr lang="en-US" sz="1150" dirty="0">
+                <a:solidFill>
+                  <a:srgbClr val="FFFFFF"/>
+                </a:solidFill>
+                <a:latin typeface="Arial" pitchFamily="34" charset="0"/>
+                <a:ea typeface="Arial" pitchFamily="34" charset="-122"/>
+                <a:cs typeface="Arial" pitchFamily="34" charset="-120"/>
+              </a:rPr>
+              <a:t>MRR €22,586 (threshold €6,495)</a:t>
+            </a:r>
+            <a:endParaRPr lang="en-US" sz="1150" dirty="0"/>
+          </a:p>
+          <a:p>
+            <a:pPr marL="203200" indent="-203200">
+              <a:spcAft>
+                <a:spcPts val="500"/>
+              </a:spcAft>
+              <a:buSzPct val="100000"/>
+              <a:buChar char="•"/>
+            </a:pPr>
+            <a:r>
+              <a:rPr lang="en-US" sz="1150" dirty="0">
+                <a:solidFill>
+                  <a:srgbClr val="FFFFFF"/>
+                </a:solidFill>
+                <a:latin typeface="Arial" pitchFamily="34" charset="0"/>
+                <a:ea typeface="Arial" pitchFamily="34" charset="-122"/>
+                <a:cs typeface="Arial" pitchFamily="34" charset="-120"/>
+              </a:rPr>
+              <a:t>Pro month-3 retention ≥ 75%; conversion ≥ 3% / 4%</a:t>
+            </a:r>
+            <a:endParaRPr lang="en-US" sz="1150" dirty="0"/>
+          </a:p>
+          <a:p>
+            <a:pPr marL="203200" indent="-203200">
+              <a:spcAft>
+                <a:spcPts val="500"/>
+              </a:spcAft>
+              <a:buSzPct val="100000"/>
+              <a:buChar char="•"/>
+            </a:pPr>
+            <a:r>
+              <a:rPr lang="en-US" sz="1150" dirty="0">
+                <a:solidFill>
+                  <a:srgbClr val="FFFFFF"/>
+                </a:solidFill>
+                <a:latin typeface="Arial" pitchFamily="34" charset="0"/>
+                <a:ea typeface="Arial" pitchFamily="34" charset="-122"/>
+                <a:cs typeface="Arial" pitchFamily="34" charset="-120"/>
+              </a:rPr>
+              <a:t>≥ 5 paying schools or courses</a:t>
+            </a:r>
+            <a:endParaRPr lang="en-US" sz="1150" dirty="0"/>
+          </a:p>
+        </p:txBody>
+      </p:sp>
+      <p:sp>
+        <p:nvSpPr>
+          <p:cNvPr id="36" name="Shape 33"/>
+          <p:cNvSpPr/>
+          <p:nvPr/>
+        </p:nvSpPr>
+        <p:spPr>
+          <a:xfrm>
+            <a:off x="9173489" y="4846320"/>
+            <a:ext cx="2268398" cy="0"/>
+          </a:xfrm>
+          <a:prstGeom prst="line">
+            <a:avLst/>
+          </a:prstGeom>
+          <a:noFill/>
+          <a:ln w="12700">
+            <a:solidFill>
+              <a:srgbClr val="2A2F3C"/>
+            </a:solidFill>
+            <a:prstDash val="solid"/>
+          </a:ln>
+        </p:spPr>
+      </p:sp>
+      <p:sp>
+        <p:nvSpPr>
+          <p:cNvPr id="37" name="Text 34"/>
+          <p:cNvSpPr txBox="1"/>
+          <p:nvPr/>
+        </p:nvSpPr>
+        <p:spPr>
+          <a:xfrm>
+            <a:off x="9173489" y="4910328"/>
+            <a:ext cx="2268398" cy="219456"/>
+          </a:xfrm>
+          <a:prstGeom prst="rect">
+            <a:avLst/>
+          </a:prstGeom>
+          <a:noFill/>
+          <a:ln/>
+        </p:spPr>
+        <p:txBody>
+          <a:bodyPr wrap="square" lIns="0" tIns="0" rIns="0" bIns="0" rtlCol="0" anchor="t">
+            <a:normAutofit/>
+          </a:bodyPr>
+          <a:lstStyle/>
+          <a:p>
+            <a:pPr indent="0" marL="0">
+              <a:buNone/>
+            </a:pPr>
+            <a:r>
+              <a:rPr lang="en-US" sz="950" b="1" spc="100" kern="0" dirty="0">
+                <a:solidFill>
+                  <a:srgbClr val="9AA3B5"/>
+                </a:solidFill>
+                <a:latin typeface="Arial" pitchFamily="34" charset="0"/>
+                <a:ea typeface="Arial" pitchFamily="34" charset="-122"/>
+                <a:cs typeface="Arial" pitchFamily="34" charset="-120"/>
+              </a:rPr>
+              <a:t>RELEASES</a:t>
+            </a:r>
+            <a:endParaRPr lang="en-US" sz="950" dirty="0"/>
+          </a:p>
+        </p:txBody>
+      </p:sp>
+      <p:sp>
+        <p:nvSpPr>
+          <p:cNvPr id="38" name="Text 35"/>
+          <p:cNvSpPr txBox="1"/>
+          <p:nvPr/>
+        </p:nvSpPr>
+        <p:spPr>
+          <a:xfrm>
+            <a:off x="9173489" y="5148072"/>
+            <a:ext cx="2268398" cy="457200"/>
+          </a:xfrm>
+          <a:prstGeom prst="rect">
+            <a:avLst/>
+          </a:prstGeom>
+          <a:noFill/>
+          <a:ln/>
+        </p:spPr>
+        <p:txBody>
+          <a:bodyPr wrap="square" lIns="0" tIns="0" rIns="0" bIns="0" rtlCol="0" anchor="t">
+            <a:normAutofit/>
+          </a:bodyPr>
+          <a:lstStyle/>
+          <a:p>
+            <a:pPr indent="0" marL="0">
+              <a:buNone/>
+            </a:pPr>
+            <a:r>
+              <a:rPr lang="en-US" sz="1100" b="1" dirty="0">
+                <a:solidFill>
+                  <a:srgbClr val="5AD1FF"/>
+                </a:solidFill>
+                <a:latin typeface="Arial" pitchFamily="34" charset="0"/>
+                <a:ea typeface="Arial" pitchFamily="34" charset="-122"/>
+                <a:cs typeface="Arial" pitchFamily="34" charset="-120"/>
+              </a:rPr>
+              <a:t>Seed round, build-out team from month 19, story engine/Studio</a:t>
+            </a:r>
+            <a:endParaRPr lang="en-US" sz="1100" dirty="0"/>
+          </a:p>
+        </p:txBody>
+      </p:sp>
+      <p:sp>
+        <p:nvSpPr>
+          <p:cNvPr id="39" name="Text 36"/>
+          <p:cNvSpPr txBox="1"/>
+          <p:nvPr/>
+        </p:nvSpPr>
+        <p:spPr>
+          <a:xfrm>
+            <a:off x="548640" y="5806440"/>
+            <a:ext cx="9997135" cy="457200"/>
+          </a:xfrm>
+          <a:prstGeom prst="rect">
+            <a:avLst/>
+          </a:prstGeom>
+          <a:noFill/>
+          <a:ln/>
+        </p:spPr>
+        <p:txBody>
+          <a:bodyPr wrap="square" lIns="0" tIns="0" rIns="0" bIns="0" rtlCol="0" anchor="t">
+            <a:normAutofit/>
+          </a:bodyPr>
+          <a:lstStyle/>
+          <a:p>
+            <a:pPr indent="0" marL="0">
+              <a:buNone/>
+            </a:pPr>
+            <a:r>
+              <a:rPr lang="en-US" sz="1100" i="1" dirty="0">
+                <a:solidFill>
+                  <a:srgbClr val="9AA3B5"/>
+                </a:solidFill>
+                <a:latin typeface="Arial" pitchFamily="34" charset="0"/>
+                <a:ea typeface="Arial" pitchFamily="34" charset="-122"/>
+                <a:cs typeface="Arial" pitchFamily="34" charset="-120"/>
+              </a:rPr>
+              <a:t>All values are targets (not yet achieved): target = base scenario, threshold = conservative scenario. A gate is met when the threshold is reached. Proposal – to be agreed with investors.</a:t>
+            </a:r>
+            <a:endParaRPr lang="en-US" sz="1100" dirty="0"/>
+          </a:p>
+        </p:txBody>
+      </p:sp>
+    </p:spTree>
+  </p:cSld>
+  <p:clrMapOvr>
+    <a:masterClrMapping/>
+  </p:clrMapOvr>
+</p:sld>
+</file>
+
+<file path=ppt/slides/slide19.xml><?xml version="1.0" encoding="utf-8"?>
+<p:sld xmlns:a="http://schemas.openxmlformats.org/drawingml/2006/main" xmlns:r="http://schemas.openxmlformats.org/officeDocument/2006/relationships" xmlns:p="http://schemas.openxmlformats.org/presentationml/2006/main">
+  <p:cSld name="Slide 19">
+    <p:bg>
+      <p:bgPr>
+        <a:solidFill>
+          <a:srgbClr val="0F1115"/>
+        </a:solidFill>
+      </p:bgPr>
+    </p:bg>
+    <p:spTree>
+      <p:nvGrpSpPr>
+        <p:cNvPr id="1" name=""/>
+        <p:cNvGrpSpPr/>
+        <p:nvPr/>
+      </p:nvGrpSpPr>
+      <p:grpSpPr>
+        <a:xfrm>
+          <a:off x="0" y="0"/>
+          <a:ext cx="0" cy="0"/>
+          <a:chOff x="0" y="0"/>
+          <a:chExt cx="0" cy="0"/>
+        </a:xfrm>
+      </p:grpSpPr>
       <p:pic>
         <p:nvPicPr>
           <p:cNvPr id="2" name="Image 0" descr="/home/user/Notion/live-fx/business/video/stills/en-16x9-6_9s.jpg">    </p:cNvPr>
@@ -16367,7 +21551,7 @@
                 <a:ea typeface="Arial" pitchFamily="34" charset="-122"/>
                 <a:cs typeface="Arial" pitchFamily="34" charset="-120"/>
               </a:rPr>
-              <a:t>Pre-seed: €500,000</a:t>
+              <a:t>Pre-seed: €250,000</a:t>
             </a:r>
             <a:endParaRPr lang="en-US" sz="1600" dirty="0"/>
           </a:p>
@@ -16408,7 +21592,7 @@
                 <a:ea typeface="Arial" pitchFamily="34" charset="-122"/>
                 <a:cs typeface="Arial" pitchFamily="34" charset="-120"/>
               </a:rPr>
-              <a:t>For LiveFX 2.0 and vision lines A–D (WortBild and the story engine first), 24 months. In parallel, open to acquisition talks (technology + team).</a:t>
+              <a:t>For 10% (pre-money €2.25M, post €2.5M) or a SAFE with a €2.25M cap. 18 months, lean: Pro subscription, mobile app/PWA, TR → DE/EN launch, WortBild.</a:t>
             </a:r>
             <a:endParaRPr lang="en-US" sz="1250" dirty="0"/>
           </a:p>
@@ -16476,7 +21660,7 @@
                 <a:ea typeface="Arial" pitchFamily="34" charset="-122"/>
                 <a:cs typeface="Arial" pitchFamily="34" charset="-120"/>
               </a:rPr>
-              <a:t>€500,000 pre-seed · 24 months · use of funds – Proposal – please confirm</a:t>
+              <a:t>€250,000 pre-seed · 18 months · use of funds – Proposal – review with tax/legal advisor</a:t>
             </a:r>
             <a:endParaRPr lang="en-US" sz="1200" dirty="0"/>
           </a:p>
@@ -16667,7 +21851,7 @@
                 <a:ea typeface="Arial" pitchFamily="34" charset="-122"/>
                 <a:cs typeface="Arial" pitchFamily="34" charset="-120"/>
               </a:rPr>
-              <a:t>Product &amp; engineering</a:t>
+              <a:t>Team &amp; product</a:t>
             </a:r>
             <a:endParaRPr lang="en-US" sz="1000" dirty="0"/>
           </a:p>
@@ -16708,7 +21892,7 @@
                 <a:ea typeface="Arial" pitchFamily="34" charset="-122"/>
                 <a:cs typeface="Arial" pitchFamily="34" charset="-120"/>
               </a:rPr>
-              <a:t>€250k · 50%</a:t>
+              <a:t>€125k · 50%</a:t>
             </a:r>
             <a:endParaRPr lang="en-US" sz="1000" dirty="0"/>
           </a:p>
@@ -16774,7 +21958,7 @@
                 <a:ea typeface="Arial" pitchFamily="34" charset="-122"/>
                 <a:cs typeface="Arial" pitchFamily="34" charset="-120"/>
               </a:rPr>
-              <a:t>Vision lines A–D</a:t>
+              <a:t>Go-to-market &amp; pilots</a:t>
             </a:r>
             <a:endParaRPr lang="en-US" sz="1000" dirty="0"/>
           </a:p>
@@ -16815,7 +21999,7 @@
                 <a:ea typeface="Arial" pitchFamily="34" charset="-122"/>
                 <a:cs typeface="Arial" pitchFamily="34" charset="-120"/>
               </a:rPr>
-              <a:t>€100k · 20%</a:t>
+              <a:t>€50k · 20%</a:t>
             </a:r>
             <a:endParaRPr lang="en-US" sz="1000" dirty="0"/>
           </a:p>
@@ -16881,7 +22065,7 @@
                 <a:ea typeface="Arial" pitchFamily="34" charset="-122"/>
                 <a:cs typeface="Arial" pitchFamily="34" charset="-120"/>
               </a:rPr>
-              <a:t>Go-to-market &amp; pilots</a:t>
+              <a:t>WortBild (line B)</a:t>
             </a:r>
             <a:endParaRPr lang="en-US" sz="1000" dirty="0"/>
           </a:p>
@@ -16922,7 +22106,7 @@
                 <a:ea typeface="Arial" pitchFamily="34" charset="-122"/>
                 <a:cs typeface="Arial" pitchFamily="34" charset="-120"/>
               </a:rPr>
-              <a:t>€75k · 15%</a:t>
+              <a:t>€37.5k · 15%</a:t>
             </a:r>
             <a:endParaRPr lang="en-US" sz="1000" dirty="0"/>
           </a:p>
@@ -16980,7 +22164,7 @@
               <a:buNone/>
             </a:pPr>
             <a:r>
-              <a:rPr lang="en-US" sz="900" b="1" dirty="0">
+              <a:rPr lang="en-US" sz="1000" b="1" dirty="0">
                 <a:solidFill>
                   <a:srgbClr val="FFFFFF"/>
                 </a:solidFill>
@@ -16988,9 +22172,9 @@
                 <a:ea typeface="Arial" pitchFamily="34" charset="-122"/>
                 <a:cs typeface="Arial" pitchFamily="34" charset="-120"/>
               </a:rPr>
-              <a:t>Legal, trademark, data protection</a:t>
-            </a:r>
-            <a:endParaRPr lang="en-US" sz="900" dirty="0"/>
+              <a:t>Legal, trademark, privacy</a:t>
+            </a:r>
+            <a:endParaRPr lang="en-US" sz="1000" dirty="0"/>
           </a:p>
         </p:txBody>
       </p:sp>
@@ -17029,7 +22213,7 @@
                 <a:ea typeface="Arial" pitchFamily="34" charset="-122"/>
                 <a:cs typeface="Arial" pitchFamily="34" charset="-120"/>
               </a:rPr>
-              <a:t>€50k · 10%</a:t>
+              <a:t>€25k · 10%</a:t>
             </a:r>
             <a:endParaRPr lang="en-US" sz="1000" dirty="0"/>
           </a:p>
@@ -17136,7 +22320,7 @@
                 <a:ea typeface="Arial" pitchFamily="34" charset="-122"/>
                 <a:cs typeface="Arial" pitchFamily="34" charset="-120"/>
               </a:rPr>
-              <a:t>€25k · 5%</a:t>
+              <a:t>€12.5k · 5%</a:t>
             </a:r>
             <a:endParaRPr lang="en-US" sz="1000" dirty="0"/>
           </a:p>
@@ -17284,7 +22468,7 @@
                 <a:ea typeface="Arial" pitchFamily="34" charset="-122"/>
                 <a:cs typeface="Arial" pitchFamily="34" charset="-120"/>
               </a:rPr>
-              <a:t>Confidential · October 2026  ·  LiveFX  ·  17</a:t>
+              <a:t>Confidential · October 2026  ·  LiveFX  ·  19</a:t>
             </a:r>
             <a:endParaRPr lang="en-US" sz="900" dirty="0"/>
           </a:p>
@@ -20268,7 +25452,7 @@
                 <a:ea typeface="Arial" pitchFamily="34" charset="-122"/>
                 <a:cs typeface="Arial" pitchFamily="34" charset="-120"/>
               </a:rPr>
-              <a:t>The product today – version 2.0</a:t>
+              <a:t>The product today – version 2.1</a:t>
             </a:r>
             <a:endParaRPr lang="en-US" sz="3200" dirty="0"/>
           </a:p>
@@ -20521,7 +25705,7 @@
                 <a:ea typeface="Arial" pitchFamily="34" charset="-122"/>
                 <a:cs typeface="Arial" pitchFamily="34" charset="-120"/>
               </a:rPr>
-              <a:t>✨</a:t>
+              <a:t>⚡</a:t>
             </a:r>
             <a:endParaRPr lang="en-US" sz="2000" dirty="0"/>
           </a:p>
@@ -20562,7 +25746,7 @@
                 <a:ea typeface="Arial" pitchFamily="34" charset="-122"/>
                 <a:cs typeface="Arial" pitchFamily="34" charset="-120"/>
               </a:rPr>
-              <a:t>Effect engine v2</a:t>
+              <a:t>Effects &amp; performance</a:t>
             </a:r>
             <a:endParaRPr lang="en-US" sz="1400" dirty="0"/>
           </a:p>
@@ -20603,7 +25787,7 @@
                 <a:ea typeface="Arial" pitchFamily="34" charset="-122"/>
                 <a:cs typeface="Arial" pitchFamily="34" charset="-120"/>
               </a:rPr>
-              <a:t>Canvas particles with physics (60 fps), neon/glitch text, lower thirds, combos, 4 themes</a:t>
+              <a:t>Canvas particles (60 fps), neon/glitch/sticker text, lower thirds, combos, 4 themes; performance mode: frame time −63 to −69%</a:t>
             </a:r>
             <a:endParaRPr lang="en-US" sz="1100" dirty="0"/>
           </a:p>
@@ -20899,7 +26083,7 @@
                 <a:ea typeface="Arial" pitchFamily="34" charset="-122"/>
                 <a:cs typeface="Arial" pitchFamily="34" charset="-120"/>
               </a:rPr>
-              <a:t>Türkçe 85 · Deutsch 49 · English 50 · Family &amp; Kids 27 · Gaming 27 – plus GIF search</a:t>
+              <a:t>Türkçe 85 · Deutsch 49 · English 50 · Family &amp; Kids 27 · Gaming 27 – plus text sticker packs TR/DE/EN</a:t>
             </a:r>
             <a:endParaRPr lang="en-US" sz="1100" dirty="0"/>
           </a:p>
@@ -20965,7 +26149,7 @@
                 <a:ea typeface="Arial" pitchFamily="34" charset="-122"/>
                 <a:cs typeface="Arial" pitchFamily="34" charset="-120"/>
               </a:rPr>
-              <a:t>🔊</a:t>
+              <a:t>✨</a:t>
             </a:r>
             <a:endParaRPr lang="en-US" sz="2000" dirty="0"/>
           </a:p>
@@ -21006,7 +26190,7 @@
                 <a:ea typeface="Arial" pitchFamily="34" charset="-122"/>
                 <a:cs typeface="Arial" pitchFamily="34" charset="-120"/>
               </a:rPr>
-              <a:t>Sound engine</a:t>
+              <a:t>Stickers &amp; GIFs</a:t>
             </a:r>
             <a:endParaRPr lang="en-US" sz="1400" dirty="0"/>
           </a:p>
@@ -21047,7 +26231,7 @@
                 <a:ea typeface="Arial" pitchFamily="34" charset="-122"/>
                 <a:cs typeface="Arial" pitchFamily="34" charset="-120"/>
               </a:rPr>
-              <a:t>38 synthesized sounds (no license fees), mixer with limiter, ducking, stereo, reverb</a:t>
+              <a:t>143 free stickers (MIT licence, 119 animated) · safe GIF search KLIPY/GIPHY with content filter, GIFs linked, not stored</a:t>
             </a:r>
             <a:endParaRPr lang="en-US" sz="1100" dirty="0"/>
           </a:p>
@@ -21113,7 +26297,7 @@
                 <a:ea typeface="Arial" pitchFamily="34" charset="-122"/>
                 <a:cs typeface="Arial" pitchFamily="34" charset="-120"/>
               </a:rPr>
-              <a:t>💬</a:t>
+              <a:t>🔊</a:t>
             </a:r>
             <a:endParaRPr lang="en-US" sz="2000" dirty="0"/>
           </a:p>
@@ -21154,7 +26338,7 @@
                 <a:ea typeface="Arial" pitchFamily="34" charset="-122"/>
                 <a:cs typeface="Arial" pitchFamily="34" charset="-120"/>
               </a:rPr>
-              <a:t>Viewer triggers</a:t>
+              <a:t>Sound engine</a:t>
             </a:r>
             <a:endParaRPr lang="en-US" sz="1400" dirty="0"/>
           </a:p>
@@ -21195,7 +26379,7 @@
                 <a:ea typeface="Arial" pitchFamily="34" charset="-122"/>
                 <a:cs typeface="Arial" pitchFamily="34" charset="-120"/>
               </a:rPr>
-              <a:t>Twitch chat, YouTube chat, gift webhook (TikTok via TikFinity / Streamer.bot)</a:t>
+              <a:t>38 synthesized sounds (no license fees), mixer with limiter, ducking, stereo, reverb</a:t>
             </a:r>
             <a:endParaRPr lang="en-US" sz="1100" dirty="0"/>
           </a:p>
@@ -21450,7 +26634,7 @@
                 <a:ea typeface="Arial" pitchFamily="34" charset="-122"/>
                 <a:cs typeface="Arial" pitchFamily="34" charset="-120"/>
               </a:rPr>
-              <a:t>Open API</a:t>
+              <a:t>Viewers &amp; open API</a:t>
             </a:r>
             <a:endParaRPr lang="en-US" sz="1400" dirty="0"/>
           </a:p>
@@ -21491,7 +26675,7 @@
                 <a:ea typeface="Arial" pitchFamily="34" charset="-122"/>
                 <a:cs typeface="Arial" pitchFamily="34" charset="-120"/>
               </a:rPr>
-              <a:t>Token-secured HTTP API (Stream Deck, chat bots, external ASR), 240+ automated tests</a:t>
+              <a:t>Twitch/YouTube chat, gift webhook (TikFinity / Streamer.bot), token-secured HTTP API, 575+ automated tests</a:t>
             </a:r>
             <a:endParaRPr lang="en-US" sz="1100" dirty="0"/>
           </a:p>
@@ -24659,7 +29843,7 @@
                 <a:ea typeface="Arial" pitchFamily="34" charset="-122"/>
                 <a:cs typeface="Arial" pitchFamily="34" charset="-120"/>
               </a:rPr>
-              <a:t>2.0</a:t>
+              <a:t>2.1</a:t>
             </a:r>
             <a:endParaRPr lang="en-US" sz="3800" dirty="0"/>
           </a:p>
@@ -24700,7 +29884,7 @@
                 <a:ea typeface="Arial" pitchFamily="34" charset="-122"/>
                 <a:cs typeface="Arial" pitchFamily="34" charset="-120"/>
               </a:rPr>
-              <a:t>current version (releases 0.1 → 2.0), 240+ automated tests, guides in DE/TR</a:t>
+              <a:t>current version (releases 0.1 → 2.1), 575+ automated tests, guides in DE/TR</a:t>
             </a:r>
             <a:endParaRPr lang="en-US" sz="1200" dirty="0"/>
           </a:p>
@@ -24782,7 +29966,7 @@
                 <a:ea typeface="Arial" pitchFamily="34" charset="-122"/>
                 <a:cs typeface="Arial" pitchFamily="34" charset="-120"/>
               </a:rPr>
-              <a:t>triggers in 5 packs, 3 story packs, 38 sounds, 13 scenes – in 3 languages</a:t>
+              <a:t>triggers in 5 packs + 143 free stickers, 38 sounds, 13 scenes – in 3 languages</a:t>
             </a:r>
             <a:endParaRPr lang="en-US" sz="1200" dirty="0"/>
           </a:p>
